--- a/docs/sales-collateral/Pulse-Sales-Deck.pptx
+++ b/docs/sales-collateral/Pulse-Sales-Deck.pptx
@@ -17,9 +17,10 @@
     <p:sldId id="265" r:id="rId11"/>
     <p:sldId id="266" r:id="rId12"/>
     <p:sldId id="267" r:id="rId13"/>
+    <p:sldId id="268" r:id="rId14"/>
   </p:sldIdLst>
   <p:notesMasterIdLst>
-    <p:notesMasterId r:id="rId14"/>
+    <p:notesMasterId r:id="rId15"/>
   </p:notesMasterIdLst>
   <p:sldSz cx="12188952" cy="6858000"/>
   <p:notesSz cx="6858000" cy="12188952"/>
@@ -801,6 +802,94 @@
             <a:fld id="{F7021451-1387-4CA6-816F-3879F97B5CBC}" type="slidenum">
               <a:rPr lang="en-US"/>
               <a:t>12</a:t>
+            </a:fld>
+            <a:endParaRPr lang="en-US"/>
+          </a:p>
+        </p:txBody>
+      </p:sp>
+    </p:spTree>
+    <p:extLst>
+      <p:ext uri="{BB962C8B-B14F-4D97-AF65-F5344CB8AC3E}">
+        <p14:creationId xmlns:p14="http://schemas.microsoft.com/office/powerpoint/2010/main" val="1024086991"/>
+      </p:ext>
+    </p:extLst>
+  </p:cSld>
+  <p:clrMapOvr>
+    <a:masterClrMapping/>
+  </p:clrMapOvr>
+</p:notes>
+</file>
+
+<file path=ppt/notesSlides/notesSlide13.xml><?xml version="1.0" encoding="utf-8"?>
+<p:notes xmlns:a="http://schemas.openxmlformats.org/drawingml/2006/main" xmlns:r="http://schemas.openxmlformats.org/officeDocument/2006/relationships" xmlns:p="http://schemas.openxmlformats.org/presentationml/2006/main">
+  <p:cSld>
+    <p:spTree>
+      <p:nvGrpSpPr>
+        <p:cNvPr id="1" name=""/>
+        <p:cNvGrpSpPr/>
+        <p:nvPr/>
+      </p:nvGrpSpPr>
+      <p:grpSpPr>
+        <a:xfrm>
+          <a:off x="0" y="0"/>
+          <a:ext cx="0" cy="0"/>
+          <a:chOff x="0" y="0"/>
+          <a:chExt cx="0" cy="0"/>
+        </a:xfrm>
+      </p:grpSpPr>
+      <p:sp>
+        <p:nvSpPr>
+          <p:cNvPr id="2" name="Slide Image Placeholder 1"/>
+          <p:cNvSpPr>
+            <a:spLocks noGrp="1" noRot="1" noChangeAspect="1"/>
+          </p:cNvSpPr>
+          <p:nvPr>
+            <p:ph type="sldImg"/>
+          </p:nvPr>
+        </p:nvSpPr>
+        <p:spPr/>
+      </p:sp>
+      <p:sp>
+        <p:nvSpPr>
+          <p:cNvPr id="3" name="Notes Placeholder 2"/>
+          <p:cNvSpPr>
+            <a:spLocks noGrp="1"/>
+          </p:cNvSpPr>
+          <p:nvPr>
+            <p:ph type="body" idx="1"/>
+          </p:nvPr>
+        </p:nvSpPr>
+        <p:spPr/>
+        <p:txBody>
+          <a:bodyPr/>
+          <a:lstStyle/>
+          <a:p>
+            <a:r>
+              <a:rPr lang="en-US" dirty="0"/>
+              <a:t/>
+            </a:r>
+            <a:endParaRPr lang="en-US" dirty="0"/>
+          </a:p>
+        </p:txBody>
+      </p:sp>
+      <p:sp>
+        <p:nvSpPr>
+          <p:cNvPr id="4" name="Slide Number Placeholder 3"/>
+          <p:cNvSpPr>
+            <a:spLocks noGrp="1"/>
+          </p:cNvSpPr>
+          <p:nvPr>
+            <p:ph type="sldNum" sz="quarter" idx="10"/>
+          </p:nvPr>
+        </p:nvSpPr>
+        <p:spPr/>
+        <p:txBody>
+          <a:bodyPr/>
+          <a:lstStyle/>
+          <a:p>
+            <a:fld id="{F7021451-1387-4CA6-816F-3879F97B5CBC}" type="slidenum">
+              <a:rPr lang="en-US"/>
+              <a:t>13</a:t>
             </a:fld>
             <a:endParaRPr lang="en-US"/>
           </a:p>
@@ -4388,6 +4477,1289 @@
     <p:bg>
       <p:bgPr>
         <a:solidFill>
+          <a:srgbClr val="FFFFFF"/>
+        </a:solidFill>
+      </p:bgPr>
+    </p:bg>
+    <p:spTree>
+      <p:nvGrpSpPr>
+        <p:cNvPr id="1" name=""/>
+        <p:cNvGrpSpPr/>
+        <p:nvPr/>
+      </p:nvGrpSpPr>
+      <p:grpSpPr>
+        <a:xfrm>
+          <a:off x="0" y="0"/>
+          <a:ext cx="0" cy="0"/>
+          <a:chOff x="0" y="0"/>
+          <a:chExt cx="0" cy="0"/>
+        </a:xfrm>
+      </p:grpSpPr>
+      <p:sp>
+        <p:nvSpPr>
+          <p:cNvPr id="2" name="Shape 0"/>
+          <p:cNvSpPr/>
+          <p:nvPr/>
+        </p:nvSpPr>
+        <p:spPr>
+          <a:xfrm>
+            <a:off x="0" y="0"/>
+            <a:ext cx="12188952" cy="1051560"/>
+          </a:xfrm>
+          <a:prstGeom prst="rect">
+            <a:avLst/>
+          </a:prstGeom>
+          <a:solidFill>
+            <a:srgbClr val="7C3AED"/>
+          </a:solidFill>
+          <a:ln/>
+        </p:spPr>
+      </p:sp>
+      <p:sp>
+        <p:nvSpPr>
+          <p:cNvPr id="3" name="Text 1"/>
+          <p:cNvSpPr/>
+          <p:nvPr/>
+        </p:nvSpPr>
+        <p:spPr>
+          <a:xfrm>
+            <a:off x="457200" y="73152"/>
+            <a:ext cx="8686800" cy="594360"/>
+          </a:xfrm>
+          <a:prstGeom prst="rect">
+            <a:avLst/>
+          </a:prstGeom>
+          <a:noFill/>
+          <a:ln/>
+        </p:spPr>
+        <p:txBody>
+          <a:bodyPr wrap="square" rtlCol="0" anchor="ctr"/>
+          <a:lstStyle/>
+          <a:p>
+            <a:pPr indent="0" marL="0">
+              <a:buNone/>
+            </a:pPr>
+            <a:r>
+              <a:rPr lang="en-US" sz="2600" b="1" dirty="0">
+                <a:solidFill>
+                  <a:srgbClr val="FFFFFF"/>
+                </a:solidFill>
+                <a:latin typeface="Segoe UI" pitchFamily="34" charset="0"/>
+                <a:ea typeface="Segoe UI" pitchFamily="34" charset="-122"/>
+                <a:cs typeface="Segoe UI" pitchFamily="34" charset="-120"/>
+              </a:rPr>
+              <a:t>The Howler One stack</a:t>
+            </a:r>
+            <a:endParaRPr lang="en-US" sz="2600" dirty="0"/>
+          </a:p>
+        </p:txBody>
+      </p:sp>
+      <p:sp>
+        <p:nvSpPr>
+          <p:cNvPr id="4" name="Text 2"/>
+          <p:cNvSpPr/>
+          <p:nvPr/>
+        </p:nvSpPr>
+        <p:spPr>
+          <a:xfrm>
+            <a:off x="475488" y="566928"/>
+            <a:ext cx="10972800" cy="365760"/>
+          </a:xfrm>
+          <a:prstGeom prst="rect">
+            <a:avLst/>
+          </a:prstGeom>
+          <a:noFill/>
+          <a:ln/>
+        </p:spPr>
+        <p:txBody>
+          <a:bodyPr wrap="square" rtlCol="0" anchor="ctr"/>
+          <a:lstStyle/>
+          <a:p>
+            <a:pPr indent="0" marL="0">
+              <a:buNone/>
+            </a:pPr>
+            <a:r>
+              <a:rPr lang="en-US" sz="1200" i="1" dirty="0">
+                <a:solidFill>
+                  <a:srgbClr val="FFFFFF">
+                    <a:alpha val="88000"/>
+                  </a:srgbClr>
+                </a:solidFill>
+                <a:latin typeface="Segoe UI" pitchFamily="34" charset="0"/>
+                <a:ea typeface="Segoe UI" pitchFamily="34" charset="-122"/>
+                <a:cs typeface="Segoe UI" pitchFamily="34" charset="-120"/>
+              </a:rPr>
+              <a:t>one experience, one dataset, one partner — Pulse is the brain of the whole thing</a:t>
+            </a:r>
+            <a:endParaRPr lang="en-US" sz="1200" dirty="0"/>
+          </a:p>
+        </p:txBody>
+      </p:sp>
+      <p:sp>
+        <p:nvSpPr>
+          <p:cNvPr id="5" name="Shape 3"/>
+          <p:cNvSpPr/>
+          <p:nvPr/>
+        </p:nvSpPr>
+        <p:spPr>
+          <a:xfrm>
+            <a:off x="0" y="1051560"/>
+            <a:ext cx="4062984" cy="41148"/>
+          </a:xfrm>
+          <a:prstGeom prst="rect">
+            <a:avLst/>
+          </a:prstGeom>
+          <a:solidFill>
+            <a:srgbClr val="FF385C"/>
+          </a:solidFill>
+          <a:ln/>
+        </p:spPr>
+      </p:sp>
+      <p:sp>
+        <p:nvSpPr>
+          <p:cNvPr id="6" name="Shape 4"/>
+          <p:cNvSpPr/>
+          <p:nvPr/>
+        </p:nvSpPr>
+        <p:spPr>
+          <a:xfrm>
+            <a:off x="4062984" y="1051560"/>
+            <a:ext cx="4062984" cy="41148"/>
+          </a:xfrm>
+          <a:prstGeom prst="rect">
+            <a:avLst/>
+          </a:prstGeom>
+          <a:solidFill>
+            <a:srgbClr val="FF6B35"/>
+          </a:solidFill>
+          <a:ln/>
+        </p:spPr>
+      </p:sp>
+      <p:sp>
+        <p:nvSpPr>
+          <p:cNvPr id="7" name="Shape 5"/>
+          <p:cNvSpPr/>
+          <p:nvPr/>
+        </p:nvSpPr>
+        <p:spPr>
+          <a:xfrm>
+            <a:off x="8125968" y="1051560"/>
+            <a:ext cx="4062984" cy="41148"/>
+          </a:xfrm>
+          <a:prstGeom prst="rect">
+            <a:avLst/>
+          </a:prstGeom>
+          <a:solidFill>
+            <a:srgbClr val="7C3AED"/>
+          </a:solidFill>
+          <a:ln/>
+        </p:spPr>
+      </p:sp>
+      <p:sp>
+        <p:nvSpPr>
+          <p:cNvPr id="8" name="Text 6"/>
+          <p:cNvSpPr/>
+          <p:nvPr/>
+        </p:nvSpPr>
+        <p:spPr>
+          <a:xfrm>
+            <a:off x="457200" y="6446520"/>
+            <a:ext cx="4572000" cy="274320"/>
+          </a:xfrm>
+          <a:prstGeom prst="rect">
+            <a:avLst/>
+          </a:prstGeom>
+          <a:noFill/>
+          <a:ln/>
+        </p:spPr>
+        <p:txBody>
+          <a:bodyPr wrap="square" rtlCol="0" anchor="ctr"/>
+          <a:lstStyle/>
+          <a:p>
+            <a:pPr indent="0" marL="0">
+              <a:buNone/>
+            </a:pPr>
+            <a:r>
+              <a:rPr lang="en-US" sz="900" b="1" dirty="0">
+                <a:solidFill>
+                  <a:srgbClr val="9A97AD"/>
+                </a:solidFill>
+                <a:latin typeface="Segoe UI" pitchFamily="34" charset="0"/>
+                <a:ea typeface="Segoe UI" pitchFamily="34" charset="-122"/>
+                <a:cs typeface="Segoe UI" pitchFamily="34" charset="-120"/>
+              </a:rPr>
+              <a:t>Pulse</a:t>
+            </a:r>
+            <a:pPr indent="0" marL="0">
+              <a:buNone/>
+            </a:pPr>
+            <a:r>
+              <a:rPr lang="en-US" sz="900" dirty="0">
+                <a:solidFill>
+                  <a:srgbClr val="9A97AD"/>
+                </a:solidFill>
+                <a:latin typeface="Segoe UI" pitchFamily="34" charset="0"/>
+                <a:ea typeface="Segoe UI" pitchFamily="34" charset="-122"/>
+                <a:cs typeface="Segoe UI" pitchFamily="34" charset="-120"/>
+              </a:rPr>
+              <a:t>  ·  The Experience OS by Howler</a:t>
+            </a:r>
+            <a:endParaRPr lang="en-US" sz="900" dirty="0"/>
+          </a:p>
+        </p:txBody>
+      </p:sp>
+      <p:sp>
+        <p:nvSpPr>
+          <p:cNvPr id="9" name="Text 7"/>
+          <p:cNvSpPr/>
+          <p:nvPr/>
+        </p:nvSpPr>
+        <p:spPr>
+          <a:xfrm>
+            <a:off x="5029200" y="6446520"/>
+            <a:ext cx="2743200" cy="274320"/>
+          </a:xfrm>
+          <a:prstGeom prst="rect">
+            <a:avLst/>
+          </a:prstGeom>
+          <a:noFill/>
+          <a:ln/>
+        </p:spPr>
+        <p:txBody>
+          <a:bodyPr wrap="square" rtlCol="0" anchor="ctr"/>
+          <a:lstStyle/>
+          <a:p>
+            <a:pPr algn="ctr" indent="0" marL="0">
+              <a:buNone/>
+            </a:pPr>
+            <a:r>
+              <a:rPr lang="en-US" sz="900" dirty="0">
+                <a:solidFill>
+                  <a:srgbClr val="9A97AD"/>
+                </a:solidFill>
+                <a:latin typeface="Segoe UI" pitchFamily="34" charset="0"/>
+                <a:ea typeface="Segoe UI" pitchFamily="34" charset="-122"/>
+                <a:cs typeface="Segoe UI" pitchFamily="34" charset="-120"/>
+              </a:rPr>
+              <a:t>howler-pulse-v2.onrender.com</a:t>
+            </a:r>
+            <a:endParaRPr lang="en-US" sz="900" dirty="0"/>
+          </a:p>
+        </p:txBody>
+      </p:sp>
+      <p:sp>
+        <p:nvSpPr>
+          <p:cNvPr id="10" name="Text 8"/>
+          <p:cNvSpPr/>
+          <p:nvPr/>
+        </p:nvSpPr>
+        <p:spPr>
+          <a:xfrm>
+            <a:off x="11247120" y="6446520"/>
+            <a:ext cx="548640" cy="274320"/>
+          </a:xfrm>
+          <a:prstGeom prst="rect">
+            <a:avLst/>
+          </a:prstGeom>
+          <a:noFill/>
+          <a:ln/>
+        </p:spPr>
+        <p:txBody>
+          <a:bodyPr wrap="square" rtlCol="0" anchor="ctr"/>
+          <a:lstStyle/>
+          <a:p>
+            <a:pPr algn="r" indent="0" marL="0">
+              <a:buNone/>
+            </a:pPr>
+            <a:r>
+              <a:rPr lang="en-US" sz="900" dirty="0">
+                <a:solidFill>
+                  <a:srgbClr val="9A97AD"/>
+                </a:solidFill>
+                <a:latin typeface="Segoe UI" pitchFamily="34" charset="0"/>
+                <a:ea typeface="Segoe UI" pitchFamily="34" charset="-122"/>
+                <a:cs typeface="Segoe UI" pitchFamily="34" charset="-120"/>
+              </a:rPr>
+              <a:t>12</a:t>
+            </a:r>
+            <a:endParaRPr lang="en-US" sz="900" dirty="0"/>
+          </a:p>
+        </p:txBody>
+      </p:sp>
+      <p:sp>
+        <p:nvSpPr>
+          <p:cNvPr id="11" name="Shape 9"/>
+          <p:cNvSpPr/>
+          <p:nvPr/>
+        </p:nvSpPr>
+        <p:spPr>
+          <a:xfrm>
+            <a:off x="457200" y="1371600"/>
+            <a:ext cx="2697480" cy="1828800"/>
+          </a:xfrm>
+          <a:prstGeom prst="roundRect">
+            <a:avLst>
+              <a:gd name="adj" fmla="val 5000"/>
+            </a:avLst>
+          </a:prstGeom>
+          <a:solidFill>
+            <a:srgbClr val="FBFAFF"/>
+          </a:solidFill>
+          <a:ln w="12700">
+            <a:solidFill>
+              <a:srgbClr val="ECE9F5"/>
+            </a:solidFill>
+            <a:prstDash val="solid"/>
+          </a:ln>
+        </p:spPr>
+      </p:sp>
+      <p:sp>
+        <p:nvSpPr>
+          <p:cNvPr id="12" name="Text 10"/>
+          <p:cNvSpPr/>
+          <p:nvPr/>
+        </p:nvSpPr>
+        <p:spPr>
+          <a:xfrm>
+            <a:off x="594360" y="1463040"/>
+            <a:ext cx="2423160" cy="502920"/>
+          </a:xfrm>
+          <a:prstGeom prst="rect">
+            <a:avLst/>
+          </a:prstGeom>
+          <a:noFill/>
+          <a:ln/>
+        </p:spPr>
+        <p:txBody>
+          <a:bodyPr wrap="square" rtlCol="0" anchor="ctr"/>
+          <a:lstStyle/>
+          <a:p>
+            <a:pPr indent="0" marL="0">
+              <a:buNone/>
+            </a:pPr>
+            <a:r>
+              <a:rPr lang="en-US" sz="1250" b="1" dirty="0">
+                <a:solidFill>
+                  <a:srgbClr val="1A1A2E"/>
+                </a:solidFill>
+                <a:latin typeface="Segoe UI" pitchFamily="34" charset="0"/>
+                <a:ea typeface="Segoe UI" pitchFamily="34" charset="-122"/>
+                <a:cs typeface="Segoe UI" pitchFamily="34" charset="-120"/>
+              </a:rPr>
+              <a:t>🎟 Ticketing</a:t>
+            </a:r>
+            <a:endParaRPr lang="en-US" sz="1250" dirty="0"/>
+          </a:p>
+        </p:txBody>
+      </p:sp>
+      <p:sp>
+        <p:nvSpPr>
+          <p:cNvPr id="13" name="Text 11"/>
+          <p:cNvSpPr/>
+          <p:nvPr/>
+        </p:nvSpPr>
+        <p:spPr>
+          <a:xfrm>
+            <a:off x="594360" y="1938528"/>
+            <a:ext cx="2423160" cy="1188720"/>
+          </a:xfrm>
+          <a:prstGeom prst="rect">
+            <a:avLst/>
+          </a:prstGeom>
+          <a:noFill/>
+          <a:ln/>
+        </p:spPr>
+        <p:txBody>
+          <a:bodyPr wrap="square" rtlCol="0" anchor="t"/>
+          <a:lstStyle/>
+          <a:p>
+            <a:pPr indent="0" marL="0">
+              <a:lnSpc>
+                <a:spcPts val="1250"/>
+              </a:lnSpc>
+              <a:buNone/>
+            </a:pPr>
+            <a:r>
+              <a:rPr lang="en-US" sz="950" dirty="0">
+                <a:solidFill>
+                  <a:srgbClr val="55556D"/>
+                </a:solidFill>
+                <a:latin typeface="Segoe UI" pitchFamily="34" charset="0"/>
+                <a:ea typeface="Segoe UI" pitchFamily="34" charset="-122"/>
+                <a:cs typeface="Segoe UI" pitchFamily="34" charset="-120"/>
+              </a:rPr>
+              <a:t>Ticket sales, tiers &amp; releases, access control and scanning — every buyer and every entry, captured from minute one.</a:t>
+            </a:r>
+            <a:endParaRPr lang="en-US" sz="950" dirty="0"/>
+          </a:p>
+        </p:txBody>
+      </p:sp>
+      <p:sp>
+        <p:nvSpPr>
+          <p:cNvPr id="14" name="Text 12"/>
+          <p:cNvSpPr/>
+          <p:nvPr/>
+        </p:nvSpPr>
+        <p:spPr>
+          <a:xfrm>
+            <a:off x="1536192" y="3200400"/>
+            <a:ext cx="548640" cy="365760"/>
+          </a:xfrm>
+          <a:prstGeom prst="rect">
+            <a:avLst/>
+          </a:prstGeom>
+          <a:noFill/>
+          <a:ln/>
+        </p:spPr>
+        <p:txBody>
+          <a:bodyPr wrap="square" rtlCol="0" anchor="ctr"/>
+          <a:lstStyle/>
+          <a:p>
+            <a:pPr algn="ctr" indent="0" marL="0">
+              <a:buNone/>
+            </a:pPr>
+            <a:r>
+              <a:rPr lang="en-US" sz="1800" b="1" dirty="0">
+                <a:solidFill>
+                  <a:srgbClr val="A89DDD"/>
+                </a:solidFill>
+                <a:latin typeface="Segoe UI" pitchFamily="34" charset="0"/>
+                <a:ea typeface="Segoe UI" pitchFamily="34" charset="-122"/>
+                <a:cs typeface="Segoe UI" pitchFamily="34" charset="-120"/>
+              </a:rPr>
+              <a:t>↓</a:t>
+            </a:r>
+            <a:endParaRPr lang="en-US" sz="1800" dirty="0"/>
+          </a:p>
+        </p:txBody>
+      </p:sp>
+      <p:sp>
+        <p:nvSpPr>
+          <p:cNvPr id="15" name="Shape 13"/>
+          <p:cNvSpPr/>
+          <p:nvPr/>
+        </p:nvSpPr>
+        <p:spPr>
+          <a:xfrm>
+            <a:off x="3337560" y="1371600"/>
+            <a:ext cx="2697480" cy="1828800"/>
+          </a:xfrm>
+          <a:prstGeom prst="roundRect">
+            <a:avLst>
+              <a:gd name="adj" fmla="val 5000"/>
+            </a:avLst>
+          </a:prstGeom>
+          <a:solidFill>
+            <a:srgbClr val="FBFAFF"/>
+          </a:solidFill>
+          <a:ln w="12700">
+            <a:solidFill>
+              <a:srgbClr val="ECE9F5"/>
+            </a:solidFill>
+            <a:prstDash val="solid"/>
+          </a:ln>
+        </p:spPr>
+      </p:sp>
+      <p:sp>
+        <p:nvSpPr>
+          <p:cNvPr id="16" name="Text 14"/>
+          <p:cNvSpPr/>
+          <p:nvPr/>
+        </p:nvSpPr>
+        <p:spPr>
+          <a:xfrm>
+            <a:off x="3474720" y="1463040"/>
+            <a:ext cx="2423160" cy="502920"/>
+          </a:xfrm>
+          <a:prstGeom prst="rect">
+            <a:avLst/>
+          </a:prstGeom>
+          <a:noFill/>
+          <a:ln/>
+        </p:spPr>
+        <p:txBody>
+          <a:bodyPr wrap="square" rtlCol="0" anchor="ctr"/>
+          <a:lstStyle/>
+          <a:p>
+            <a:pPr indent="0" marL="0">
+              <a:buNone/>
+            </a:pPr>
+            <a:r>
+              <a:rPr lang="en-US" sz="1250" b="1" dirty="0">
+                <a:solidFill>
+                  <a:srgbClr val="1A1A2E"/>
+                </a:solidFill>
+                <a:latin typeface="Segoe UI" pitchFamily="34" charset="0"/>
+                <a:ea typeface="Segoe UI" pitchFamily="34" charset="-122"/>
+                <a:cs typeface="Segoe UI" pitchFamily="34" charset="-120"/>
+              </a:rPr>
+              <a:t>💳 Cashless Payments</a:t>
+            </a:r>
+            <a:endParaRPr lang="en-US" sz="1250" dirty="0"/>
+          </a:p>
+        </p:txBody>
+      </p:sp>
+      <p:sp>
+        <p:nvSpPr>
+          <p:cNvPr id="17" name="Text 15"/>
+          <p:cNvSpPr/>
+          <p:nvPr/>
+        </p:nvSpPr>
+        <p:spPr>
+          <a:xfrm>
+            <a:off x="3474720" y="1938528"/>
+            <a:ext cx="2423160" cy="1188720"/>
+          </a:xfrm>
+          <a:prstGeom prst="rect">
+            <a:avLst/>
+          </a:prstGeom>
+          <a:noFill/>
+          <a:ln/>
+        </p:spPr>
+        <p:txBody>
+          <a:bodyPr wrap="square" rtlCol="0" anchor="t"/>
+          <a:lstStyle/>
+          <a:p>
+            <a:pPr indent="0" marL="0">
+              <a:lnSpc>
+                <a:spcPts val="1250"/>
+              </a:lnSpc>
+              <a:buNone/>
+            </a:pPr>
+            <a:r>
+              <a:rPr lang="en-US" sz="950" dirty="0">
+                <a:solidFill>
+                  <a:srgbClr val="55556D"/>
+                </a:solidFill>
+                <a:latin typeface="Segoe UI" pitchFamily="34" charset="0"/>
+                <a:ea typeface="Segoe UI" pitchFamily="34" charset="-122"/>
+                <a:cs typeface="Segoe UI" pitchFamily="34" charset="-120"/>
+              </a:rPr>
+              <a:t>Tap-to-pay across bars and vendors: faster queues, higher spend, zero cash risk — every transaction is live data.</a:t>
+            </a:r>
+            <a:endParaRPr lang="en-US" sz="950" dirty="0"/>
+          </a:p>
+        </p:txBody>
+      </p:sp>
+      <p:sp>
+        <p:nvSpPr>
+          <p:cNvPr id="18" name="Text 16"/>
+          <p:cNvSpPr/>
+          <p:nvPr/>
+        </p:nvSpPr>
+        <p:spPr>
+          <a:xfrm>
+            <a:off x="4416552" y="3200400"/>
+            <a:ext cx="548640" cy="365760"/>
+          </a:xfrm>
+          <a:prstGeom prst="rect">
+            <a:avLst/>
+          </a:prstGeom>
+          <a:noFill/>
+          <a:ln/>
+        </p:spPr>
+        <p:txBody>
+          <a:bodyPr wrap="square" rtlCol="0" anchor="ctr"/>
+          <a:lstStyle/>
+          <a:p>
+            <a:pPr algn="ctr" indent="0" marL="0">
+              <a:buNone/>
+            </a:pPr>
+            <a:r>
+              <a:rPr lang="en-US" sz="1800" b="1" dirty="0">
+                <a:solidFill>
+                  <a:srgbClr val="A89DDD"/>
+                </a:solidFill>
+                <a:latin typeface="Segoe UI" pitchFamily="34" charset="0"/>
+                <a:ea typeface="Segoe UI" pitchFamily="34" charset="-122"/>
+                <a:cs typeface="Segoe UI" pitchFamily="34" charset="-120"/>
+              </a:rPr>
+              <a:t>↓</a:t>
+            </a:r>
+            <a:endParaRPr lang="en-US" sz="1800" dirty="0"/>
+          </a:p>
+        </p:txBody>
+      </p:sp>
+      <p:sp>
+        <p:nvSpPr>
+          <p:cNvPr id="19" name="Shape 17"/>
+          <p:cNvSpPr/>
+          <p:nvPr/>
+        </p:nvSpPr>
+        <p:spPr>
+          <a:xfrm>
+            <a:off x="6217920" y="1371600"/>
+            <a:ext cx="2697480" cy="1828800"/>
+          </a:xfrm>
+          <a:prstGeom prst="roundRect">
+            <a:avLst>
+              <a:gd name="adj" fmla="val 5000"/>
+            </a:avLst>
+          </a:prstGeom>
+          <a:solidFill>
+            <a:srgbClr val="FBFAFF"/>
+          </a:solidFill>
+          <a:ln w="12700">
+            <a:solidFill>
+              <a:srgbClr val="ECE9F5"/>
+            </a:solidFill>
+            <a:prstDash val="solid"/>
+          </a:ln>
+        </p:spPr>
+      </p:sp>
+      <p:sp>
+        <p:nvSpPr>
+          <p:cNvPr id="20" name="Text 18"/>
+          <p:cNvSpPr/>
+          <p:nvPr/>
+        </p:nvSpPr>
+        <p:spPr>
+          <a:xfrm>
+            <a:off x="6355080" y="1463040"/>
+            <a:ext cx="2423160" cy="502920"/>
+          </a:xfrm>
+          <a:prstGeom prst="rect">
+            <a:avLst/>
+          </a:prstGeom>
+          <a:noFill/>
+          <a:ln/>
+        </p:spPr>
+        <p:txBody>
+          <a:bodyPr wrap="square" rtlCol="0" anchor="ctr"/>
+          <a:lstStyle/>
+          <a:p>
+            <a:pPr indent="0" marL="0">
+              <a:buNone/>
+            </a:pPr>
+            <a:r>
+              <a:rPr lang="en-US" sz="1250" b="1" dirty="0">
+                <a:solidFill>
+                  <a:srgbClr val="1A1A2E"/>
+                </a:solidFill>
+                <a:latin typeface="Segoe UI" pitchFamily="34" charset="0"/>
+                <a:ea typeface="Segoe UI" pitchFamily="34" charset="-122"/>
+                <a:cs typeface="Segoe UI" pitchFamily="34" charset="-120"/>
+              </a:rPr>
+              <a:t>📱 SuperApp</a:t>
+            </a:r>
+            <a:endParaRPr lang="en-US" sz="1250" dirty="0"/>
+          </a:p>
+        </p:txBody>
+      </p:sp>
+      <p:sp>
+        <p:nvSpPr>
+          <p:cNvPr id="21" name="Text 19"/>
+          <p:cNvSpPr/>
+          <p:nvPr/>
+        </p:nvSpPr>
+        <p:spPr>
+          <a:xfrm>
+            <a:off x="6355080" y="1938528"/>
+            <a:ext cx="2423160" cy="1188720"/>
+          </a:xfrm>
+          <a:prstGeom prst="rect">
+            <a:avLst/>
+          </a:prstGeom>
+          <a:noFill/>
+          <a:ln/>
+        </p:spPr>
+        <p:txBody>
+          <a:bodyPr wrap="square" rtlCol="0" anchor="t"/>
+          <a:lstStyle/>
+          <a:p>
+            <a:pPr indent="0" marL="0">
+              <a:lnSpc>
+                <a:spcPts val="1250"/>
+              </a:lnSpc>
+              <a:buNone/>
+            </a:pPr>
+            <a:r>
+              <a:rPr lang="en-US" sz="950" dirty="0">
+                <a:solidFill>
+                  <a:srgbClr val="55556D"/>
+                </a:solidFill>
+                <a:latin typeface="Segoe UI" pitchFamily="34" charset="0"/>
+                <a:ea typeface="Segoe UI" pitchFamily="34" charset="-122"/>
+                <a:cs typeface="Segoe UI" pitchFamily="34" charset="-120"/>
+              </a:rPr>
+              <a:t>The fan’s companion: tickets, top-ups, line-ups and offers in one place — an ownable channel to every attendee.</a:t>
+            </a:r>
+            <a:endParaRPr lang="en-US" sz="950" dirty="0"/>
+          </a:p>
+        </p:txBody>
+      </p:sp>
+      <p:sp>
+        <p:nvSpPr>
+          <p:cNvPr id="22" name="Text 20"/>
+          <p:cNvSpPr/>
+          <p:nvPr/>
+        </p:nvSpPr>
+        <p:spPr>
+          <a:xfrm>
+            <a:off x="7296912" y="3200400"/>
+            <a:ext cx="548640" cy="365760"/>
+          </a:xfrm>
+          <a:prstGeom prst="rect">
+            <a:avLst/>
+          </a:prstGeom>
+          <a:noFill/>
+          <a:ln/>
+        </p:spPr>
+        <p:txBody>
+          <a:bodyPr wrap="square" rtlCol="0" anchor="ctr"/>
+          <a:lstStyle/>
+          <a:p>
+            <a:pPr algn="ctr" indent="0" marL="0">
+              <a:buNone/>
+            </a:pPr>
+            <a:r>
+              <a:rPr lang="en-US" sz="1800" b="1" dirty="0">
+                <a:solidFill>
+                  <a:srgbClr val="A89DDD"/>
+                </a:solidFill>
+                <a:latin typeface="Segoe UI" pitchFamily="34" charset="0"/>
+                <a:ea typeface="Segoe UI" pitchFamily="34" charset="-122"/>
+                <a:cs typeface="Segoe UI" pitchFamily="34" charset="-120"/>
+              </a:rPr>
+              <a:t>↓</a:t>
+            </a:r>
+            <a:endParaRPr lang="en-US" sz="1800" dirty="0"/>
+          </a:p>
+        </p:txBody>
+      </p:sp>
+      <p:sp>
+        <p:nvSpPr>
+          <p:cNvPr id="23" name="Shape 21"/>
+          <p:cNvSpPr/>
+          <p:nvPr/>
+        </p:nvSpPr>
+        <p:spPr>
+          <a:xfrm>
+            <a:off x="9098280" y="1371600"/>
+            <a:ext cx="2697480" cy="1828800"/>
+          </a:xfrm>
+          <a:prstGeom prst="roundRect">
+            <a:avLst>
+              <a:gd name="adj" fmla="val 5000"/>
+            </a:avLst>
+          </a:prstGeom>
+          <a:solidFill>
+            <a:srgbClr val="FBFAFF"/>
+          </a:solidFill>
+          <a:ln w="12700">
+            <a:solidFill>
+              <a:srgbClr val="ECE9F5"/>
+            </a:solidFill>
+            <a:prstDash val="solid"/>
+          </a:ln>
+        </p:spPr>
+      </p:sp>
+      <p:sp>
+        <p:nvSpPr>
+          <p:cNvPr id="24" name="Text 22"/>
+          <p:cNvSpPr/>
+          <p:nvPr/>
+        </p:nvSpPr>
+        <p:spPr>
+          <a:xfrm>
+            <a:off x="9235440" y="1463040"/>
+            <a:ext cx="2423160" cy="502920"/>
+          </a:xfrm>
+          <a:prstGeom prst="rect">
+            <a:avLst/>
+          </a:prstGeom>
+          <a:noFill/>
+          <a:ln/>
+        </p:spPr>
+        <p:txBody>
+          <a:bodyPr wrap="square" rtlCol="0" anchor="ctr"/>
+          <a:lstStyle/>
+          <a:p>
+            <a:pPr indent="0" marL="0">
+              <a:buNone/>
+            </a:pPr>
+            <a:r>
+              <a:rPr lang="en-US" sz="1250" b="1" dirty="0">
+                <a:solidFill>
+                  <a:srgbClr val="1A1A2E"/>
+                </a:solidFill>
+                <a:latin typeface="Segoe UI" pitchFamily="34" charset="0"/>
+                <a:ea typeface="Segoe UI" pitchFamily="34" charset="-122"/>
+                <a:cs typeface="Segoe UI" pitchFamily="34" charset="-120"/>
+              </a:rPr>
+              <a:t>🍾 VIP Table Management</a:t>
+            </a:r>
+            <a:endParaRPr lang="en-US" sz="1250" dirty="0"/>
+          </a:p>
+        </p:txBody>
+      </p:sp>
+      <p:sp>
+        <p:nvSpPr>
+          <p:cNvPr id="25" name="Text 23"/>
+          <p:cNvSpPr/>
+          <p:nvPr/>
+        </p:nvSpPr>
+        <p:spPr>
+          <a:xfrm>
+            <a:off x="9235440" y="1938528"/>
+            <a:ext cx="2423160" cy="1188720"/>
+          </a:xfrm>
+          <a:prstGeom prst="rect">
+            <a:avLst/>
+          </a:prstGeom>
+          <a:noFill/>
+          <a:ln/>
+        </p:spPr>
+        <p:txBody>
+          <a:bodyPr wrap="square" rtlCol="0" anchor="t"/>
+          <a:lstStyle/>
+          <a:p>
+            <a:pPr indent="0" marL="0">
+              <a:lnSpc>
+                <a:spcPts val="1250"/>
+              </a:lnSpc>
+              <a:buNone/>
+            </a:pPr>
+            <a:r>
+              <a:rPr lang="en-US" sz="950" dirty="0">
+                <a:solidFill>
+                  <a:srgbClr val="55556D"/>
+                </a:solidFill>
+                <a:latin typeface="Segoe UI" pitchFamily="34" charset="0"/>
+                <a:ea typeface="Segoe UI" pitchFamily="34" charset="-122"/>
+                <a:cs typeface="Segoe UI" pitchFamily="34" charset="-120"/>
+              </a:rPr>
+              <a:t>Table inventory, bookings and minimum spends, hosted service — your highest-value guests, managed and measured.</a:t>
+            </a:r>
+            <a:endParaRPr lang="en-US" sz="950" dirty="0"/>
+          </a:p>
+        </p:txBody>
+      </p:sp>
+      <p:sp>
+        <p:nvSpPr>
+          <p:cNvPr id="26" name="Text 24"/>
+          <p:cNvSpPr/>
+          <p:nvPr/>
+        </p:nvSpPr>
+        <p:spPr>
+          <a:xfrm>
+            <a:off x="10177272" y="3200400"/>
+            <a:ext cx="548640" cy="365760"/>
+          </a:xfrm>
+          <a:prstGeom prst="rect">
+            <a:avLst/>
+          </a:prstGeom>
+          <a:noFill/>
+          <a:ln/>
+        </p:spPr>
+        <p:txBody>
+          <a:bodyPr wrap="square" rtlCol="0" anchor="ctr"/>
+          <a:lstStyle/>
+          <a:p>
+            <a:pPr algn="ctr" indent="0" marL="0">
+              <a:buNone/>
+            </a:pPr>
+            <a:r>
+              <a:rPr lang="en-US" sz="1800" b="1" dirty="0">
+                <a:solidFill>
+                  <a:srgbClr val="A89DDD"/>
+                </a:solidFill>
+                <a:latin typeface="Segoe UI" pitchFamily="34" charset="0"/>
+                <a:ea typeface="Segoe UI" pitchFamily="34" charset="-122"/>
+                <a:cs typeface="Segoe UI" pitchFamily="34" charset="-120"/>
+              </a:rPr>
+              <a:t>↓</a:t>
+            </a:r>
+            <a:endParaRPr lang="en-US" sz="1800" dirty="0"/>
+          </a:p>
+        </p:txBody>
+      </p:sp>
+      <p:sp>
+        <p:nvSpPr>
+          <p:cNvPr id="27" name="Shape 25"/>
+          <p:cNvSpPr/>
+          <p:nvPr/>
+        </p:nvSpPr>
+        <p:spPr>
+          <a:xfrm>
+            <a:off x="457200" y="3611880"/>
+            <a:ext cx="11338560" cy="1143000"/>
+          </a:xfrm>
+          <a:prstGeom prst="roundRect">
+            <a:avLst>
+              <a:gd name="adj" fmla="val 9600"/>
+            </a:avLst>
+          </a:prstGeom>
+          <a:solidFill>
+            <a:srgbClr val="1A1A2E"/>
+          </a:solidFill>
+          <a:ln/>
+        </p:spPr>
+      </p:sp>
+      <p:sp>
+        <p:nvSpPr>
+          <p:cNvPr id="28" name="Text 26"/>
+          <p:cNvSpPr/>
+          <p:nvPr/>
+        </p:nvSpPr>
+        <p:spPr>
+          <a:xfrm>
+            <a:off x="777240" y="3703320"/>
+            <a:ext cx="10698480" cy="960120"/>
+          </a:xfrm>
+          <a:prstGeom prst="rect">
+            <a:avLst/>
+          </a:prstGeom>
+          <a:noFill/>
+          <a:ln/>
+        </p:spPr>
+        <p:txBody>
+          <a:bodyPr wrap="square" rtlCol="0" anchor="ctr"/>
+          <a:lstStyle/>
+          <a:p>
+            <a:pPr indent="0" marL="0">
+              <a:lnSpc>
+                <a:spcPts val="1600"/>
+              </a:lnSpc>
+              <a:buNone/>
+            </a:pPr>
+            <a:r>
+              <a:rPr lang="en-US" sz="1500" b="1" dirty="0">
+                <a:solidFill>
+                  <a:srgbClr val="FFFFFF"/>
+                </a:solidFill>
+                <a:latin typeface="Segoe UI" pitchFamily="34" charset="0"/>
+                <a:ea typeface="Segoe UI" pitchFamily="34" charset="-122"/>
+                <a:cs typeface="Segoe UI" pitchFamily="34" charset="-120"/>
+              </a:rPr>
+              <a:t>📊 Pulse — the brain of the stack.  </a:t>
+            </a:r>
+            <a:pPr indent="0" marL="0">
+              <a:lnSpc>
+                <a:spcPts val="1600"/>
+              </a:lnSpc>
+              <a:buNone/>
+            </a:pPr>
+            <a:r>
+              <a:rPr lang="en-US" sz="1150" dirty="0">
+                <a:solidFill>
+                  <a:srgbClr val="D8D4F0"/>
+                </a:solidFill>
+                <a:latin typeface="Segoe UI" pitchFamily="34" charset="0"/>
+                <a:ea typeface="Segoe UI" pitchFamily="34" charset="-122"/>
+                <a:cs typeface="Segoe UI" pitchFamily="34" charset="-120"/>
+              </a:rPr>
+              <a:t>Every ticket scanned, every tap at a bar, every SuperApp session and every VIP booking flows into one governed dataset — where the Owl reads it, your team acts on it, and the results come back measured.</a:t>
+            </a:r>
+            <a:endParaRPr lang="en-US" sz="1500" dirty="0"/>
+          </a:p>
+        </p:txBody>
+      </p:sp>
+      <p:sp>
+        <p:nvSpPr>
+          <p:cNvPr id="29" name="Text 27"/>
+          <p:cNvSpPr/>
+          <p:nvPr/>
+        </p:nvSpPr>
+        <p:spPr>
+          <a:xfrm>
+            <a:off x="457200" y="4864608"/>
+            <a:ext cx="11338560" cy="365760"/>
+          </a:xfrm>
+          <a:prstGeom prst="rect">
+            <a:avLst/>
+          </a:prstGeom>
+          <a:noFill/>
+          <a:ln/>
+        </p:spPr>
+        <p:txBody>
+          <a:bodyPr wrap="square" rtlCol="0" anchor="ctr"/>
+          <a:lstStyle/>
+          <a:p>
+            <a:pPr algn="ctr" indent="0" marL="0">
+              <a:buNone/>
+            </a:pPr>
+            <a:r>
+              <a:rPr lang="en-US" sz="1200" b="1" spc="200" kern="0" dirty="0">
+                <a:solidFill>
+                  <a:srgbClr val="2D2B55"/>
+                </a:solidFill>
+                <a:latin typeface="Segoe UI" pitchFamily="34" charset="0"/>
+                <a:ea typeface="Segoe UI" pitchFamily="34" charset="-122"/>
+                <a:cs typeface="Segoe UI" pitchFamily="34" charset="-120"/>
+              </a:rPr>
+              <a:t>ONE STACK  ·  ONE DATASET  ·  ONE BRAND EXPERIENCE  ·  ONE PARTNER</a:t>
+            </a:r>
+            <a:endParaRPr lang="en-US" sz="1200" dirty="0"/>
+          </a:p>
+        </p:txBody>
+      </p:sp>
+      <p:sp>
+        <p:nvSpPr>
+          <p:cNvPr id="30" name="Shape 28"/>
+          <p:cNvSpPr/>
+          <p:nvPr/>
+        </p:nvSpPr>
+        <p:spPr>
+          <a:xfrm>
+            <a:off x="457200" y="5349240"/>
+            <a:ext cx="3657600" cy="1234440"/>
+          </a:xfrm>
+          <a:prstGeom prst="roundRect">
+            <a:avLst>
+              <a:gd name="adj" fmla="val 7407"/>
+            </a:avLst>
+          </a:prstGeom>
+          <a:solidFill>
+            <a:srgbClr val="FF385C"/>
+          </a:solidFill>
+          <a:ln/>
+        </p:spPr>
+      </p:sp>
+      <p:sp>
+        <p:nvSpPr>
+          <p:cNvPr id="31" name="Text 29"/>
+          <p:cNvSpPr/>
+          <p:nvPr/>
+        </p:nvSpPr>
+        <p:spPr>
+          <a:xfrm>
+            <a:off x="594360" y="5413248"/>
+            <a:ext cx="3383280" cy="1097280"/>
+          </a:xfrm>
+          <a:prstGeom prst="rect">
+            <a:avLst/>
+          </a:prstGeom>
+          <a:noFill/>
+          <a:ln/>
+        </p:spPr>
+        <p:txBody>
+          <a:bodyPr wrap="square" rtlCol="0" anchor="t"/>
+          <a:lstStyle/>
+          <a:p>
+            <a:pPr indent="0" marL="0">
+              <a:lnSpc>
+                <a:spcPts val="1150"/>
+              </a:lnSpc>
+              <a:buNone/>
+            </a:pPr>
+            <a:r>
+              <a:rPr lang="en-US" sz="1100" b="1" dirty="0">
+                <a:solidFill>
+                  <a:srgbClr val="FFFFFF"/>
+                </a:solidFill>
+                <a:latin typeface="Segoe UI" pitchFamily="34" charset="0"/>
+                <a:ea typeface="Segoe UI" pitchFamily="34" charset="-122"/>
+                <a:cs typeface="Segoe UI" pitchFamily="34" charset="-120"/>
+              </a:rPr>
+              <a:t>Better together: The bar
+</a:t>
+            </a:r>
+            <a:pPr indent="0" marL="0">
+              <a:lnSpc>
+                <a:spcPts val="1150"/>
+              </a:lnSpc>
+              <a:buNone/>
+            </a:pPr>
+            <a:r>
+              <a:rPr lang="en-US" sz="900" dirty="0">
+                <a:solidFill>
+                  <a:srgbClr val="FFFFFF">
+                    <a:alpha val="94000"/>
+                  </a:srgbClr>
+                </a:solidFill>
+                <a:latin typeface="Segoe UI" pitchFamily="34" charset="0"/>
+                <a:ea typeface="Segoe UI" pitchFamily="34" charset="-122"/>
+                <a:cs typeface="Segoe UI" pitchFamily="34" charset="-120"/>
+              </a:rPr>
+              <a:t>Cashless spots the Main Bar spiking; the heat map shows the hotspot; the Owl suggests moving two devices — while the night is young.</a:t>
+            </a:r>
+            <a:endParaRPr lang="en-US" sz="1100" dirty="0"/>
+          </a:p>
+        </p:txBody>
+      </p:sp>
+      <p:sp>
+        <p:nvSpPr>
+          <p:cNvPr id="32" name="Shape 30"/>
+          <p:cNvSpPr/>
+          <p:nvPr/>
+        </p:nvSpPr>
+        <p:spPr>
+          <a:xfrm>
+            <a:off x="4297680" y="5349240"/>
+            <a:ext cx="3657600" cy="1234440"/>
+          </a:xfrm>
+          <a:prstGeom prst="roundRect">
+            <a:avLst>
+              <a:gd name="adj" fmla="val 7407"/>
+            </a:avLst>
+          </a:prstGeom>
+          <a:solidFill>
+            <a:srgbClr val="FF6B35"/>
+          </a:solidFill>
+          <a:ln/>
+        </p:spPr>
+      </p:sp>
+      <p:sp>
+        <p:nvSpPr>
+          <p:cNvPr id="33" name="Text 31"/>
+          <p:cNvSpPr/>
+          <p:nvPr/>
+        </p:nvSpPr>
+        <p:spPr>
+          <a:xfrm>
+            <a:off x="4434840" y="5413248"/>
+            <a:ext cx="3383280" cy="1097280"/>
+          </a:xfrm>
+          <a:prstGeom prst="rect">
+            <a:avLst/>
+          </a:prstGeom>
+          <a:noFill/>
+          <a:ln/>
+        </p:spPr>
+        <p:txBody>
+          <a:bodyPr wrap="square" rtlCol="0" anchor="t"/>
+          <a:lstStyle/>
+          <a:p>
+            <a:pPr indent="0" marL="0">
+              <a:lnSpc>
+                <a:spcPts val="1150"/>
+              </a:lnSpc>
+              <a:buNone/>
+            </a:pPr>
+            <a:r>
+              <a:rPr lang="en-US" sz="1100" b="1" dirty="0">
+                <a:solidFill>
+                  <a:srgbClr val="FFFFFF"/>
+                </a:solidFill>
+                <a:latin typeface="Segoe UI" pitchFamily="34" charset="0"/>
+                <a:ea typeface="Segoe UI" pitchFamily="34" charset="-122"/>
+                <a:cs typeface="Segoe UI" pitchFamily="34" charset="-120"/>
+              </a:rPr>
+              <a:t>Better together: The fan
+</a:t>
+            </a:r>
+            <a:pPr indent="0" marL="0">
+              <a:lnSpc>
+                <a:spcPts val="1150"/>
+              </a:lnSpc>
+              <a:buNone/>
+            </a:pPr>
+            <a:r>
+              <a:rPr lang="en-US" sz="900" dirty="0">
+                <a:solidFill>
+                  <a:srgbClr val="FFFFFF">
+                    <a:alpha val="94000"/>
+                  </a:srgbClr>
+                </a:solidFill>
+                <a:latin typeface="Segoe UI" pitchFamily="34" charset="0"/>
+                <a:ea typeface="Segoe UI" pitchFamily="34" charset="-122"/>
+                <a:cs typeface="Segoe UI" pitchFamily="34" charset="-120"/>
+              </a:rPr>
+              <a:t>Ticket + top-ups + bar spend stitched into one picture — your next campaign targets big spenders who haven’t rebought yet.</a:t>
+            </a:r>
+            <a:endParaRPr lang="en-US" sz="1100" dirty="0"/>
+          </a:p>
+        </p:txBody>
+      </p:sp>
+      <p:sp>
+        <p:nvSpPr>
+          <p:cNvPr id="34" name="Shape 32"/>
+          <p:cNvSpPr/>
+          <p:nvPr/>
+        </p:nvSpPr>
+        <p:spPr>
+          <a:xfrm>
+            <a:off x="8138160" y="5349240"/>
+            <a:ext cx="3657600" cy="1234440"/>
+          </a:xfrm>
+          <a:prstGeom prst="roundRect">
+            <a:avLst>
+              <a:gd name="adj" fmla="val 7407"/>
+            </a:avLst>
+          </a:prstGeom>
+          <a:solidFill>
+            <a:srgbClr val="7C3AED"/>
+          </a:solidFill>
+          <a:ln/>
+        </p:spPr>
+      </p:sp>
+      <p:sp>
+        <p:nvSpPr>
+          <p:cNvPr id="35" name="Text 33"/>
+          <p:cNvSpPr/>
+          <p:nvPr/>
+        </p:nvSpPr>
+        <p:spPr>
+          <a:xfrm>
+            <a:off x="8275320" y="5413248"/>
+            <a:ext cx="3383280" cy="1097280"/>
+          </a:xfrm>
+          <a:prstGeom prst="rect">
+            <a:avLst/>
+          </a:prstGeom>
+          <a:noFill/>
+          <a:ln/>
+        </p:spPr>
+        <p:txBody>
+          <a:bodyPr wrap="square" rtlCol="0" anchor="t"/>
+          <a:lstStyle/>
+          <a:p>
+            <a:pPr indent="0" marL="0">
+              <a:lnSpc>
+                <a:spcPts val="1150"/>
+              </a:lnSpc>
+              <a:buNone/>
+            </a:pPr>
+            <a:r>
+              <a:rPr lang="en-US" sz="1100" b="1" dirty="0">
+                <a:solidFill>
+                  <a:srgbClr val="FFFFFF"/>
+                </a:solidFill>
+                <a:latin typeface="Segoe UI" pitchFamily="34" charset="0"/>
+                <a:ea typeface="Segoe UI" pitchFamily="34" charset="-122"/>
+                <a:cs typeface="Segoe UI" pitchFamily="34" charset="-120"/>
+              </a:rPr>
+              <a:t>Better together: The VIP
+</a:t>
+            </a:r>
+            <a:pPr indent="0" marL="0">
+              <a:lnSpc>
+                <a:spcPts val="1150"/>
+              </a:lnSpc>
+              <a:buNone/>
+            </a:pPr>
+            <a:r>
+              <a:rPr lang="en-US" sz="900" dirty="0">
+                <a:solidFill>
+                  <a:srgbClr val="FFFFFF">
+                    <a:alpha val="94000"/>
+                  </a:srgbClr>
+                </a:solidFill>
+                <a:latin typeface="Segoe UI" pitchFamily="34" charset="0"/>
+                <a:ea typeface="Segoe UI" pitchFamily="34" charset="-122"/>
+                <a:cs typeface="Segoe UI" pitchFamily="34" charset="-120"/>
+              </a:rPr>
+              <a:t>Pulse knows who your table guests are, what they spent and when they went quiet — next season’s invitation writes itself.</a:t>
+            </a:r>
+            <a:endParaRPr lang="en-US" sz="1100" dirty="0"/>
+          </a:p>
+        </p:txBody>
+      </p:sp>
+    </p:spTree>
+  </p:cSld>
+  <p:clrMapOvr>
+    <a:masterClrMapping/>
+  </p:clrMapOvr>
+</p:sld>
+</file>
+
+<file path=ppt/slides/slide13.xml><?xml version="1.0" encoding="utf-8"?>
+<p:sld xmlns:a="http://schemas.openxmlformats.org/drawingml/2006/main" xmlns:r="http://schemas.openxmlformats.org/officeDocument/2006/relationships" xmlns:p="http://schemas.openxmlformats.org/presentationml/2006/main">
+  <p:cSld name="Slide 13">
+    <p:bg>
+      <p:bgPr>
+        <a:solidFill>
           <a:srgbClr val="1A1A2E"/>
         </a:solidFill>
       </p:bgPr>
@@ -7851,7 +9223,7 @@
                 <a:ea typeface="Segoe UI" pitchFamily="34" charset="-122"/>
                 <a:cs typeface="Segoe UI" pitchFamily="34" charset="-120"/>
               </a:rPr>
-              <a:t>Fan Owl on your website  </a:t>
+              <a:t>Take action by chat  </a:t>
             </a:r>
             <a:pPr indent="0" marL="0">
               <a:lnSpc>
@@ -7868,7 +9240,7 @@
                 <a:ea typeface="Segoe UI" pitchFamily="34" charset="-122"/>
                 <a:cs typeface="Segoe UI" pitchFamily="34" charset="-120"/>
               </a:rPr>
-              <a:t>— a booking guide on your public event site: answers FAQs from your knowledge base, recommends the right ticket, links to your checkout, captures opted-in fans.</a:t>
+              <a:t>— the Owl doesn’t just answer: it can set up an alert, save a segment or draft a campaign straight from the conversation, with a confirm step before anything is created.</a:t>
             </a:r>
             <a:endParaRPr lang="en-US" sz="1200" dirty="0"/>
           </a:p>
@@ -8103,7 +9475,7 @@
                 <a:ea typeface="Segoe UI" pitchFamily="34" charset="-122"/>
                 <a:cs typeface="Segoe UI" pitchFamily="34" charset="-120"/>
               </a:rPr>
-              <a:t>the same governed data and the same Owl, wherever your team already lives</a:t>
+              <a:t>the Owl at the centre — the doors your team already uses around it</a:t>
             </a:r>
             <a:endParaRPr lang="en-US" sz="1200" dirty="0"/>
           </a:p>
@@ -8308,12 +9680,104 @@
         </p:nvSpPr>
         <p:spPr>
           <a:xfrm>
-            <a:off x="457200" y="1463040"/>
-            <a:ext cx="2697480" cy="1783080"/>
+            <a:off x="3931920" y="2468880"/>
+            <a:ext cx="2157984" cy="1143000"/>
+          </a:xfrm>
+          <a:prstGeom prst="line">
+            <a:avLst/>
+          </a:prstGeom>
+          <a:noFill/>
+          <a:ln w="19050">
+            <a:solidFill>
+              <a:srgbClr val="D6CDF0"/>
+            </a:solidFill>
+            <a:prstDash val="dash"/>
+          </a:ln>
+        </p:spPr>
+      </p:sp>
+      <p:sp>
+        <p:nvSpPr>
+          <p:cNvPr id="12" name="Shape 10"/>
+          <p:cNvSpPr/>
+          <p:nvPr/>
+        </p:nvSpPr>
+        <p:spPr>
+          <a:xfrm flipV="1">
+            <a:off x="3931920" y="3611880"/>
+            <a:ext cx="2157984" cy="1234440"/>
+          </a:xfrm>
+          <a:prstGeom prst="line">
+            <a:avLst/>
+          </a:prstGeom>
+          <a:noFill/>
+          <a:ln w="19050">
+            <a:solidFill>
+              <a:srgbClr val="D6CDF0"/>
+            </a:solidFill>
+            <a:prstDash val="dash"/>
+          </a:ln>
+        </p:spPr>
+      </p:sp>
+      <p:sp>
+        <p:nvSpPr>
+          <p:cNvPr id="13" name="Shape 11"/>
+          <p:cNvSpPr/>
+          <p:nvPr/>
+        </p:nvSpPr>
+        <p:spPr>
+          <a:xfrm>
+            <a:off x="6089904" y="2468880"/>
+            <a:ext cx="2167128" cy="1143000"/>
+          </a:xfrm>
+          <a:prstGeom prst="line">
+            <a:avLst/>
+          </a:prstGeom>
+          <a:noFill/>
+          <a:ln w="19050">
+            <a:solidFill>
+              <a:srgbClr val="D6CDF0"/>
+            </a:solidFill>
+            <a:prstDash val="dash"/>
+          </a:ln>
+        </p:spPr>
+      </p:sp>
+      <p:sp>
+        <p:nvSpPr>
+          <p:cNvPr id="14" name="Shape 12"/>
+          <p:cNvSpPr/>
+          <p:nvPr/>
+        </p:nvSpPr>
+        <p:spPr>
+          <a:xfrm flipV="1">
+            <a:off x="6089904" y="3611880"/>
+            <a:ext cx="2167128" cy="1234440"/>
+          </a:xfrm>
+          <a:prstGeom prst="line">
+            <a:avLst/>
+          </a:prstGeom>
+          <a:noFill/>
+          <a:ln w="19050">
+            <a:solidFill>
+              <a:srgbClr val="D6CDF0"/>
+            </a:solidFill>
+            <a:prstDash val="dash"/>
+          </a:ln>
+        </p:spPr>
+      </p:sp>
+      <p:sp>
+        <p:nvSpPr>
+          <p:cNvPr id="15" name="Shape 13"/>
+          <p:cNvSpPr/>
+          <p:nvPr/>
+        </p:nvSpPr>
+        <p:spPr>
+          <a:xfrm>
+            <a:off x="457200" y="1600200"/>
+            <a:ext cx="3474720" cy="1737360"/>
           </a:xfrm>
           <a:prstGeom prst="roundRect">
             <a:avLst>
-              <a:gd name="adj" fmla="val 5128"/>
+              <a:gd name="adj" fmla="val 6316"/>
             </a:avLst>
           </a:prstGeom>
           <a:solidFill>
@@ -8329,14 +9793,14 @@
       </p:sp>
       <p:sp>
         <p:nvSpPr>
-          <p:cNvPr id="12" name="Text 10"/>
-          <p:cNvSpPr/>
-          <p:nvPr/>
-        </p:nvSpPr>
-        <p:spPr>
-          <a:xfrm>
-            <a:off x="594360" y="1554480"/>
-            <a:ext cx="2423160" cy="365760"/>
+          <p:cNvPr id="16" name="Text 14"/>
+          <p:cNvSpPr/>
+          <p:nvPr/>
+        </p:nvSpPr>
+        <p:spPr>
+          <a:xfrm>
+            <a:off x="621792" y="1691640"/>
+            <a:ext cx="3154680" cy="384048"/>
           </a:xfrm>
           <a:prstGeom prst="rect">
             <a:avLst/>
@@ -8352,7 +9816,7 @@
               <a:buNone/>
             </a:pPr>
             <a:r>
-              <a:rPr lang="en-US" sz="1300" b="1" dirty="0">
+              <a:rPr lang="en-US" sz="1400" b="1" dirty="0">
                 <a:solidFill>
                   <a:srgbClr val="1A1A2E"/>
                 </a:solidFill>
@@ -8360,22 +9824,22 @@
                 <a:ea typeface="Segoe UI" pitchFamily="34" charset="-122"/>
                 <a:cs typeface="Segoe UI" pitchFamily="34" charset="-120"/>
               </a:rPr>
-              <a:t>📱 The Pulse app</a:t>
-            </a:r>
-            <a:endParaRPr lang="en-US" sz="1300" dirty="0"/>
-          </a:p>
-        </p:txBody>
-      </p:sp>
-      <p:sp>
-        <p:nvSpPr>
-          <p:cNvPr id="13" name="Text 11"/>
-          <p:cNvSpPr/>
-          <p:nvPr/>
-        </p:nvSpPr>
-        <p:spPr>
-          <a:xfrm>
-            <a:off x="594360" y="1938528"/>
-            <a:ext cx="2423160" cy="1234440"/>
+              <a:t>📱 The Howler Pulse app</a:t>
+            </a:r>
+            <a:endParaRPr lang="en-US" sz="1400" dirty="0"/>
+          </a:p>
+        </p:txBody>
+      </p:sp>
+      <p:sp>
+        <p:nvSpPr>
+          <p:cNvPr id="17" name="Text 15"/>
+          <p:cNvSpPr/>
+          <p:nvPr/>
+        </p:nvSpPr>
+        <p:spPr>
+          <a:xfrm>
+            <a:off x="621792" y="2103120"/>
+            <a:ext cx="3154680" cy="1143000"/>
           </a:xfrm>
           <a:prstGeom prst="rect">
             <a:avLst/>
@@ -8389,12 +9853,12 @@
           <a:p>
             <a:pPr indent="0" marL="0">
               <a:lnSpc>
-                <a:spcPts val="1300"/>
+                <a:spcPts val="1400"/>
               </a:lnSpc>
               <a:buNone/>
             </a:pPr>
             <a:r>
-              <a:rPr lang="en-US" sz="1000" dirty="0">
+              <a:rPr lang="en-US" sz="1050" dirty="0">
                 <a:solidFill>
                   <a:srgbClr val="55556D"/>
                 </a:solidFill>
@@ -8402,26 +9866,26 @@
                 <a:ea typeface="Segoe UI" pitchFamily="34" charset="-122"/>
                 <a:cs typeface="Segoe UI" pitchFamily="34" charset="-120"/>
               </a:rPr>
-              <a:t>Installs like a native app; push notifications reach you even when it’s closed.</a:t>
-            </a:r>
-            <a:endParaRPr lang="en-US" sz="1000" dirty="0"/>
-          </a:p>
-        </p:txBody>
-      </p:sp>
-      <p:sp>
-        <p:nvSpPr>
-          <p:cNvPr id="14" name="Shape 12"/>
-          <p:cNvSpPr/>
-          <p:nvPr/>
-        </p:nvSpPr>
-        <p:spPr>
-          <a:xfrm>
-            <a:off x="3337560" y="1463040"/>
-            <a:ext cx="2697480" cy="1783080"/>
+              <a:t>Installs like a native app; pushes a nudge even when closed — tap it and you’re in the right place to act.</a:t>
+            </a:r>
+            <a:endParaRPr lang="en-US" sz="1050" dirty="0"/>
+          </a:p>
+        </p:txBody>
+      </p:sp>
+      <p:sp>
+        <p:nvSpPr>
+          <p:cNvPr id="18" name="Shape 16"/>
+          <p:cNvSpPr/>
+          <p:nvPr/>
+        </p:nvSpPr>
+        <p:spPr>
+          <a:xfrm>
+            <a:off x="457200" y="3977640"/>
+            <a:ext cx="3474720" cy="1737360"/>
           </a:xfrm>
           <a:prstGeom prst="roundRect">
             <a:avLst>
-              <a:gd name="adj" fmla="val 5128"/>
+              <a:gd name="adj" fmla="val 6316"/>
             </a:avLst>
           </a:prstGeom>
           <a:solidFill>
@@ -8437,14 +9901,14 @@
       </p:sp>
       <p:sp>
         <p:nvSpPr>
-          <p:cNvPr id="15" name="Text 13"/>
-          <p:cNvSpPr/>
-          <p:nvPr/>
-        </p:nvSpPr>
-        <p:spPr>
-          <a:xfrm>
-            <a:off x="3474720" y="1554480"/>
-            <a:ext cx="2423160" cy="365760"/>
+          <p:cNvPr id="19" name="Text 17"/>
+          <p:cNvSpPr/>
+          <p:nvPr/>
+        </p:nvSpPr>
+        <p:spPr>
+          <a:xfrm>
+            <a:off x="621792" y="4069080"/>
+            <a:ext cx="3154680" cy="384048"/>
           </a:xfrm>
           <a:prstGeom prst="rect">
             <a:avLst/>
@@ -8460,7 +9924,7 @@
               <a:buNone/>
             </a:pPr>
             <a:r>
-              <a:rPr lang="en-US" sz="1300" b="1" dirty="0">
+              <a:rPr lang="en-US" sz="1400" b="1" dirty="0">
                 <a:solidFill>
                   <a:srgbClr val="1A1A2E"/>
                 </a:solidFill>
@@ -8470,20 +9934,20 @@
               </a:rPr>
               <a:t>💬 WhatsApp</a:t>
             </a:r>
-            <a:endParaRPr lang="en-US" sz="1300" dirty="0"/>
-          </a:p>
-        </p:txBody>
-      </p:sp>
-      <p:sp>
-        <p:nvSpPr>
-          <p:cNvPr id="16" name="Text 14"/>
-          <p:cNvSpPr/>
-          <p:nvPr/>
-        </p:nvSpPr>
-        <p:spPr>
-          <a:xfrm>
-            <a:off x="3474720" y="1938528"/>
-            <a:ext cx="2423160" cy="1234440"/>
+            <a:endParaRPr lang="en-US" sz="1400" dirty="0"/>
+          </a:p>
+        </p:txBody>
+      </p:sp>
+      <p:sp>
+        <p:nvSpPr>
+          <p:cNvPr id="20" name="Text 18"/>
+          <p:cNvSpPr/>
+          <p:nvPr/>
+        </p:nvSpPr>
+        <p:spPr>
+          <a:xfrm>
+            <a:off x="621792" y="4480560"/>
+            <a:ext cx="3154680" cy="1143000"/>
           </a:xfrm>
           <a:prstGeom prst="rect">
             <a:avLst/>
@@ -8497,12 +9961,12 @@
           <a:p>
             <a:pPr indent="0" marL="0">
               <a:lnSpc>
-                <a:spcPts val="1300"/>
+                <a:spcPts val="1400"/>
               </a:lnSpc>
               <a:buNone/>
             </a:pPr>
             <a:r>
-              <a:rPr lang="en-US" sz="1000" dirty="0">
+              <a:rPr lang="en-US" sz="1050" dirty="0">
                 <a:solidFill>
                   <a:srgbClr val="55556D"/>
                 </a:solidFill>
@@ -8510,26 +9974,26 @@
                 <a:ea typeface="Segoe UI" pitchFamily="34" charset="-122"/>
                 <a:cs typeface="Segoe UI" pitchFamily="34" charset="-120"/>
               </a:rPr>
-              <a:t>Chat to the Owl: answers, charts as images, daily updates, event-night reports.</a:t>
-            </a:r>
-            <a:endParaRPr lang="en-US" sz="1000" dirty="0"/>
-          </a:p>
-        </p:txBody>
-      </p:sp>
-      <p:sp>
-        <p:nvSpPr>
-          <p:cNvPr id="17" name="Shape 15"/>
-          <p:cNvSpPr/>
-          <p:nvPr/>
-        </p:nvSpPr>
-        <p:spPr>
-          <a:xfrm>
-            <a:off x="6217920" y="1463040"/>
-            <a:ext cx="2697480" cy="1783080"/>
+              <a:t>Message the Owl like a colleague: answers, charts as images, daily updates, event-night reports.</a:t>
+            </a:r>
+            <a:endParaRPr lang="en-US" sz="1050" dirty="0"/>
+          </a:p>
+        </p:txBody>
+      </p:sp>
+      <p:sp>
+        <p:nvSpPr>
+          <p:cNvPr id="21" name="Shape 19"/>
+          <p:cNvSpPr/>
+          <p:nvPr/>
+        </p:nvSpPr>
+        <p:spPr>
+          <a:xfrm>
+            <a:off x="8257032" y="1600200"/>
+            <a:ext cx="3474720" cy="1737360"/>
           </a:xfrm>
           <a:prstGeom prst="roundRect">
             <a:avLst>
-              <a:gd name="adj" fmla="val 5128"/>
+              <a:gd name="adj" fmla="val 6316"/>
             </a:avLst>
           </a:prstGeom>
           <a:solidFill>
@@ -8545,14 +10009,14 @@
       </p:sp>
       <p:sp>
         <p:nvSpPr>
-          <p:cNvPr id="18" name="Text 16"/>
-          <p:cNvSpPr/>
-          <p:nvPr/>
-        </p:nvSpPr>
-        <p:spPr>
-          <a:xfrm>
-            <a:off x="6355080" y="1554480"/>
-            <a:ext cx="2423160" cy="365760"/>
+          <p:cNvPr id="22" name="Text 20"/>
+          <p:cNvSpPr/>
+          <p:nvPr/>
+        </p:nvSpPr>
+        <p:spPr>
+          <a:xfrm>
+            <a:off x="8421624" y="1691640"/>
+            <a:ext cx="3154680" cy="384048"/>
           </a:xfrm>
           <a:prstGeom prst="rect">
             <a:avLst/>
@@ -8568,7 +10032,7 @@
               <a:buNone/>
             </a:pPr>
             <a:r>
-              <a:rPr lang="en-US" sz="1300" b="1" dirty="0">
+              <a:rPr lang="en-US" sz="1400" b="1" dirty="0">
                 <a:solidFill>
                   <a:srgbClr val="1A1A2E"/>
                 </a:solidFill>
@@ -8576,22 +10040,22 @@
                 <a:ea typeface="Segoe UI" pitchFamily="34" charset="-122"/>
                 <a:cs typeface="Segoe UI" pitchFamily="34" charset="-120"/>
               </a:rPr>
-              <a:t>🤖 ChatGPT &amp; Claude</a:t>
-            </a:r>
-            <a:endParaRPr lang="en-US" sz="1300" dirty="0"/>
-          </a:p>
-        </p:txBody>
-      </p:sp>
-      <p:sp>
-        <p:nvSpPr>
-          <p:cNvPr id="19" name="Text 17"/>
-          <p:cNvSpPr/>
-          <p:nvPr/>
-        </p:nvSpPr>
-        <p:spPr>
-          <a:xfrm>
-            <a:off x="6355080" y="1938528"/>
-            <a:ext cx="2423160" cy="1234440"/>
+              <a:t>🤖 ChatGPT</a:t>
+            </a:r>
+            <a:endParaRPr lang="en-US" sz="1400" dirty="0"/>
+          </a:p>
+        </p:txBody>
+      </p:sp>
+      <p:sp>
+        <p:nvSpPr>
+          <p:cNvPr id="23" name="Text 21"/>
+          <p:cNvSpPr/>
+          <p:nvPr/>
+        </p:nvSpPr>
+        <p:spPr>
+          <a:xfrm>
+            <a:off x="8421624" y="2103120"/>
+            <a:ext cx="3154680" cy="1143000"/>
           </a:xfrm>
           <a:prstGeom prst="rect">
             <a:avLst/>
@@ -8605,12 +10069,12 @@
           <a:p>
             <a:pPr indent="0" marL="0">
               <a:lnSpc>
-                <a:spcPts val="1300"/>
+                <a:spcPts val="1400"/>
               </a:lnSpc>
               <a:buNone/>
             </a:pPr>
             <a:r>
-              <a:rPr lang="en-US" sz="1000" dirty="0">
+              <a:rPr lang="en-US" sz="1050" dirty="0">
                 <a:solidFill>
                   <a:srgbClr val="55556D"/>
                 </a:solidFill>
@@ -8618,26 +10082,26 @@
                 <a:ea typeface="Segoe UI" pitchFamily="34" charset="-122"/>
                 <a:cs typeface="Segoe UI" pitchFamily="34" charset="-120"/>
               </a:rPr>
-              <a:t>Ask about your events from the AI tools you already use, via the Pulse connector.</a:t>
-            </a:r>
-            <a:endParaRPr lang="en-US" sz="1000" dirty="0"/>
-          </a:p>
-        </p:txBody>
-      </p:sp>
-      <p:sp>
-        <p:nvSpPr>
-          <p:cNvPr id="20" name="Shape 18"/>
-          <p:cNvSpPr/>
-          <p:nvPr/>
-        </p:nvSpPr>
-        <p:spPr>
-          <a:xfrm>
-            <a:off x="9098280" y="1463040"/>
-            <a:ext cx="2697480" cy="1783080"/>
+              <a:t>Connect Pulse to ChatGPT (incl. Deep Research) and ask about your events from the tool you already have open.</a:t>
+            </a:r>
+            <a:endParaRPr lang="en-US" sz="1050" dirty="0"/>
+          </a:p>
+        </p:txBody>
+      </p:sp>
+      <p:sp>
+        <p:nvSpPr>
+          <p:cNvPr id="24" name="Shape 22"/>
+          <p:cNvSpPr/>
+          <p:nvPr/>
+        </p:nvSpPr>
+        <p:spPr>
+          <a:xfrm>
+            <a:off x="8257032" y="3977640"/>
+            <a:ext cx="3474720" cy="1737360"/>
           </a:xfrm>
           <a:prstGeom prst="roundRect">
             <a:avLst>
-              <a:gd name="adj" fmla="val 5128"/>
+              <a:gd name="adj" fmla="val 6316"/>
             </a:avLst>
           </a:prstGeom>
           <a:solidFill>
@@ -8653,14 +10117,14 @@
       </p:sp>
       <p:sp>
         <p:nvSpPr>
-          <p:cNvPr id="21" name="Text 19"/>
-          <p:cNvSpPr/>
-          <p:nvPr/>
-        </p:nvSpPr>
-        <p:spPr>
-          <a:xfrm>
-            <a:off x="9235440" y="1554480"/>
-            <a:ext cx="2423160" cy="365760"/>
+          <p:cNvPr id="25" name="Text 23"/>
+          <p:cNvSpPr/>
+          <p:nvPr/>
+        </p:nvSpPr>
+        <p:spPr>
+          <a:xfrm>
+            <a:off x="8421624" y="4069080"/>
+            <a:ext cx="3154680" cy="384048"/>
           </a:xfrm>
           <a:prstGeom prst="rect">
             <a:avLst/>
@@ -8676,7 +10140,7 @@
               <a:buNone/>
             </a:pPr>
             <a:r>
-              <a:rPr lang="en-US" sz="1300" b="1" dirty="0">
+              <a:rPr lang="en-US" sz="1400" b="1" dirty="0">
                 <a:solidFill>
                   <a:srgbClr val="1A1A2E"/>
                 </a:solidFill>
@@ -8684,22 +10148,22 @@
                 <a:ea typeface="Segoe UI" pitchFamily="34" charset="-122"/>
                 <a:cs typeface="Segoe UI" pitchFamily="34" charset="-120"/>
               </a:rPr>
-              <a:t>✉️ Email</a:t>
-            </a:r>
-            <a:endParaRPr lang="en-US" sz="1300" dirty="0"/>
-          </a:p>
-        </p:txBody>
-      </p:sp>
-      <p:sp>
-        <p:nvSpPr>
-          <p:cNvPr id="22" name="Text 20"/>
-          <p:cNvSpPr/>
-          <p:nvPr/>
-        </p:nvSpPr>
-        <p:spPr>
-          <a:xfrm>
-            <a:off x="9235440" y="1938528"/>
-            <a:ext cx="2423160" cy="1234440"/>
+              <a:t>✳️ Claude</a:t>
+            </a:r>
+            <a:endParaRPr lang="en-US" sz="1400" dirty="0"/>
+          </a:p>
+        </p:txBody>
+      </p:sp>
+      <p:sp>
+        <p:nvSpPr>
+          <p:cNvPr id="26" name="Text 24"/>
+          <p:cNvSpPr/>
+          <p:nvPr/>
+        </p:nvSpPr>
+        <p:spPr>
+          <a:xfrm>
+            <a:off x="8421624" y="4480560"/>
+            <a:ext cx="3154680" cy="1143000"/>
           </a:xfrm>
           <a:prstGeom prst="rect">
             <a:avLst/>
@@ -8713,12 +10177,12 @@
           <a:p>
             <a:pPr indent="0" marL="0">
               <a:lnSpc>
-                <a:spcPts val="1300"/>
+                <a:spcPts val="1400"/>
               </a:lnSpc>
               <a:buNone/>
             </a:pPr>
             <a:r>
-              <a:rPr lang="en-US" sz="1000" dirty="0">
+              <a:rPr lang="en-US" sz="1050" dirty="0">
                 <a:solidFill>
                   <a:srgbClr val="55556D"/>
                 </a:solidFill>
@@ -8726,459 +10190,45 @@
                 <a:ea typeface="Segoe UI" pitchFamily="34" charset="-122"/>
                 <a:cs typeface="Segoe UI" pitchFamily="34" charset="-120"/>
               </a:rPr>
-              <a:t>Role-based digests, branded campaigns from your own domain, CC-the-Owl filing.</a:t>
-            </a:r>
-            <a:endParaRPr lang="en-US" sz="1000" dirty="0"/>
-          </a:p>
-        </p:txBody>
-      </p:sp>
-      <p:sp>
-        <p:nvSpPr>
-          <p:cNvPr id="23" name="Shape 21"/>
-          <p:cNvSpPr/>
-          <p:nvPr/>
-        </p:nvSpPr>
-        <p:spPr>
-          <a:xfrm>
-            <a:off x="457200" y="3429000"/>
-            <a:ext cx="2697480" cy="1783080"/>
-          </a:xfrm>
-          <a:prstGeom prst="roundRect">
-            <a:avLst>
-              <a:gd name="adj" fmla="val 5128"/>
-            </a:avLst>
+              <a:t>The same connector plugs your event data into Claude — read-only, per-client keys you control.</a:t>
+            </a:r>
+            <a:endParaRPr lang="en-US" sz="1050" dirty="0"/>
+          </a:p>
+        </p:txBody>
+      </p:sp>
+      <p:sp>
+        <p:nvSpPr>
+          <p:cNvPr id="27" name="Shape 25"/>
+          <p:cNvSpPr/>
+          <p:nvPr/>
+        </p:nvSpPr>
+        <p:spPr>
+          <a:xfrm>
+            <a:off x="4956048" y="2468880"/>
+            <a:ext cx="2286000" cy="2286000"/>
+          </a:xfrm>
+          <a:prstGeom prst="ellipse">
+            <a:avLst/>
           </a:prstGeom>
           <a:solidFill>
-            <a:srgbClr val="FBFAFF"/>
+            <a:srgbClr val="FF385C"/>
           </a:solidFill>
-          <a:ln w="12700">
-            <a:solidFill>
-              <a:srgbClr val="ECE9F5"/>
-            </a:solidFill>
-            <a:prstDash val="solid"/>
-          </a:ln>
-        </p:spPr>
-      </p:sp>
-      <p:sp>
-        <p:nvSpPr>
-          <p:cNvPr id="24" name="Text 22"/>
-          <p:cNvSpPr/>
-          <p:nvPr/>
-        </p:nvSpPr>
-        <p:spPr>
-          <a:xfrm>
-            <a:off x="594360" y="3520440"/>
-            <a:ext cx="2423160" cy="365760"/>
-          </a:xfrm>
-          <a:prstGeom prst="rect">
-            <a:avLst/>
-          </a:prstGeom>
-          <a:noFill/>
-          <a:ln/>
-        </p:spPr>
-        <p:txBody>
-          <a:bodyPr wrap="square" rtlCol="0" anchor="ctr"/>
-          <a:lstStyle/>
-          <a:p>
-            <a:pPr indent="0" marL="0">
-              <a:buNone/>
-            </a:pPr>
-            <a:r>
-              <a:rPr lang="en-US" sz="1300" b="1" dirty="0">
-                <a:solidFill>
-                  <a:srgbClr val="1A1A2E"/>
-                </a:solidFill>
-                <a:latin typeface="Segoe UI" pitchFamily="34" charset="0"/>
-                <a:ea typeface="Segoe UI" pitchFamily="34" charset="-122"/>
-                <a:cs typeface="Segoe UI" pitchFamily="34" charset="-120"/>
-              </a:rPr>
-              <a:t>📲 SMS</a:t>
-            </a:r>
-            <a:endParaRPr lang="en-US" sz="1300" dirty="0"/>
-          </a:p>
-        </p:txBody>
-      </p:sp>
-      <p:sp>
-        <p:nvSpPr>
-          <p:cNvPr id="25" name="Text 23"/>
-          <p:cNvSpPr/>
-          <p:nvPr/>
-        </p:nvSpPr>
-        <p:spPr>
-          <a:xfrm>
-            <a:off x="594360" y="3904488"/>
-            <a:ext cx="2423160" cy="1234440"/>
-          </a:xfrm>
-          <a:prstGeom prst="rect">
-            <a:avLst/>
-          </a:prstGeom>
-          <a:noFill/>
-          <a:ln/>
-        </p:spPr>
-        <p:txBody>
-          <a:bodyPr wrap="square" rtlCol="0" anchor="t"/>
-          <a:lstStyle/>
-          <a:p>
-            <a:pPr indent="0" marL="0">
-              <a:lnSpc>
-                <a:spcPts val="1300"/>
-              </a:lnSpc>
-              <a:buNone/>
-            </a:pPr>
-            <a:r>
-              <a:rPr lang="en-US" sz="1000" dirty="0">
-                <a:solidFill>
-                  <a:srgbClr val="55556D"/>
-                </a:solidFill>
-                <a:latin typeface="Segoe UI" pitchFamily="34" charset="0"/>
-                <a:ea typeface="Segoe UI" pitchFamily="34" charset="-122"/>
-                <a:cs typeface="Segoe UI" pitchFamily="34" charset="-120"/>
-              </a:rPr>
-              <a:t>Campaigns, urgent alerts and event-night reports — for moments that can’t wait.</a:t>
-            </a:r>
-            <a:endParaRPr lang="en-US" sz="1000" dirty="0"/>
-          </a:p>
-        </p:txBody>
-      </p:sp>
-      <p:sp>
-        <p:nvSpPr>
-          <p:cNvPr id="26" name="Shape 24"/>
-          <p:cNvSpPr/>
-          <p:nvPr/>
-        </p:nvSpPr>
-        <p:spPr>
-          <a:xfrm>
-            <a:off x="3337560" y="3429000"/>
-            <a:ext cx="2697480" cy="1783080"/>
-          </a:xfrm>
-          <a:prstGeom prst="roundRect">
-            <a:avLst>
-              <a:gd name="adj" fmla="val 5128"/>
-            </a:avLst>
-          </a:prstGeom>
-          <a:solidFill>
-            <a:srgbClr val="FBFAFF"/>
-          </a:solidFill>
-          <a:ln w="12700">
-            <a:solidFill>
-              <a:srgbClr val="ECE9F5"/>
-            </a:solidFill>
-            <a:prstDash val="solid"/>
-          </a:ln>
-        </p:spPr>
-      </p:sp>
-      <p:sp>
-        <p:nvSpPr>
-          <p:cNvPr id="27" name="Text 25"/>
-          <p:cNvSpPr/>
-          <p:nvPr/>
-        </p:nvSpPr>
-        <p:spPr>
-          <a:xfrm>
-            <a:off x="3474720" y="3520440"/>
-            <a:ext cx="2423160" cy="365760"/>
-          </a:xfrm>
-          <a:prstGeom prst="rect">
-            <a:avLst/>
-          </a:prstGeom>
-          <a:noFill/>
-          <a:ln/>
-        </p:spPr>
-        <p:txBody>
-          <a:bodyPr wrap="square" rtlCol="0" anchor="ctr"/>
-          <a:lstStyle/>
-          <a:p>
-            <a:pPr indent="0" marL="0">
-              <a:buNone/>
-            </a:pPr>
-            <a:r>
-              <a:rPr lang="en-US" sz="1300" b="1" dirty="0">
-                <a:solidFill>
-                  <a:srgbClr val="1A1A2E"/>
-                </a:solidFill>
-                <a:latin typeface="Segoe UI" pitchFamily="34" charset="0"/>
-                <a:ea typeface="Segoe UI" pitchFamily="34" charset="-122"/>
-                <a:cs typeface="Segoe UI" pitchFamily="34" charset="-120"/>
-              </a:rPr>
-              <a:t>💼 Slack</a:t>
-            </a:r>
-            <a:endParaRPr lang="en-US" sz="1300" dirty="0"/>
-          </a:p>
-        </p:txBody>
-      </p:sp>
-      <p:sp>
-        <p:nvSpPr>
-          <p:cNvPr id="28" name="Text 26"/>
-          <p:cNvSpPr/>
-          <p:nvPr/>
-        </p:nvSpPr>
-        <p:spPr>
-          <a:xfrm>
-            <a:off x="3474720" y="3904488"/>
-            <a:ext cx="2423160" cy="1234440"/>
-          </a:xfrm>
-          <a:prstGeom prst="rect">
-            <a:avLst/>
-          </a:prstGeom>
-          <a:noFill/>
-          <a:ln/>
-        </p:spPr>
-        <p:txBody>
-          <a:bodyPr wrap="square" rtlCol="0" anchor="t"/>
-          <a:lstStyle/>
-          <a:p>
-            <a:pPr indent="0" marL="0">
-              <a:lnSpc>
-                <a:spcPts val="1300"/>
-              </a:lnSpc>
-              <a:buNone/>
-            </a:pPr>
-            <a:r>
-              <a:rPr lang="en-US" sz="1000" dirty="0">
-                <a:solidFill>
-                  <a:srgbClr val="55556D"/>
-                </a:solidFill>
-                <a:latin typeface="Segoe UI" pitchFamily="34" charset="0"/>
-                <a:ea typeface="Segoe UI" pitchFamily="34" charset="-122"/>
-                <a:cs typeface="Segoe UI" pitchFamily="34" charset="-120"/>
-              </a:rPr>
-              <a:t>Mirror notifications into your channel; share any insight in one tap.</a:t>
-            </a:r>
-            <a:endParaRPr lang="en-US" sz="1000" dirty="0"/>
-          </a:p>
-        </p:txBody>
-      </p:sp>
-      <p:sp>
-        <p:nvSpPr>
-          <p:cNvPr id="29" name="Shape 27"/>
-          <p:cNvSpPr/>
-          <p:nvPr/>
-        </p:nvSpPr>
-        <p:spPr>
-          <a:xfrm>
-            <a:off x="6217920" y="3429000"/>
-            <a:ext cx="2697480" cy="1783080"/>
-          </a:xfrm>
-          <a:prstGeom prst="roundRect">
-            <a:avLst>
-              <a:gd name="adj" fmla="val 5128"/>
-            </a:avLst>
-          </a:prstGeom>
-          <a:solidFill>
-            <a:srgbClr val="FBFAFF"/>
-          </a:solidFill>
-          <a:ln w="12700">
-            <a:solidFill>
-              <a:srgbClr val="ECE9F5"/>
-            </a:solidFill>
-            <a:prstDash val="solid"/>
-          </a:ln>
-        </p:spPr>
-      </p:sp>
-      <p:sp>
-        <p:nvSpPr>
-          <p:cNvPr id="30" name="Text 28"/>
-          <p:cNvSpPr/>
-          <p:nvPr/>
-        </p:nvSpPr>
-        <p:spPr>
-          <a:xfrm>
-            <a:off x="6355080" y="3520440"/>
-            <a:ext cx="2423160" cy="365760"/>
-          </a:xfrm>
-          <a:prstGeom prst="rect">
-            <a:avLst/>
-          </a:prstGeom>
-          <a:noFill/>
-          <a:ln/>
-        </p:spPr>
-        <p:txBody>
-          <a:bodyPr wrap="square" rtlCol="0" anchor="ctr"/>
-          <a:lstStyle/>
-          <a:p>
-            <a:pPr indent="0" marL="0">
-              <a:buNone/>
-            </a:pPr>
-            <a:r>
-              <a:rPr lang="en-US" sz="1300" b="1" dirty="0">
-                <a:solidFill>
-                  <a:srgbClr val="1A1A2E"/>
-                </a:solidFill>
-                <a:latin typeface="Segoe UI" pitchFamily="34" charset="0"/>
-                <a:ea typeface="Segoe UI" pitchFamily="34" charset="-122"/>
-                <a:cs typeface="Segoe UI" pitchFamily="34" charset="-120"/>
-              </a:rPr>
-              <a:t>🌐 Your website</a:t>
-            </a:r>
-            <a:endParaRPr lang="en-US" sz="1300" dirty="0"/>
-          </a:p>
-        </p:txBody>
-      </p:sp>
-      <p:sp>
-        <p:nvSpPr>
-          <p:cNvPr id="31" name="Text 29"/>
-          <p:cNvSpPr/>
-          <p:nvPr/>
-        </p:nvSpPr>
-        <p:spPr>
-          <a:xfrm>
-            <a:off x="6355080" y="3904488"/>
-            <a:ext cx="2423160" cy="1234440"/>
-          </a:xfrm>
-          <a:prstGeom prst="rect">
-            <a:avLst/>
-          </a:prstGeom>
-          <a:noFill/>
-          <a:ln/>
-        </p:spPr>
-        <p:txBody>
-          <a:bodyPr wrap="square" rtlCol="0" anchor="t"/>
-          <a:lstStyle/>
-          <a:p>
-            <a:pPr indent="0" marL="0">
-              <a:lnSpc>
-                <a:spcPts val="1300"/>
-              </a:lnSpc>
-              <a:buNone/>
-            </a:pPr>
-            <a:r>
-              <a:rPr lang="en-US" sz="1000" dirty="0">
-                <a:solidFill>
-                  <a:srgbClr val="55556D"/>
-                </a:solidFill>
-                <a:latin typeface="Segoe UI" pitchFamily="34" charset="0"/>
-                <a:ea typeface="Segoe UI" pitchFamily="34" charset="-122"/>
-                <a:cs typeface="Segoe UI" pitchFamily="34" charset="-120"/>
-              </a:rPr>
-              <a:t>The Fan Owl widget guides fans to the right ticket on every page of your site.</a:t>
-            </a:r>
-            <a:endParaRPr lang="en-US" sz="1000" dirty="0"/>
-          </a:p>
-        </p:txBody>
-      </p:sp>
-      <p:sp>
-        <p:nvSpPr>
-          <p:cNvPr id="32" name="Shape 30"/>
-          <p:cNvSpPr/>
-          <p:nvPr/>
-        </p:nvSpPr>
-        <p:spPr>
-          <a:xfrm>
-            <a:off x="9098280" y="3429000"/>
-            <a:ext cx="2697480" cy="1783080"/>
-          </a:xfrm>
-          <a:prstGeom prst="roundRect">
-            <a:avLst>
-              <a:gd name="adj" fmla="val 5128"/>
-            </a:avLst>
-          </a:prstGeom>
-          <a:solidFill>
-            <a:srgbClr val="FBFAFF"/>
-          </a:solidFill>
-          <a:ln w="12700">
-            <a:solidFill>
-              <a:srgbClr val="ECE9F5"/>
-            </a:solidFill>
-            <a:prstDash val="solid"/>
-          </a:ln>
-        </p:spPr>
-      </p:sp>
-      <p:sp>
-        <p:nvSpPr>
-          <p:cNvPr id="33" name="Text 31"/>
-          <p:cNvSpPr/>
-          <p:nvPr/>
-        </p:nvSpPr>
-        <p:spPr>
-          <a:xfrm>
-            <a:off x="9235440" y="3520440"/>
-            <a:ext cx="2423160" cy="365760"/>
-          </a:xfrm>
-          <a:prstGeom prst="rect">
-            <a:avLst/>
-          </a:prstGeom>
-          <a:noFill/>
-          <a:ln/>
-        </p:spPr>
-        <p:txBody>
-          <a:bodyPr wrap="square" rtlCol="0" anchor="ctr"/>
-          <a:lstStyle/>
-          <a:p>
-            <a:pPr indent="0" marL="0">
-              <a:buNone/>
-            </a:pPr>
-            <a:r>
-              <a:rPr lang="en-US" sz="1300" b="1" dirty="0">
-                <a:solidFill>
-                  <a:srgbClr val="1A1A2E"/>
-                </a:solidFill>
-                <a:latin typeface="Segoe UI" pitchFamily="34" charset="0"/>
-                <a:ea typeface="Segoe UI" pitchFamily="34" charset="-122"/>
-                <a:cs typeface="Segoe UI" pitchFamily="34" charset="-120"/>
-              </a:rPr>
-              <a:t>🎫 Howler portal</a:t>
-            </a:r>
-            <a:endParaRPr lang="en-US" sz="1300" dirty="0"/>
-          </a:p>
-        </p:txBody>
-      </p:sp>
-      <p:sp>
-        <p:nvSpPr>
-          <p:cNvPr id="34" name="Text 32"/>
-          <p:cNvSpPr/>
-          <p:nvPr/>
-        </p:nvSpPr>
-        <p:spPr>
-          <a:xfrm>
-            <a:off x="9235440" y="3904488"/>
-            <a:ext cx="2423160" cy="1234440"/>
-          </a:xfrm>
-          <a:prstGeom prst="rect">
-            <a:avLst/>
-          </a:prstGeom>
-          <a:noFill/>
-          <a:ln/>
-        </p:spPr>
-        <p:txBody>
-          <a:bodyPr wrap="square" rtlCol="0" anchor="t"/>
-          <a:lstStyle/>
-          <a:p>
-            <a:pPr indent="0" marL="0">
-              <a:lnSpc>
-                <a:spcPts val="1300"/>
-              </a:lnSpc>
-              <a:buNone/>
-            </a:pPr>
-            <a:r>
-              <a:rPr lang="en-US" sz="1000" dirty="0">
-                <a:solidFill>
-                  <a:srgbClr val="55556D"/>
-                </a:solidFill>
-                <a:latin typeface="Segoe UI" pitchFamily="34" charset="0"/>
-                <a:ea typeface="Segoe UI" pitchFamily="34" charset="-122"/>
-                <a:cs typeface="Segoe UI" pitchFamily="34" charset="-120"/>
-              </a:rPr>
-              <a:t>The Owl embedded in the organizer portal you already use every day.</a:t>
-            </a:r>
-            <a:endParaRPr lang="en-US" sz="1000" dirty="0"/>
-          </a:p>
-        </p:txBody>
-      </p:sp>
-      <p:sp>
-        <p:nvSpPr>
-          <p:cNvPr id="35" name="Shape 33"/>
-          <p:cNvSpPr/>
-          <p:nvPr/>
-        </p:nvSpPr>
-        <p:spPr>
-          <a:xfrm>
-            <a:off x="457200" y="5486400"/>
-            <a:ext cx="11338560" cy="777240"/>
-          </a:xfrm>
-          <a:prstGeom prst="roundRect">
-            <a:avLst>
-              <a:gd name="adj" fmla="val 11765"/>
-            </a:avLst>
+          <a:ln/>
+        </p:spPr>
+      </p:sp>
+      <p:sp>
+        <p:nvSpPr>
+          <p:cNvPr id="28" name="Shape 26"/>
+          <p:cNvSpPr/>
+          <p:nvPr/>
+        </p:nvSpPr>
+        <p:spPr>
+          <a:xfrm>
+            <a:off x="5047488" y="2560320"/>
+            <a:ext cx="2103120" cy="2103120"/>
+          </a:xfrm>
+          <a:prstGeom prst="ellipse">
+            <a:avLst/>
           </a:prstGeom>
           <a:solidFill>
             <a:srgbClr val="1A1A2E"/>
@@ -9188,14 +10238,14 @@
       </p:sp>
       <p:sp>
         <p:nvSpPr>
-          <p:cNvPr id="36" name="Text 34"/>
-          <p:cNvSpPr/>
-          <p:nvPr/>
-        </p:nvSpPr>
-        <p:spPr>
-          <a:xfrm>
-            <a:off x="731520" y="5486400"/>
-            <a:ext cx="10789920" cy="777240"/>
+          <p:cNvPr id="29" name="Text 27"/>
+          <p:cNvSpPr/>
+          <p:nvPr/>
+        </p:nvSpPr>
+        <p:spPr>
+          <a:xfrm>
+            <a:off x="4956048" y="2468880"/>
+            <a:ext cx="2286000" cy="2286000"/>
           </a:xfrm>
           <a:prstGeom prst="rect">
             <a:avLst/>
@@ -9211,7 +10261,98 @@
               <a:buNone/>
             </a:pPr>
             <a:r>
-              <a:rPr lang="en-US" sz="1400" b="1" dirty="0">
+              <a:rPr lang="en-US" sz="2600" dirty="0">
+                <a:solidFill>
+                  <a:srgbClr val="000000"/>
+                </a:solidFill>
+                <a:latin typeface="Segoe UI" pitchFamily="34" charset="0"/>
+                <a:ea typeface="Segoe UI" pitchFamily="34" charset="-122"/>
+                <a:cs typeface="Segoe UI" pitchFamily="34" charset="-120"/>
+              </a:rPr>
+              <a:t>🦉
+</a:t>
+            </a:r>
+            <a:pPr algn="ctr" indent="0" marL="0">
+              <a:buNone/>
+            </a:pPr>
+            <a:r>
+              <a:rPr lang="en-US" sz="1200" b="1" dirty="0">
+                <a:solidFill>
+                  <a:srgbClr val="FFFFFF"/>
+                </a:solidFill>
+                <a:latin typeface="Segoe UI" pitchFamily="34" charset="0"/>
+                <a:ea typeface="Segoe UI" pitchFamily="34" charset="-122"/>
+                <a:cs typeface="Segoe UI" pitchFamily="34" charset="-120"/>
+              </a:rPr>
+              <a:t>THE OWL
+</a:t>
+            </a:r>
+            <a:pPr algn="ctr" indent="0" marL="0">
+              <a:buNone/>
+            </a:pPr>
+            <a:r>
+              <a:rPr lang="en-US" sz="800" dirty="0">
+                <a:solidFill>
+                  <a:srgbClr val="B8B3D9"/>
+                </a:solidFill>
+                <a:latin typeface="Segoe UI" pitchFamily="34" charset="0"/>
+                <a:ea typeface="Segoe UI" pitchFamily="34" charset="-122"/>
+                <a:cs typeface="Segoe UI" pitchFamily="34" charset="-120"/>
+              </a:rPr>
+              <a:t>one brain · your data</a:t>
+            </a:r>
+            <a:endParaRPr lang="en-US" sz="2600" dirty="0"/>
+          </a:p>
+        </p:txBody>
+      </p:sp>
+      <p:sp>
+        <p:nvSpPr>
+          <p:cNvPr id="30" name="Shape 28"/>
+          <p:cNvSpPr/>
+          <p:nvPr/>
+        </p:nvSpPr>
+        <p:spPr>
+          <a:xfrm>
+            <a:off x="457200" y="5943600"/>
+            <a:ext cx="11338560" cy="502920"/>
+          </a:xfrm>
+          <a:prstGeom prst="roundRect">
+            <a:avLst>
+              <a:gd name="adj" fmla="val 14545"/>
+            </a:avLst>
+          </a:prstGeom>
+          <a:solidFill>
+            <a:srgbClr val="1A1A2E"/>
+          </a:solidFill>
+          <a:ln/>
+        </p:spPr>
+      </p:sp>
+      <p:sp>
+        <p:nvSpPr>
+          <p:cNvPr id="31" name="Text 29"/>
+          <p:cNvSpPr/>
+          <p:nvPr/>
+        </p:nvSpPr>
+        <p:spPr>
+          <a:xfrm>
+            <a:off x="731520" y="5943600"/>
+            <a:ext cx="10789920" cy="502920"/>
+          </a:xfrm>
+          <a:prstGeom prst="rect">
+            <a:avLst/>
+          </a:prstGeom>
+          <a:noFill/>
+          <a:ln/>
+        </p:spPr>
+        <p:txBody>
+          <a:bodyPr wrap="square" rtlCol="0" anchor="ctr"/>
+          <a:lstStyle/>
+          <a:p>
+            <a:pPr algn="ctr" indent="0" marL="0">
+              <a:buNone/>
+            </a:pPr>
+            <a:r>
+              <a:rPr lang="en-US" sz="1250" b="1" dirty="0">
                 <a:solidFill>
                   <a:srgbClr val="D8D4F0"/>
                 </a:solidFill>
@@ -9219,9 +10360,9 @@
                 <a:ea typeface="Segoe UI" pitchFamily="34" charset="-122"/>
                 <a:cs typeface="Segoe UI" pitchFamily="34" charset="-120"/>
               </a:rPr>
-              <a:t>Nobody has to change how they work — Pulse comes to them. Same data, same security boundary, every surface.</a:t>
-            </a:r>
-            <a:endParaRPr lang="en-US" sz="1400" dirty="0"/>
+              <a:t>Ask in the app, on WhatsApp, in ChatGPT or Claude — same Owl, same live data, same security boundary.</a:t>
+            </a:r>
+            <a:endParaRPr lang="en-US" sz="1250" dirty="0"/>
           </a:p>
         </p:txBody>
       </p:sp>
@@ -11493,8 +12634,8 @@
         </p:nvSpPr>
         <p:spPr>
           <a:xfrm>
-            <a:off x="457200" y="1417320"/>
-            <a:ext cx="5486400" cy="914400"/>
+            <a:off x="457200" y="1371600"/>
+            <a:ext cx="5394960" cy="914400"/>
           </a:xfrm>
           <a:prstGeom prst="rect">
             <a:avLst/>
@@ -11521,7 +12662,7 @@
                 <a:ea typeface="Segoe UI" pitchFamily="34" charset="-122"/>
                 <a:cs typeface="Segoe UI" pitchFamily="34" charset="-120"/>
               </a:rPr>
-              <a:t>The live overview  </a:t>
+              <a:t>The live site map  </a:t>
             </a:r>
             <a:pPr indent="0" marL="0">
               <a:lnSpc>
@@ -11538,7 +12679,7 @@
                 <a:ea typeface="Segoe UI" pitchFamily="34" charset="-122"/>
                 <a:cs typeface="Segoe UI" pitchFamily="34" charset="-120"/>
               </a:rPr>
-              <a:t>— device counts by state, per-station deployment, open issues and a live activity feed: the “where is everything right now” board.</a:t>
+              <a:t>— your venue’s own plan with every station pinned: heat shows where the crowd is spending right now; a dark station is flagged the moment its data stops.</a:t>
             </a:r>
             <a:endParaRPr lang="en-US" sz="1200" dirty="0"/>
           </a:p>
@@ -11552,8 +12693,8 @@
         </p:nvSpPr>
         <p:spPr>
           <a:xfrm>
-            <a:off x="457200" y="2514600"/>
-            <a:ext cx="5486400" cy="914400"/>
+            <a:off x="457200" y="2395728"/>
+            <a:ext cx="5394960" cy="914400"/>
           </a:xfrm>
           <a:prstGeom prst="rect">
             <a:avLst/>
@@ -11597,7 +12738,7 @@
                 <a:ea typeface="Segoe UI" pitchFamily="34" charset="-122"/>
                 <a:cs typeface="Segoe UI" pitchFamily="34" charset="-120"/>
               </a:rPr>
-              <a:t>— every station’s activity through the day in time blocks: watch the crowd move, spot the overloaded station and the dead one, staff accordingly.</a:t>
+              <a:t>— station activity through the day in time blocks: watch the crowd move, spot the overloaded station and the dead one, staff accordingly.</a:t>
             </a:r>
             <a:endParaRPr lang="en-US" sz="1200" dirty="0"/>
           </a:p>
@@ -11611,8 +12752,8 @@
         </p:nvSpPr>
         <p:spPr>
           <a:xfrm>
-            <a:off x="457200" y="3611880"/>
-            <a:ext cx="5486400" cy="914400"/>
+            <a:off x="457200" y="3419856"/>
+            <a:ext cx="5394960" cy="914400"/>
           </a:xfrm>
           <a:prstGeom prst="rect">
             <a:avLst/>
@@ -11670,8 +12811,8 @@
         </p:nvSpPr>
         <p:spPr>
           <a:xfrm>
-            <a:off x="6309360" y="1417320"/>
-            <a:ext cx="5486400" cy="914400"/>
+            <a:off x="457200" y="4315968"/>
+            <a:ext cx="5394960" cy="914400"/>
           </a:xfrm>
           <a:prstGeom prst="rect">
             <a:avLst/>
@@ -11715,7 +12856,7 @@
                 <a:ea typeface="Segoe UI" pitchFamily="34" charset="-122"/>
                 <a:cs typeface="Segoe UI" pitchFamily="34" charset="-120"/>
               </a:rPr>
-              <a:t>— per-station stream watch and a device roster showing exactly which units are offline and for how long. Know a scanner died before the queue does.</a:t>
+              <a:t>— stream watch per station and a roster of exactly which units are offline and for how long. Know a scanner died before the queue does.</a:t>
             </a:r>
             <a:endParaRPr lang="en-US" sz="1200" dirty="0"/>
           </a:p>
@@ -11729,8 +12870,8 @@
         </p:nvSpPr>
         <p:spPr>
           <a:xfrm>
-            <a:off x="6309360" y="2514600"/>
-            <a:ext cx="5486400" cy="914400"/>
+            <a:off x="457200" y="5340096"/>
+            <a:ext cx="5394960" cy="914400"/>
           </a:xfrm>
           <a:prstGeom prst="rect">
             <a:avLst/>
@@ -11757,7 +12898,7 @@
                 <a:ea typeface="Segoe UI" pitchFamily="34" charset="-122"/>
                 <a:cs typeface="Segoe UI" pitchFamily="34" charset="-120"/>
               </a:rPr>
-              <a:t>AI Diagnose + event report  </a:t>
+              <a:t>AI Diagnose · live updates · alerts  </a:t>
             </a:r>
             <a:pPr indent="0" marL="0">
               <a:lnSpc>
@@ -11774,99 +12915,133 @@
                 <a:ea typeface="Segoe UI" pitchFamily="34" charset="-122"/>
                 <a:cs typeface="Segoe UI" pitchFamily="34" charset="-120"/>
               </a:rPr>
-              <a:t>— one-tap AI verdicts per station, and a post-event diagnostics report clean enough to forward to the network provider.</a:t>
+              <a:t>— one-tap AI verdicts per station, a multi-metric mini report every 15–120 min while doors are open, and threshold alerts on any number.</a:t>
             </a:r>
             <a:endParaRPr lang="en-US" sz="1200" dirty="0"/>
           </a:p>
         </p:txBody>
       </p:sp>
-      <p:sp>
-        <p:nvSpPr>
-          <p:cNvPr id="16" name="Text 14"/>
-          <p:cNvSpPr/>
-          <p:nvPr/>
-        </p:nvSpPr>
-        <p:spPr>
-          <a:xfrm>
-            <a:off x="6309360" y="3611880"/>
-            <a:ext cx="5486400" cy="914400"/>
-          </a:xfrm>
-          <a:prstGeom prst="rect">
-            <a:avLst/>
-          </a:prstGeom>
-          <a:noFill/>
-          <a:ln/>
-        </p:spPr>
-        <p:txBody>
-          <a:bodyPr wrap="square" rtlCol="0" anchor="t"/>
-          <a:lstStyle/>
-          <a:p>
-            <a:pPr indent="0" marL="0">
+      <p:pic>
+        <p:nvPicPr>
+          <p:cNvPr id="16" name="Image 0" descr="sitemap.png">    </p:cNvPr>
+          <p:cNvPicPr>
+            <a:picLocks noChangeAspect="1"/>
+          </p:cNvPicPr>
+          <p:nvPr/>
+        </p:nvPicPr>
+        <p:blipFill>
+          <a:blip r:embed="rId1"/>
+          <a:stretch>
+            <a:fillRect/>
+          </a:stretch>
+        </p:blipFill>
+        <p:spPr>
+          <a:xfrm>
+            <a:off x="6172200" y="1463040"/>
+            <a:ext cx="5577840" cy="2039112"/>
+          </a:xfrm>
+          <a:prstGeom prst="rect">
+            <a:avLst/>
+          </a:prstGeom>
+        </p:spPr>
+      </p:pic>
+      <p:sp>
+        <p:nvSpPr>
+          <p:cNvPr id="17" name="Text 14"/>
+          <p:cNvSpPr/>
+          <p:nvPr/>
+        </p:nvSpPr>
+        <p:spPr>
+          <a:xfrm>
+            <a:off x="6172200" y="3566160"/>
+            <a:ext cx="5577840" cy="457200"/>
+          </a:xfrm>
+          <a:prstGeom prst="rect">
+            <a:avLst/>
+          </a:prstGeom>
+          <a:noFill/>
+          <a:ln/>
+        </p:spPr>
+        <p:txBody>
+          <a:bodyPr wrap="square" rtlCol="0" anchor="ctr"/>
+          <a:lstStyle/>
+          <a:p>
+            <a:pPr indent="0" marL="0">
+              <a:buNone/>
+            </a:pPr>
+            <a:r>
+              <a:rPr lang="en-US" sz="1000" i="1" dirty="0">
+                <a:solidFill>
+                  <a:srgbClr val="55556D"/>
+                </a:solidFill>
+                <a:latin typeface="Segoe UI" pitchFamily="34" charset="0"/>
+                <a:ea typeface="Segoe UI" pitchFamily="34" charset="-122"/>
+                <a:cs typeface="Segoe UI" pitchFamily="34" charset="-120"/>
+              </a:rPr>
+              <a:t>The Flow board’s live site map — stations, heat and a dark station, on your own venue plan.</a:t>
+            </a:r>
+            <a:endParaRPr lang="en-US" sz="1000" dirty="0"/>
+          </a:p>
+        </p:txBody>
+      </p:sp>
+      <p:sp>
+        <p:nvSpPr>
+          <p:cNvPr id="18" name="Shape 15"/>
+          <p:cNvSpPr/>
+          <p:nvPr/>
+        </p:nvSpPr>
+        <p:spPr>
+          <a:xfrm>
+            <a:off x="6172200" y="4160520"/>
+            <a:ext cx="5577840" cy="1828800"/>
+          </a:xfrm>
+          <a:prstGeom prst="roundRect">
+            <a:avLst>
+              <a:gd name="adj" fmla="val 5000"/>
+            </a:avLst>
+          </a:prstGeom>
+          <a:solidFill>
+            <a:srgbClr val="F0FBFD"/>
+          </a:solidFill>
+          <a:ln w="12700">
+            <a:solidFill>
+              <a:srgbClr val="06B6D4"/>
+            </a:solidFill>
+            <a:prstDash val="solid"/>
+          </a:ln>
+        </p:spPr>
+      </p:sp>
+      <p:sp>
+        <p:nvSpPr>
+          <p:cNvPr id="19" name="Text 16"/>
+          <p:cNvSpPr/>
+          <p:nvPr/>
+        </p:nvSpPr>
+        <p:spPr>
+          <a:xfrm>
+            <a:off x="6400800" y="4297680"/>
+            <a:ext cx="5120640" cy="1554480"/>
+          </a:xfrm>
+          <a:prstGeom prst="rect">
+            <a:avLst/>
+          </a:prstGeom>
+          <a:noFill/>
+          <a:ln/>
+        </p:spPr>
+        <p:txBody>
+          <a:bodyPr wrap="square" rtlCol="0" anchor="ctr"/>
+          <a:lstStyle/>
+          <a:p>
+            <a:pPr algn="ctr" indent="0" marL="0">
               <a:lnSpc>
-                <a:spcPts val="1600"/>
+                <a:spcPts val="2000"/>
               </a:lnSpc>
               <a:buNone/>
             </a:pPr>
             <a:r>
-              <a:rPr lang="en-US" sz="1200" b="1" dirty="0">
-                <a:solidFill>
-                  <a:srgbClr val="1A1A2E"/>
-                </a:solidFill>
-                <a:latin typeface="Segoe UI" pitchFamily="34" charset="0"/>
-                <a:ea typeface="Segoe UI" pitchFamily="34" charset="-122"/>
-                <a:cs typeface="Segoe UI" pitchFamily="34" charset="-120"/>
-              </a:rPr>
-              <a:t>Live updates &amp; alerts  </a:t>
-            </a:r>
-            <a:pPr indent="0" marL="0">
-              <a:lnSpc>
-                <a:spcPts val="1600"/>
-              </a:lnSpc>
-              <a:buNone/>
-            </a:pPr>
-            <a:r>
-              <a:rPr lang="en-US" sz="1200" dirty="0">
-                <a:solidFill>
-                  <a:srgbClr val="55556D"/>
-                </a:solidFill>
-                <a:latin typeface="Segoe UI" pitchFamily="34" charset="0"/>
-                <a:ea typeface="Segoe UI" pitchFamily="34" charset="-122"/>
-                <a:cs typeface="Segoe UI" pitchFamily="34" charset="-120"/>
-              </a:rPr>
-              <a:t>— a multi-metric mini report every 15–120 min while doors are open (gates pace, bar revenue, top vendors, device health), plus threshold alerts on any number.</a:t>
-            </a:r>
-            <a:endParaRPr lang="en-US" sz="1200" dirty="0"/>
-          </a:p>
-        </p:txBody>
-      </p:sp>
-      <p:sp>
-        <p:nvSpPr>
-          <p:cNvPr id="17" name="Text 15"/>
-          <p:cNvSpPr/>
-          <p:nvPr/>
-        </p:nvSpPr>
-        <p:spPr>
-          <a:xfrm>
-            <a:off x="457200" y="5394960"/>
-            <a:ext cx="11338560" cy="457200"/>
-          </a:xfrm>
-          <a:prstGeom prst="rect">
-            <a:avLst/>
-          </a:prstGeom>
-          <a:noFill/>
-          <a:ln/>
-        </p:spPr>
-        <p:txBody>
-          <a:bodyPr wrap="square" rtlCol="0" anchor="ctr"/>
-          <a:lstStyle/>
-          <a:p>
-            <a:pPr algn="ctr" indent="0" marL="0">
-              <a:buNone/>
-            </a:pPr>
-            <a:r>
-              <a:rPr lang="en-US" sz="1500" b="1" i="1" dirty="0">
-                <a:solidFill>
-                  <a:srgbClr val="06B6D4"/>
+              <a:rPr lang="en-US" sz="1400" b="1" i="1" dirty="0">
+                <a:solidFill>
+                  <a:srgbClr val="0E7490"/>
                 </a:solidFill>
                 <a:latin typeface="Segoe UI" pitchFamily="34" charset="0"/>
                 <a:ea typeface="Segoe UI" pitchFamily="34" charset="-122"/>
@@ -11874,7 +13049,7 @@
               </a:rPr>
               <a:t>“You’ll know a hotspot is forming, or a scanner has died, before anyone on the ground has to tell you.”</a:t>
             </a:r>
-            <a:endParaRPr lang="en-US" sz="1500" dirty="0"/>
+            <a:endParaRPr lang="en-US" sz="1400" dirty="0"/>
           </a:p>
         </p:txBody>
       </p:sp>

--- a/docs/sales-collateral/Pulse-Sales-Deck.pptx
+++ b/docs/sales-collateral/Pulse-Sales-Deck.pptx
@@ -2003,9 +2003,33 @@
           <a:ln/>
         </p:spPr>
       </p:sp>
-      <p:sp>
-        <p:nvSpPr>
-          <p:cNvPr id="5" name="Text 3"/>
+      <p:pic>
+        <p:nvPicPr>
+          <p:cNvPr id="5" name="Image 0" descr="howler-logo.png">    </p:cNvPr>
+          <p:cNvPicPr>
+            <a:picLocks noChangeAspect="1"/>
+          </p:cNvPicPr>
+          <p:nvPr/>
+        </p:nvPicPr>
+        <p:blipFill>
+          <a:blip r:embed="rId1"/>
+          <a:stretch>
+            <a:fillRect/>
+          </a:stretch>
+        </p:blipFill>
+        <p:spPr>
+          <a:xfrm>
+            <a:off x="822960" y="502920"/>
+            <a:ext cx="777240" cy="777240"/>
+          </a:xfrm>
+          <a:prstGeom prst="ellipse">
+            <a:avLst/>
+          </a:prstGeom>
+        </p:spPr>
+      </p:pic>
+      <p:sp>
+        <p:nvSpPr>
+          <p:cNvPr id="6" name="Text 3"/>
           <p:cNvSpPr/>
           <p:nvPr/>
         </p:nvSpPr>
@@ -2044,7 +2068,7 @@
       </p:sp>
       <p:sp>
         <p:nvSpPr>
-          <p:cNvPr id="6" name="Text 4"/>
+          <p:cNvPr id="7" name="Text 4"/>
           <p:cNvSpPr/>
           <p:nvPr/>
         </p:nvSpPr>
@@ -2097,7 +2121,7 @@
       </p:sp>
       <p:sp>
         <p:nvSpPr>
-          <p:cNvPr id="7" name="Text 5"/>
+          <p:cNvPr id="8" name="Text 5"/>
           <p:cNvSpPr/>
           <p:nvPr/>
         </p:nvSpPr>
@@ -2136,7 +2160,7 @@
       </p:sp>
       <p:sp>
         <p:nvSpPr>
-          <p:cNvPr id="8" name="Text 6"/>
+          <p:cNvPr id="9" name="Text 6"/>
           <p:cNvSpPr/>
           <p:nvPr/>
         </p:nvSpPr>
@@ -2178,7 +2202,7 @@
       </p:sp>
       <p:sp>
         <p:nvSpPr>
-          <p:cNvPr id="9" name="Shape 7"/>
+          <p:cNvPr id="10" name="Shape 7"/>
           <p:cNvSpPr/>
           <p:nvPr/>
         </p:nvSpPr>
@@ -2198,7 +2222,7 @@
       </p:sp>
       <p:sp>
         <p:nvSpPr>
-          <p:cNvPr id="10" name="Shape 8"/>
+          <p:cNvPr id="11" name="Shape 8"/>
           <p:cNvSpPr/>
           <p:nvPr/>
         </p:nvSpPr>
@@ -2218,7 +2242,7 @@
       </p:sp>
       <p:sp>
         <p:nvSpPr>
-          <p:cNvPr id="11" name="Shape 9"/>
+          <p:cNvPr id="12" name="Shape 9"/>
           <p:cNvSpPr/>
           <p:nvPr/>
         </p:nvSpPr>
@@ -2238,7 +2262,7 @@
       </p:sp>
       <p:sp>
         <p:nvSpPr>
-          <p:cNvPr id="12" name="Text 10"/>
+          <p:cNvPr id="13" name="Text 10"/>
           <p:cNvSpPr/>
           <p:nvPr/>
         </p:nvSpPr>
@@ -5396,16 +5420,40 @@
           <a:ln/>
         </p:spPr>
       </p:sp>
-      <p:sp>
-        <p:nvSpPr>
-          <p:cNvPr id="28" name="Text 26"/>
-          <p:cNvSpPr/>
-          <p:nvPr/>
-        </p:nvSpPr>
-        <p:spPr>
-          <a:xfrm>
-            <a:off x="777240" y="3703320"/>
-            <a:ext cx="10698480" cy="960120"/>
+      <p:pic>
+        <p:nvPicPr>
+          <p:cNvPr id="28" name="Image 0" descr="owl-mark.png">    </p:cNvPr>
+          <p:cNvPicPr>
+            <a:picLocks noChangeAspect="1"/>
+          </p:cNvPicPr>
+          <p:nvPr/>
+        </p:nvPicPr>
+        <p:blipFill>
+          <a:blip r:embed="rId1"/>
+          <a:stretch>
+            <a:fillRect/>
+          </a:stretch>
+        </p:blipFill>
+        <p:spPr>
+          <a:xfrm>
+            <a:off x="713232" y="3794760"/>
+            <a:ext cx="777240" cy="777240"/>
+          </a:xfrm>
+          <a:prstGeom prst="rect">
+            <a:avLst/>
+          </a:prstGeom>
+        </p:spPr>
+      </p:pic>
+      <p:sp>
+        <p:nvSpPr>
+          <p:cNvPr id="29" name="Text 26"/>
+          <p:cNvSpPr/>
+          <p:nvPr/>
+        </p:nvSpPr>
+        <p:spPr>
+          <a:xfrm>
+            <a:off x="1691640" y="3703320"/>
+            <a:ext cx="9875520" cy="960120"/>
           </a:xfrm>
           <a:prstGeom prst="rect">
             <a:avLst/>
@@ -5432,7 +5480,7 @@
                 <a:ea typeface="Segoe UI" pitchFamily="34" charset="-122"/>
                 <a:cs typeface="Segoe UI" pitchFamily="34" charset="-120"/>
               </a:rPr>
-              <a:t>📊 Pulse — the brain of the stack.  </a:t>
+              <a:t>Pulse — the brain of the stack.  </a:t>
             </a:r>
             <a:pPr indent="0" marL="0">
               <a:lnSpc>
@@ -5457,7 +5505,7 @@
       </p:sp>
       <p:sp>
         <p:nvSpPr>
-          <p:cNvPr id="29" name="Text 27"/>
+          <p:cNvPr id="30" name="Text 27"/>
           <p:cNvSpPr/>
           <p:nvPr/>
         </p:nvSpPr>
@@ -5496,7 +5544,7 @@
       </p:sp>
       <p:sp>
         <p:nvSpPr>
-          <p:cNvPr id="30" name="Shape 28"/>
+          <p:cNvPr id="31" name="Shape 28"/>
           <p:cNvSpPr/>
           <p:nvPr/>
         </p:nvSpPr>
@@ -5518,7 +5566,7 @@
       </p:sp>
       <p:sp>
         <p:nvSpPr>
-          <p:cNvPr id="31" name="Text 29"/>
+          <p:cNvPr id="32" name="Text 29"/>
           <p:cNvSpPr/>
           <p:nvPr/>
         </p:nvSpPr>
@@ -5580,7 +5628,7 @@
       </p:sp>
       <p:sp>
         <p:nvSpPr>
-          <p:cNvPr id="32" name="Shape 30"/>
+          <p:cNvPr id="33" name="Shape 30"/>
           <p:cNvSpPr/>
           <p:nvPr/>
         </p:nvSpPr>
@@ -5602,7 +5650,7 @@
       </p:sp>
       <p:sp>
         <p:nvSpPr>
-          <p:cNvPr id="33" name="Text 31"/>
+          <p:cNvPr id="34" name="Text 31"/>
           <p:cNvSpPr/>
           <p:nvPr/>
         </p:nvSpPr>
@@ -5664,7 +5712,7 @@
       </p:sp>
       <p:sp>
         <p:nvSpPr>
-          <p:cNvPr id="34" name="Shape 32"/>
+          <p:cNvPr id="35" name="Shape 32"/>
           <p:cNvSpPr/>
           <p:nvPr/>
         </p:nvSpPr>
@@ -5686,7 +5734,7 @@
       </p:sp>
       <p:sp>
         <p:nvSpPr>
-          <p:cNvPr id="35" name="Text 33"/>
+          <p:cNvPr id="36" name="Text 33"/>
           <p:cNvSpPr/>
           <p:nvPr/>
         </p:nvSpPr>
@@ -5838,9 +5886,33 @@
           <a:ln/>
         </p:spPr>
       </p:sp>
-      <p:sp>
-        <p:nvSpPr>
-          <p:cNvPr id="5" name="Text 3"/>
+      <p:pic>
+        <p:nvPicPr>
+          <p:cNvPr id="5" name="Image 0" descr="howler-logo.png">    </p:cNvPr>
+          <p:cNvPicPr>
+            <a:picLocks noChangeAspect="1"/>
+          </p:cNvPicPr>
+          <p:nvPr/>
+        </p:nvPicPr>
+        <p:blipFill>
+          <a:blip r:embed="rId1"/>
+          <a:stretch>
+            <a:fillRect/>
+          </a:stretch>
+        </p:blipFill>
+        <p:spPr>
+          <a:xfrm>
+            <a:off x="822960" y="502920"/>
+            <a:ext cx="777240" cy="777240"/>
+          </a:xfrm>
+          <a:prstGeom prst="ellipse">
+            <a:avLst/>
+          </a:prstGeom>
+        </p:spPr>
+      </p:pic>
+      <p:sp>
+        <p:nvSpPr>
+          <p:cNvPr id="6" name="Text 3"/>
           <p:cNvSpPr/>
           <p:nvPr/>
         </p:nvSpPr>
@@ -5879,7 +5951,7 @@
       </p:sp>
       <p:sp>
         <p:nvSpPr>
-          <p:cNvPr id="6" name="Text 4"/>
+          <p:cNvPr id="7" name="Text 4"/>
           <p:cNvSpPr/>
           <p:nvPr/>
         </p:nvSpPr>
@@ -5921,7 +5993,7 @@
       </p:sp>
       <p:sp>
         <p:nvSpPr>
-          <p:cNvPr id="7" name="Text 5"/>
+          <p:cNvPr id="8" name="Text 5"/>
           <p:cNvSpPr/>
           <p:nvPr/>
         </p:nvSpPr>
@@ -5960,7 +6032,7 @@
       </p:sp>
       <p:sp>
         <p:nvSpPr>
-          <p:cNvPr id="8" name="Shape 6"/>
+          <p:cNvPr id="9" name="Shape 6"/>
           <p:cNvSpPr/>
           <p:nvPr/>
         </p:nvSpPr>
@@ -5982,7 +6054,7 @@
       </p:sp>
       <p:sp>
         <p:nvSpPr>
-          <p:cNvPr id="9" name="Text 7"/>
+          <p:cNvPr id="10" name="Text 7"/>
           <p:cNvSpPr/>
           <p:nvPr/>
         </p:nvSpPr>
@@ -6021,7 +6093,7 @@
       </p:sp>
       <p:sp>
         <p:nvSpPr>
-          <p:cNvPr id="10" name="Text 8"/>
+          <p:cNvPr id="11" name="Text 8"/>
           <p:cNvSpPr/>
           <p:nvPr/>
         </p:nvSpPr>
@@ -10196,39 +10268,45 @@
           </a:p>
         </p:txBody>
       </p:sp>
-      <p:sp>
-        <p:nvSpPr>
-          <p:cNvPr id="27" name="Shape 25"/>
-          <p:cNvSpPr/>
-          <p:nvPr/>
-        </p:nvSpPr>
-        <p:spPr>
-          <a:xfrm>
-            <a:off x="4956048" y="2468880"/>
+      <p:pic>
+        <p:nvPicPr>
+          <p:cNvPr id="27" name="Image 0" descr="owl-mark.png">    </p:cNvPr>
+          <p:cNvPicPr>
+            <a:picLocks noChangeAspect="1"/>
+          </p:cNvPicPr>
+          <p:nvPr/>
+        </p:nvPicPr>
+        <p:blipFill>
+          <a:blip r:embed="rId1"/>
+          <a:stretch>
+            <a:fillRect/>
+          </a:stretch>
+        </p:blipFill>
+        <p:spPr>
+          <a:xfrm>
+            <a:off x="4956048" y="2331720"/>
             <a:ext cx="2286000" cy="2286000"/>
           </a:xfrm>
-          <a:prstGeom prst="ellipse">
-            <a:avLst/>
-          </a:prstGeom>
-          <a:solidFill>
-            <a:srgbClr val="FF385C"/>
-          </a:solidFill>
-          <a:ln/>
-        </p:spPr>
-      </p:sp>
-      <p:sp>
-        <p:nvSpPr>
-          <p:cNvPr id="28" name="Shape 26"/>
-          <p:cNvSpPr/>
-          <p:nvPr/>
-        </p:nvSpPr>
-        <p:spPr>
-          <a:xfrm>
-            <a:off x="5047488" y="2560320"/>
-            <a:ext cx="2103120" cy="2103120"/>
-          </a:xfrm>
-          <a:prstGeom prst="ellipse">
-            <a:avLst/>
+          <a:prstGeom prst="rect">
+            <a:avLst/>
+          </a:prstGeom>
+        </p:spPr>
+      </p:pic>
+      <p:sp>
+        <p:nvSpPr>
+          <p:cNvPr id="28" name="Shape 25"/>
+          <p:cNvSpPr/>
+          <p:nvPr/>
+        </p:nvSpPr>
+        <p:spPr>
+          <a:xfrm>
+            <a:off x="4681728" y="4754880"/>
+            <a:ext cx="2834640" cy="402336"/>
+          </a:xfrm>
+          <a:prstGeom prst="roundRect">
+            <a:avLst>
+              <a:gd name="adj" fmla="val 50000"/>
+            </a:avLst>
           </a:prstGeom>
           <a:solidFill>
             <a:srgbClr val="1A1A2E"/>
@@ -10238,14 +10316,14 @@
       </p:sp>
       <p:sp>
         <p:nvSpPr>
-          <p:cNvPr id="29" name="Text 27"/>
-          <p:cNvSpPr/>
-          <p:nvPr/>
-        </p:nvSpPr>
-        <p:spPr>
-          <a:xfrm>
-            <a:off x="4956048" y="2468880"/>
-            <a:ext cx="2286000" cy="2286000"/>
+          <p:cNvPr id="29" name="Text 26"/>
+          <p:cNvSpPr/>
+          <p:nvPr/>
+        </p:nvSpPr>
+        <p:spPr>
+          <a:xfrm>
+            <a:off x="4681728" y="4754880"/>
+            <a:ext cx="2834640" cy="402336"/>
           </a:xfrm>
           <a:prstGeom prst="rect">
             <a:avLst/>
@@ -10261,37 +10339,21 @@
               <a:buNone/>
             </a:pPr>
             <a:r>
-              <a:rPr lang="en-US" sz="2600" dirty="0">
-                <a:solidFill>
-                  <a:srgbClr val="000000"/>
-                </a:solidFill>
-                <a:latin typeface="Segoe UI" pitchFamily="34" charset="0"/>
-                <a:ea typeface="Segoe UI" pitchFamily="34" charset="-122"/>
-                <a:cs typeface="Segoe UI" pitchFamily="34" charset="-120"/>
-              </a:rPr>
-              <a:t>🦉
-</a:t>
+              <a:rPr lang="en-US" sz="1000" b="1" dirty="0">
+                <a:solidFill>
+                  <a:srgbClr val="FFFFFF"/>
+                </a:solidFill>
+                <a:latin typeface="Segoe UI" pitchFamily="34" charset="0"/>
+                <a:ea typeface="Segoe UI" pitchFamily="34" charset="-122"/>
+                <a:cs typeface="Segoe UI" pitchFamily="34" charset="-120"/>
+              </a:rPr>
+              <a:t>THE OWL</a:t>
             </a:r>
             <a:pPr algn="ctr" indent="0" marL="0">
               <a:buNone/>
             </a:pPr>
             <a:r>
-              <a:rPr lang="en-US" sz="1200" b="1" dirty="0">
-                <a:solidFill>
-                  <a:srgbClr val="FFFFFF"/>
-                </a:solidFill>
-                <a:latin typeface="Segoe UI" pitchFamily="34" charset="0"/>
-                <a:ea typeface="Segoe UI" pitchFamily="34" charset="-122"/>
-                <a:cs typeface="Segoe UI" pitchFamily="34" charset="-120"/>
-              </a:rPr>
-              <a:t>THE OWL
-</a:t>
-            </a:r>
-            <a:pPr algn="ctr" indent="0" marL="0">
-              <a:buNone/>
-            </a:pPr>
-            <a:r>
-              <a:rPr lang="en-US" sz="800" dirty="0">
+              <a:rPr lang="en-US" sz="900" dirty="0">
                 <a:solidFill>
                   <a:srgbClr val="B8B3D9"/>
                 </a:solidFill>
@@ -10299,15 +10361,15 @@
                 <a:ea typeface="Segoe UI" pitchFamily="34" charset="-122"/>
                 <a:cs typeface="Segoe UI" pitchFamily="34" charset="-120"/>
               </a:rPr>
-              <a:t>one brain · your data</a:t>
-            </a:r>
-            <a:endParaRPr lang="en-US" sz="2600" dirty="0"/>
-          </a:p>
-        </p:txBody>
-      </p:sp>
-      <p:sp>
-        <p:nvSpPr>
-          <p:cNvPr id="30" name="Shape 28"/>
+              <a:t> · one brain · your data</a:t>
+            </a:r>
+            <a:endParaRPr lang="en-US" sz="1000" dirty="0"/>
+          </a:p>
+        </p:txBody>
+      </p:sp>
+      <p:sp>
+        <p:nvSpPr>
+          <p:cNvPr id="30" name="Shape 27"/>
           <p:cNvSpPr/>
           <p:nvPr/>
         </p:nvSpPr>
@@ -10329,7 +10391,7 @@
       </p:sp>
       <p:sp>
         <p:nvSpPr>
-          <p:cNvPr id="31" name="Text 29"/>
+          <p:cNvPr id="31" name="Text 28"/>
           <p:cNvSpPr/>
           <p:nvPr/>
         </p:nvSpPr>

--- a/docs/sales-collateral/Pulse-Sales-Deck.pptx
+++ b/docs/sales-collateral/Pulse-Sales-Deck.pptx
@@ -8352,8 +8352,8 @@
         </p:nvSpPr>
         <p:spPr>
           <a:xfrm>
-            <a:off x="457200" y="1417320"/>
-            <a:ext cx="5486400" cy="914400"/>
+            <a:off x="457200" y="1371600"/>
+            <a:ext cx="5394960" cy="914400"/>
           </a:xfrm>
           <a:prstGeom prst="rect">
             <a:avLst/>
@@ -8411,8 +8411,8 @@
         </p:nvSpPr>
         <p:spPr>
           <a:xfrm>
-            <a:off x="457200" y="2423160"/>
-            <a:ext cx="5486400" cy="914400"/>
+            <a:off x="457200" y="2377440"/>
+            <a:ext cx="5394960" cy="914400"/>
           </a:xfrm>
           <a:prstGeom prst="rect">
             <a:avLst/>
@@ -8470,8 +8470,8 @@
         </p:nvSpPr>
         <p:spPr>
           <a:xfrm>
-            <a:off x="457200" y="3429000"/>
-            <a:ext cx="5486400" cy="914400"/>
+            <a:off x="457200" y="3383280"/>
+            <a:ext cx="5394960" cy="914400"/>
           </a:xfrm>
           <a:prstGeom prst="rect">
             <a:avLst/>
@@ -8529,8 +8529,8 @@
         </p:nvSpPr>
         <p:spPr>
           <a:xfrm>
-            <a:off x="6309360" y="1417320"/>
-            <a:ext cx="5486400" cy="914400"/>
+            <a:off x="457200" y="4389120"/>
+            <a:ext cx="5394960" cy="914400"/>
           </a:xfrm>
           <a:prstGeom prst="rect">
             <a:avLst/>
@@ -8557,7 +8557,7 @@
                 <a:ea typeface="Segoe UI" pitchFamily="34" charset="-122"/>
                 <a:cs typeface="Segoe UI" pitchFamily="34" charset="-120"/>
               </a:rPr>
-              <a:t>Scheduled digests  </a:t>
+              <a:t>Goals with pace &amp; forecast  </a:t>
             </a:r>
             <a:pPr indent="0" marL="0">
               <a:lnSpc>
@@ -8574,22 +8574,85 @@
                 <a:ea typeface="Segoe UI" pitchFamily="34" charset="-122"/>
                 <a:cs typeface="Segoe UI" pitchFamily="34" charset="-120"/>
               </a:rPr>
-              <a:t>— role-specific email briefings (exec / marketing / finance / ops) on your cadence, with charts rendered in the email.</a:t>
+              <a:t>— a North Star target on every screen: ahead / on-track / behind vs last event’s real sell-curve, with a projected landing.</a:t>
             </a:r>
             <a:endParaRPr lang="en-US" sz="1200" dirty="0"/>
           </a:p>
         </p:txBody>
       </p:sp>
-      <p:sp>
-        <p:nvSpPr>
-          <p:cNvPr id="15" name="Text 13"/>
-          <p:cNvSpPr/>
-          <p:nvPr/>
-        </p:nvSpPr>
-        <p:spPr>
-          <a:xfrm>
-            <a:off x="6309360" y="2423160"/>
-            <a:ext cx="5486400" cy="914400"/>
+      <p:pic>
+        <p:nvPicPr>
+          <p:cNvPr id="15" name="Image 0" descr="dash.png">    </p:cNvPr>
+          <p:cNvPicPr>
+            <a:picLocks noChangeAspect="1"/>
+          </p:cNvPicPr>
+          <p:nvPr/>
+        </p:nvPicPr>
+        <p:blipFill>
+          <a:blip r:embed="rId1"/>
+          <a:stretch>
+            <a:fillRect/>
+          </a:stretch>
+        </p:blipFill>
+        <p:spPr>
+          <a:xfrm>
+            <a:off x="6172200" y="1417320"/>
+            <a:ext cx="5577840" cy="1572768"/>
+          </a:xfrm>
+          <a:prstGeom prst="rect">
+            <a:avLst/>
+          </a:prstGeom>
+        </p:spPr>
+      </p:pic>
+      <p:sp>
+        <p:nvSpPr>
+          <p:cNvPr id="16" name="Text 13"/>
+          <p:cNvSpPr/>
+          <p:nvPr/>
+        </p:nvSpPr>
+        <p:spPr>
+          <a:xfrm>
+            <a:off x="6172200" y="3017520"/>
+            <a:ext cx="5577840" cy="320040"/>
+          </a:xfrm>
+          <a:prstGeom prst="rect">
+            <a:avLst/>
+          </a:prstGeom>
+          <a:noFill/>
+          <a:ln/>
+        </p:spPr>
+        <p:txBody>
+          <a:bodyPr wrap="square" rtlCol="0" anchor="ctr"/>
+          <a:lstStyle/>
+          <a:p>
+            <a:pPr indent="0" marL="0">
+              <a:buNone/>
+            </a:pPr>
+            <a:r>
+              <a:rPr lang="en-US" sz="950" i="1" dirty="0">
+                <a:solidFill>
+                  <a:srgbClr val="55556D"/>
+                </a:solidFill>
+                <a:latin typeface="Segoe UI" pitchFamily="34" charset="0"/>
+                <a:ea typeface="Segoe UI" pitchFamily="34" charset="-122"/>
+                <a:cs typeface="Segoe UI" pitchFamily="34" charset="-120"/>
+              </a:rPr>
+              <a:t>The dashboard with the Owl one tap away — every number explained.</a:t>
+            </a:r>
+            <a:endParaRPr lang="en-US" sz="950" dirty="0"/>
+          </a:p>
+        </p:txBody>
+      </p:sp>
+      <p:sp>
+        <p:nvSpPr>
+          <p:cNvPr id="17" name="Text 14"/>
+          <p:cNvSpPr/>
+          <p:nvPr/>
+        </p:nvSpPr>
+        <p:spPr>
+          <a:xfrm>
+            <a:off x="6172200" y="3474720"/>
+            <a:ext cx="5577840" cy="914400"/>
           </a:xfrm>
           <a:prstGeom prst="rect">
             <a:avLst/>
@@ -8616,7 +8679,7 @@
                 <a:ea typeface="Segoe UI" pitchFamily="34" charset="-122"/>
                 <a:cs typeface="Segoe UI" pitchFamily="34" charset="-120"/>
               </a:rPr>
-              <a:t>Share any insight  </a:t>
+              <a:t>Scheduled digests  </a:t>
             </a:r>
             <a:pPr indent="0" marL="0">
               <a:lnSpc>
@@ -8633,7 +8696,7 @@
                 <a:ea typeface="Segoe UI" pitchFamily="34" charset="-122"/>
                 <a:cs typeface="Segoe UI" pitchFamily="34" charset="-120"/>
               </a:rPr>
-              <a:t>— hand a finding to email, WhatsApp or Slack in one tap, with a link back to the view.</a:t>
+              <a:t>— role-specific email briefings (exec / marketing / finance / ops) on your cadence, with charts rendered in the email.</a:t>
             </a:r>
             <a:endParaRPr lang="en-US" sz="1200" dirty="0"/>
           </a:p>
@@ -8641,14 +8704,14 @@
       </p:sp>
       <p:sp>
         <p:nvSpPr>
-          <p:cNvPr id="16" name="Text 14"/>
-          <p:cNvSpPr/>
-          <p:nvPr/>
-        </p:nvSpPr>
-        <p:spPr>
-          <a:xfrm>
-            <a:off x="6309360" y="3429000"/>
-            <a:ext cx="5486400" cy="914400"/>
+          <p:cNvPr id="18" name="Text 15"/>
+          <p:cNvSpPr/>
+          <p:nvPr/>
+        </p:nvSpPr>
+        <p:spPr>
+          <a:xfrm>
+            <a:off x="6172200" y="4389120"/>
+            <a:ext cx="5577840" cy="914400"/>
           </a:xfrm>
           <a:prstGeom prst="rect">
             <a:avLst/>
@@ -8675,7 +8738,7 @@
                 <a:ea typeface="Segoe UI" pitchFamily="34" charset="-122"/>
                 <a:cs typeface="Segoe UI" pitchFamily="34" charset="-120"/>
               </a:rPr>
-              <a:t>Goals with pace &amp; forecast  </a:t>
+              <a:t>Share any insight  </a:t>
             </a:r>
             <a:pPr indent="0" marL="0">
               <a:lnSpc>
@@ -8692,7 +8755,7 @@
                 <a:ea typeface="Segoe UI" pitchFamily="34" charset="-122"/>
                 <a:cs typeface="Segoe UI" pitchFamily="34" charset="-120"/>
               </a:rPr>
-              <a:t>— a North Star target on every screen: ahead / on-track / behind vs last event’s real sell-curve, with a projected landing.</a:t>
+              <a:t>— hand a finding to email, WhatsApp or Slack in one tap, with a link back to the view.</a:t>
             </a:r>
             <a:endParaRPr lang="en-US" sz="1200" dirty="0"/>
           </a:p>
@@ -8700,18 +8763,18 @@
       </p:sp>
       <p:sp>
         <p:nvSpPr>
-          <p:cNvPr id="17" name="Shape 15"/>
-          <p:cNvSpPr/>
-          <p:nvPr/>
-        </p:nvSpPr>
-        <p:spPr>
-          <a:xfrm>
-            <a:off x="457200" y="4892040"/>
-            <a:ext cx="11338560" cy="914400"/>
+          <p:cNvPr id="19" name="Shape 16"/>
+          <p:cNvSpPr/>
+          <p:nvPr/>
+        </p:nvSpPr>
+        <p:spPr>
+          <a:xfrm>
+            <a:off x="457200" y="5394960"/>
+            <a:ext cx="11338560" cy="777240"/>
           </a:xfrm>
           <a:prstGeom prst="roundRect">
             <a:avLst>
-              <a:gd name="adj" fmla="val 10000"/>
+              <a:gd name="adj" fmla="val 11765"/>
             </a:avLst>
           </a:prstGeom>
           <a:solidFill>
@@ -8722,14 +8785,14 @@
       </p:sp>
       <p:sp>
         <p:nvSpPr>
-          <p:cNvPr id="18" name="Text 16"/>
-          <p:cNvSpPr/>
-          <p:nvPr/>
-        </p:nvSpPr>
-        <p:spPr>
-          <a:xfrm>
-            <a:off x="731520" y="4983480"/>
-            <a:ext cx="10789920" cy="731520"/>
+          <p:cNvPr id="20" name="Text 17"/>
+          <p:cNvSpPr/>
+          <p:nvPr/>
+        </p:nvSpPr>
+        <p:spPr>
+          <a:xfrm>
+            <a:off x="731520" y="5394960"/>
+            <a:ext cx="10789920" cy="777240"/>
           </a:xfrm>
           <a:prstGeom prst="rect">
             <a:avLst/>
@@ -8745,7 +8808,7 @@
               <a:buNone/>
             </a:pPr>
             <a:r>
-              <a:rPr lang="en-US" sz="1500" b="1" i="1" dirty="0">
+              <a:rPr lang="en-US" sz="1450" b="1" i="1" dirty="0">
                 <a:solidFill>
                   <a:srgbClr val="7C3AED"/>
                 </a:solidFill>
@@ -8755,7 +8818,7 @@
               </a:rPr>
               <a:t>“Your data, read for you — open the app and you already know what changed and what to do.”</a:t>
             </a:r>
-            <a:endParaRPr lang="en-US" sz="1500" dirty="0"/>
+            <a:endParaRPr lang="en-US" sz="1450" dirty="0"/>
           </a:p>
         </p:txBody>
       </p:sp>

--- a/docs/sales-collateral/Pulse-Sales-Deck.pptx
+++ b/docs/sales-collateral/Pulse-Sales-Deck.pptx
@@ -2194,7 +2194,7 @@
                 <a:ea typeface="Segoe UI" pitchFamily="34" charset="-122"/>
                 <a:cs typeface="Segoe UI" pitchFamily="34" charset="-120"/>
               </a:rPr>
-              <a:t>The Experience OS for event organisers — live dashboards, an AI analyst, and a full email/SMS campaign engine, all powered by the same governed data. Insight → action → results, in your brand, on your phone.</a:t>
+              <a:t>The Experience OS for event organisers: live dashboards, an AI analyst, and a full email/SMS campaign engine, all powered by the same governed data. Insight → action → results, in your brand, on your phone.</a:t>
             </a:r>
             <a:endParaRPr lang="en-US" sz="1500" dirty="0"/>
           </a:p>
@@ -2384,7 +2384,7 @@
                 <a:ea typeface="Segoe UI" pitchFamily="34" charset="-122"/>
                 <a:cs typeface="Segoe UI" pitchFamily="34" charset="-120"/>
               </a:rPr>
-              <a:t>🔒  OWN — white-label, security &amp; openness</a:t>
+              <a:t>🔒  OWN · white-label, security &amp; openness</a:t>
             </a:r>
             <a:endParaRPr lang="en-US" sz="2600" dirty="0"/>
           </a:p>
@@ -2658,7 +2658,7 @@
                 <a:ea typeface="Segoe UI" pitchFamily="34" charset="-122"/>
                 <a:cs typeface="Segoe UI" pitchFamily="34" charset="-120"/>
               </a:rPr>
-              <a:t>Fully white-label  </a:t>
+              <a:t>Fully white-label: </a:t>
             </a:r>
             <a:pPr indent="0" marL="0">
               <a:lnSpc>
@@ -2675,7 +2675,7 @@
                 <a:ea typeface="Segoe UI" pitchFamily="34" charset="-122"/>
                 <a:cs typeface="Segoe UI" pitchFamily="34" charset="-120"/>
               </a:rPr>
-              <a:t>— your logo, colours and sender name everywhere; emails from your own domain once verified; even a vanity login page that feels like your product.</a:t>
+              <a:t>your logo, colours and sender name everywhere; emails from your own domain once verified; even a vanity login page that feels like your product.</a:t>
             </a:r>
             <a:endParaRPr lang="en-US" sz="1200" dirty="0"/>
           </a:p>
@@ -2717,7 +2717,7 @@
                 <a:ea typeface="Segoe UI" pitchFamily="34" charset="-122"/>
                 <a:cs typeface="Segoe UI" pitchFamily="34" charset="-120"/>
               </a:rPr>
-              <a:t>Your language &amp; currency  </a:t>
+              <a:t>Your language &amp; currency: </a:t>
             </a:r>
             <a:pPr indent="0" marL="0">
               <a:lnSpc>
@@ -2734,7 +2734,7 @@
                 <a:ea typeface="Segoe UI" pitchFamily="34" charset="-122"/>
                 <a:cs typeface="Segoe UI" pitchFamily="34" charset="-120"/>
               </a:rPr>
-              <a:t>— AI insights, briefings, digests and campaign copy in your reporting currency and your choice of language.</a:t>
+              <a:t>AI insights, briefings, digests and campaign copy in your reporting currency and your choice of language.</a:t>
             </a:r>
             <a:endParaRPr lang="en-US" sz="1200" dirty="0"/>
           </a:p>
@@ -2776,7 +2776,7 @@
                 <a:ea typeface="Segoe UI" pitchFamily="34" charset="-122"/>
                 <a:cs typeface="Segoe UI" pitchFamily="34" charset="-120"/>
               </a:rPr>
-              <a:t>Open by design (API + AI agents)  </a:t>
+              <a:t>Open by design (API + AI agents): </a:t>
             </a:r>
             <a:pPr indent="0" marL="0">
               <a:lnSpc>
@@ -2793,7 +2793,7 @@
                 <a:ea typeface="Segoe UI" pitchFamily="34" charset="-122"/>
                 <a:cs typeface="Segoe UI" pitchFamily="34" charset="-120"/>
               </a:rPr>
-              <a:t>— read-only, per-client API keys; point Claude or ChatGPT at your data via MCP. Your data is never locked in.</a:t>
+              <a:t>read-only, per-client API keys; point Claude or ChatGPT at your data via MCP. Your data is never locked in.</a:t>
             </a:r>
             <a:endParaRPr lang="en-US" sz="1200" dirty="0"/>
           </a:p>
@@ -2835,7 +2835,7 @@
                 <a:ea typeface="Segoe UI" pitchFamily="34" charset="-122"/>
                 <a:cs typeface="Segoe UI" pitchFamily="34" charset="-120"/>
               </a:rPr>
-              <a:t>Watertight data scoping  </a:t>
+              <a:t>Watertight data scoping: </a:t>
             </a:r>
             <a:pPr indent="0" marL="0">
               <a:lnSpc>
@@ -2852,7 +2852,7 @@
                 <a:ea typeface="Segoe UI" pitchFamily="34" charset="-122"/>
                 <a:cs typeface="Segoe UI" pitchFamily="34" charset="-120"/>
               </a:rPr>
-              <a:t>— every query is force-filtered to your events server-side; it cannot be bypassed and fails closed. One client can never see another’s data.</a:t>
+              <a:t>every query is force-filtered to your events server-side; it cannot be bypassed and fails closed. One client can never see another’s data.</a:t>
             </a:r>
             <a:endParaRPr lang="en-US" sz="1200" dirty="0"/>
           </a:p>
@@ -2894,7 +2894,7 @@
                 <a:ea typeface="Segoe UI" pitchFamily="34" charset="-122"/>
                 <a:cs typeface="Segoe UI" pitchFamily="34" charset="-120"/>
               </a:rPr>
-              <a:t>POPIA-minded by design  </a:t>
+              <a:t>POPIA-minded by design: </a:t>
             </a:r>
             <a:pPr indent="0" marL="0">
               <a:lnSpc>
@@ -2911,7 +2911,7 @@
                 <a:ea typeface="Segoe UI" pitchFamily="34" charset="-122"/>
                 <a:cs typeface="Segoe UI" pitchFamily="34" charset="-120"/>
               </a:rPr>
-              <a:t>— per-channel consent, one-click unsubscribe, hashed identities for ad sync, no cross-client data pooling.</a:t>
+              <a:t>per-channel consent, one-click unsubscribe, hashed identities for ad sync, no cross-client data pooling.</a:t>
             </a:r>
             <a:endParaRPr lang="en-US" sz="1200" dirty="0"/>
           </a:p>
@@ -2953,7 +2953,7 @@
                 <a:ea typeface="Segoe UI" pitchFamily="34" charset="-122"/>
                 <a:cs typeface="Segoe UI" pitchFamily="34" charset="-120"/>
               </a:rPr>
-              <a:t>Self-service, with backup  </a:t>
+              <a:t>Self-service, with backup: </a:t>
             </a:r>
             <a:pPr indent="0" marL="0">
               <a:lnSpc>
@@ -2970,7 +2970,7 @@
                 <a:ea typeface="Segoe UI" pitchFamily="34" charset="-122"/>
                 <a:cs typeface="Segoe UI" pitchFamily="34" charset="-120"/>
               </a:rPr>
-              <a:t>— manage everything yourself in Settings, or your Howler team does it for you. Your named contacts are one tap away.</a:t>
+              <a:t>manage everything yourself in Settings, or your Howler team does it for you. Your named contacts are one tap away.</a:t>
             </a:r>
             <a:endParaRPr lang="en-US" sz="1200" dirty="0"/>
           </a:p>
@@ -3031,7 +3031,7 @@
                 <a:ea typeface="Segoe UI" pitchFamily="34" charset="-122"/>
                 <a:cs typeface="Segoe UI" pitchFamily="34" charset="-120"/>
               </a:rPr>
-              <a:t>“It’s their brand, their accounts, their data — Howler just powers it.”</a:t>
+              <a:t>“It’s their brand, their accounts, their data, Howler just powers it.”</a:t>
             </a:r>
             <a:endParaRPr lang="en-US" sz="1500" dirty="0"/>
           </a:p>
@@ -3122,7 +3122,7 @@
                 <a:ea typeface="Segoe UI" pitchFamily="34" charset="-122"/>
                 <a:cs typeface="Segoe UI" pitchFamily="34" charset="-120"/>
               </a:rPr>
-              <a:t>Why Pulse — and not another tool</a:t>
+              <a:t>Why Pulse, and not another tool</a:t>
             </a:r>
             <a:endParaRPr lang="en-US" sz="2600" dirty="0"/>
           </a:p>
@@ -3747,7 +3747,7 @@
                           <a:ea typeface="Segoe UI" pitchFamily="34" charset="-122"/>
                           <a:cs typeface="Segoe UI" pitchFamily="34" charset="-120"/>
                         </a:rPr>
-                        <a:t>See it and act on it in the same governed place — campaign, approval, result.</a:t>
+                        <a:t>See it and act on it in the same governed place, campaign, approval, result.</a:t>
                       </a:r>
                       <a:endParaRPr lang="en-US" sz="1300" dirty="0">
                         <a:latin typeface="Segoe UI" charset="0"/>
@@ -4481,7 +4481,7 @@
                 <a:ea typeface="Segoe UI" pitchFamily="34" charset="-122"/>
                 <a:cs typeface="Segoe UI" pitchFamily="34" charset="-120"/>
               </a:rPr>
-              <a:t>Pulse isn’t another tool on the pile — it replaces the pile with a loop.</a:t>
+              <a:t>Pulse isn’t another tool on the pile, it replaces the pile with a loop.</a:t>
             </a:r>
             <a:endParaRPr lang="en-US" sz="1600" dirty="0"/>
           </a:p>
@@ -4613,7 +4613,7 @@
                 <a:ea typeface="Segoe UI" pitchFamily="34" charset="-122"/>
                 <a:cs typeface="Segoe UI" pitchFamily="34" charset="-120"/>
               </a:rPr>
-              <a:t>one experience, one dataset, one partner — Pulse is the brain of the whole thing</a:t>
+              <a:t>one experience, one dataset, one partner, Pulse is the brain of the whole thing</a:t>
             </a:r>
             <a:endParaRPr lang="en-US" sz="1200" dirty="0"/>
           </a:p>
@@ -4912,7 +4912,7 @@
                 <a:ea typeface="Segoe UI" pitchFamily="34" charset="-122"/>
                 <a:cs typeface="Segoe UI" pitchFamily="34" charset="-120"/>
               </a:rPr>
-              <a:t>Ticket sales, tiers &amp; releases, access control and scanning — every buyer and every entry, captured from minute one.</a:t>
+              <a:t>Ticket sales, tiers &amp; releases, access control and scanning, every buyer and every entry, captured from minute one.</a:t>
             </a:r>
             <a:endParaRPr lang="en-US" sz="950" dirty="0"/>
           </a:p>
@@ -5059,7 +5059,7 @@
                 <a:ea typeface="Segoe UI" pitchFamily="34" charset="-122"/>
                 <a:cs typeface="Segoe UI" pitchFamily="34" charset="-120"/>
               </a:rPr>
-              <a:t>Tap-to-pay across bars and vendors: faster queues, higher spend, zero cash risk — every transaction is live data.</a:t>
+              <a:t>Tap-to-pay across bars and vendors: faster queues, higher spend, zero cash risk, every transaction is live data.</a:t>
             </a:r>
             <a:endParaRPr lang="en-US" sz="950" dirty="0"/>
           </a:p>
@@ -5206,7 +5206,7 @@
                 <a:ea typeface="Segoe UI" pitchFamily="34" charset="-122"/>
                 <a:cs typeface="Segoe UI" pitchFamily="34" charset="-120"/>
               </a:rPr>
-              <a:t>The fan’s companion: tickets, top-ups, line-ups and offers in one place — an ownable channel to every attendee.</a:t>
+              <a:t>The fan’s companion: tickets, top-ups, line-ups and offers in one place, an ownable channel to every attendee.</a:t>
             </a:r>
             <a:endParaRPr lang="en-US" sz="950" dirty="0"/>
           </a:p>
@@ -5353,7 +5353,7 @@
                 <a:ea typeface="Segoe UI" pitchFamily="34" charset="-122"/>
                 <a:cs typeface="Segoe UI" pitchFamily="34" charset="-120"/>
               </a:rPr>
-              <a:t>Table inventory, bookings and minimum spends, hosted service — your highest-value guests, managed and measured.</a:t>
+              <a:t>Table inventory, bookings and minimum spends, hosted service, your highest-value guests, managed and measured.</a:t>
             </a:r>
             <a:endParaRPr lang="en-US" sz="950" dirty="0"/>
           </a:p>
@@ -5480,7 +5480,7 @@
                 <a:ea typeface="Segoe UI" pitchFamily="34" charset="-122"/>
                 <a:cs typeface="Segoe UI" pitchFamily="34" charset="-120"/>
               </a:rPr>
-              <a:t>Pulse — the brain of the stack.  </a:t>
+              <a:t>Pulse: the brain of the stack.  </a:t>
             </a:r>
             <a:pPr indent="0" marL="0">
               <a:lnSpc>
@@ -5497,7 +5497,7 @@
                 <a:ea typeface="Segoe UI" pitchFamily="34" charset="-122"/>
                 <a:cs typeface="Segoe UI" pitchFamily="34" charset="-120"/>
               </a:rPr>
-              <a:t>Every ticket scanned, every tap at a bar, every SuperApp session and every VIP booking flows into one governed dataset — where the Owl reads it, your team acts on it, and the results come back measured.</a:t>
+              <a:t>Every ticket scanned, every tap at a bar, every SuperApp session and every VIP booking flows into one governed dataset, where the Owl reads it, your team acts on it, and the results come back measured.</a:t>
             </a:r>
             <a:endParaRPr lang="en-US" sz="1500" dirty="0"/>
           </a:p>
@@ -5620,7 +5620,7 @@
                 <a:ea typeface="Segoe UI" pitchFamily="34" charset="-122"/>
                 <a:cs typeface="Segoe UI" pitchFamily="34" charset="-120"/>
               </a:rPr>
-              <a:t>Cashless spots the Main Bar spiking; the heat map shows the hotspot; the Owl suggests moving two devices — while the night is young.</a:t>
+              <a:t>Cashless spots the Main Bar spiking; the heat map shows the hotspot; the Owl suggests moving two devices, while the night is young.</a:t>
             </a:r>
             <a:endParaRPr lang="en-US" sz="1100" dirty="0"/>
           </a:p>
@@ -5704,7 +5704,7 @@
                 <a:ea typeface="Segoe UI" pitchFamily="34" charset="-122"/>
                 <a:cs typeface="Segoe UI" pitchFamily="34" charset="-120"/>
               </a:rPr>
-              <a:t>Ticket + top-ups + bar spend stitched into one picture — your next campaign targets big spenders who haven’t rebought yet.</a:t>
+              <a:t>Ticket + top-ups + bar spend stitched into one picture, your next campaign targets big spenders who haven’t rebought yet.</a:t>
             </a:r>
             <a:endParaRPr lang="en-US" sz="1100" dirty="0"/>
           </a:p>
@@ -5788,7 +5788,7 @@
                 <a:ea typeface="Segoe UI" pitchFamily="34" charset="-122"/>
                 <a:cs typeface="Segoe UI" pitchFamily="34" charset="-120"/>
               </a:rPr>
-              <a:t>Pulse knows who your table guests are, what they spent and when they went quiet — next season’s invitation writes itself.</a:t>
+              <a:t>Pulse knows who your table guests are, what they spent and when they went quiet, next season’s invitation writes itself.</a:t>
             </a:r>
             <a:endParaRPr lang="en-US" sz="1100" dirty="0"/>
           </a:p>
@@ -5985,7 +5985,7 @@
                 <a:ea typeface="Segoe UI" pitchFamily="34" charset="-122"/>
                 <a:cs typeface="Segoe UI" pitchFamily="34" charset="-120"/>
               </a:rPr>
-              <a:t>See what’s happening, act on it, and prove the results — on your phone, in your brand, without exporting to five tools.</a:t>
+              <a:t>See what’s happening, act on it, and prove the results, on your phone, in your brand, without exporting to five tools.</a:t>
             </a:r>
             <a:endParaRPr lang="en-US" sz="2000" dirty="0"/>
           </a:p>
@@ -6879,7 +6879,7 @@
                 <a:ea typeface="Segoe UI" pitchFamily="34" charset="-122"/>
                 <a:cs typeface="Segoe UI" pitchFamily="34" charset="-120"/>
               </a:rPr>
-              <a:t>You find out about the problem when the queue does — or the morning after.</a:t>
+              <a:t>You find out about the problem when the queue does, or the morning after.</a:t>
             </a:r>
             <a:endParaRPr lang="en-US" sz="1250" dirty="0"/>
           </a:p>
@@ -6918,7 +6918,7 @@
                 <a:ea typeface="Segoe UI" pitchFamily="34" charset="-122"/>
                 <a:cs typeface="Segoe UI" pitchFamily="34" charset="-120"/>
               </a:rPr>
-              <a:t>Every tool sees a slice. Nobody sees the loop — and the data never learns.</a:t>
+              <a:t>Every tool sees a slice. Nobody sees the loop, and the data never learns.</a:t>
             </a:r>
             <a:endParaRPr lang="en-US" sz="1500" dirty="0"/>
           </a:p>
@@ -7535,7 +7535,7 @@
                 <a:ea typeface="Segoe UI" pitchFamily="34" charset="-122"/>
                 <a:cs typeface="Segoe UI" pitchFamily="34" charset="-120"/>
               </a:rPr>
-              <a:t>AI briefings and digests tell you what changed — and what to do about it.</a:t>
+              <a:t>AI briefings and digests tell you what changed, and what to do about it.</a:t>
             </a:r>
             <a:endParaRPr lang="en-US" sz="1050" dirty="0"/>
           </a:p>
@@ -8015,7 +8015,7 @@
                 <a:ea typeface="Segoe UI" pitchFamily="34" charset="-122"/>
                 <a:cs typeface="Segoe UI" pitchFamily="34" charset="-120"/>
               </a:rPr>
-              <a:t>“It’s not dashboards and email and reports — it’s one living loop. The longer you use Pulse, the better it gets.”</a:t>
+              <a:t>“It’s not dashboards and email and reports, it’s one living loop. The longer you use Pulse, the better it gets.”</a:t>
             </a:r>
             <a:endParaRPr lang="en-US" sz="1600" dirty="0"/>
           </a:p>
@@ -8106,7 +8106,7 @@
                 <a:ea typeface="Segoe UI" pitchFamily="34" charset="-122"/>
                 <a:cs typeface="Segoe UI" pitchFamily="34" charset="-120"/>
               </a:rPr>
-              <a:t>👁  SEE — dashboards &amp; AI insight</a:t>
+              <a:t>👁  SEE · dashboards &amp; AI insight</a:t>
             </a:r>
             <a:endParaRPr lang="en-US" sz="2600" dirty="0"/>
           </a:p>
@@ -8380,7 +8380,7 @@
                 <a:ea typeface="Segoe UI" pitchFamily="34" charset="-122"/>
                 <a:cs typeface="Segoe UI" pitchFamily="34" charset="-120"/>
               </a:rPr>
-              <a:t>Live dashboards  </a:t>
+              <a:t>Live dashboards: </a:t>
             </a:r>
             <a:pPr indent="0" marL="0">
               <a:lnSpc>
@@ -8397,7 +8397,7 @@
                 <a:ea typeface="Segoe UI" pitchFamily="34" charset="-122"/>
                 <a:cs typeface="Segoe UI" pitchFamily="34" charset="-120"/>
               </a:rPr>
-              <a:t>— KPIs, tables and charts on your real ticketing &amp; GA4 data, with drill-through. Mobile-first, installable as an app.</a:t>
+              <a:t>KPIs, tables and charts on your real ticketing &amp; GA4 data, with drill-through. Mobile-first, installable as an app.</a:t>
             </a:r>
             <a:endParaRPr lang="en-US" sz="1200" dirty="0"/>
           </a:p>
@@ -8439,7 +8439,7 @@
                 <a:ea typeface="Segoe UI" pitchFamily="34" charset="-122"/>
                 <a:cs typeface="Segoe UI" pitchFamily="34" charset="-120"/>
               </a:rPr>
-              <a:t>Per-tile AI insight  </a:t>
+              <a:t>Per-tile AI insight: </a:t>
             </a:r>
             <a:pPr indent="0" marL="0">
               <a:lnSpc>
@@ -8456,7 +8456,7 @@
                 <a:ea typeface="Segoe UI" pitchFamily="34" charset="-122"/>
                 <a:cs typeface="Segoe UI" pitchFamily="34" charset="-120"/>
               </a:rPr>
-              <a:t>— tap any tile and the Owl explains the numbers in plain English, grounded in that data.</a:t>
+              <a:t>tap any tile and the Owl explains the numbers in plain English, grounded in that data.</a:t>
             </a:r>
             <a:endParaRPr lang="en-US" sz="1200" dirty="0"/>
           </a:p>
@@ -8498,7 +8498,7 @@
                 <a:ea typeface="Segoe UI" pitchFamily="34" charset="-122"/>
                 <a:cs typeface="Segoe UI" pitchFamily="34" charset="-120"/>
               </a:rPr>
-              <a:t>Personalised AI briefing  </a:t>
+              <a:t>Personalised AI briefing: </a:t>
             </a:r>
             <a:pPr indent="0" marL="0">
               <a:lnSpc>
@@ -8515,7 +8515,7 @@
                 <a:ea typeface="Segoe UI" pitchFamily="34" charset="-122"/>
                 <a:cs typeface="Segoe UI" pitchFamily="34" charset="-120"/>
               </a:rPr>
-              <a:t>— land on a summary of what matters right now, tailored to what you follow and view.</a:t>
+              <a:t>land on a summary of what matters right now, tailored to what you follow and view.</a:t>
             </a:r>
             <a:endParaRPr lang="en-US" sz="1200" dirty="0"/>
           </a:p>
@@ -8557,7 +8557,7 @@
                 <a:ea typeface="Segoe UI" pitchFamily="34" charset="-122"/>
                 <a:cs typeface="Segoe UI" pitchFamily="34" charset="-120"/>
               </a:rPr>
-              <a:t>Goals with pace &amp; forecast  </a:t>
+              <a:t>Goals with pace &amp; forecast: </a:t>
             </a:r>
             <a:pPr indent="0" marL="0">
               <a:lnSpc>
@@ -8574,7 +8574,7 @@
                 <a:ea typeface="Segoe UI" pitchFamily="34" charset="-122"/>
                 <a:cs typeface="Segoe UI" pitchFamily="34" charset="-120"/>
               </a:rPr>
-              <a:t>— a North Star target on every screen: ahead / on-track / behind vs last event’s real sell-curve, with a projected landing.</a:t>
+              <a:t>a North Star target on every screen: ahead / on-track / behind vs last event’s real sell-curve, with a projected landing.</a:t>
             </a:r>
             <a:endParaRPr lang="en-US" sz="1200" dirty="0"/>
           </a:p>
@@ -8637,7 +8637,7 @@
                 <a:ea typeface="Segoe UI" pitchFamily="34" charset="-122"/>
                 <a:cs typeface="Segoe UI" pitchFamily="34" charset="-120"/>
               </a:rPr>
-              <a:t>The dashboard with the Owl one tap away — every number explained.</a:t>
+              <a:t>The dashboard with the Owl one tap away, every number explained.</a:t>
             </a:r>
             <a:endParaRPr lang="en-US" sz="950" dirty="0"/>
           </a:p>
@@ -8679,7 +8679,7 @@
                 <a:ea typeface="Segoe UI" pitchFamily="34" charset="-122"/>
                 <a:cs typeface="Segoe UI" pitchFamily="34" charset="-120"/>
               </a:rPr>
-              <a:t>Scheduled digests  </a:t>
+              <a:t>Scheduled digests: </a:t>
             </a:r>
             <a:pPr indent="0" marL="0">
               <a:lnSpc>
@@ -8696,7 +8696,7 @@
                 <a:ea typeface="Segoe UI" pitchFamily="34" charset="-122"/>
                 <a:cs typeface="Segoe UI" pitchFamily="34" charset="-120"/>
               </a:rPr>
-              <a:t>— role-specific email briefings (exec / marketing / finance / ops) on your cadence, with charts rendered in the email.</a:t>
+              <a:t>role-specific email briefings (exec / marketing / finance / ops) on your cadence, with charts rendered in the email.</a:t>
             </a:r>
             <a:endParaRPr lang="en-US" sz="1200" dirty="0"/>
           </a:p>
@@ -8738,7 +8738,7 @@
                 <a:ea typeface="Segoe UI" pitchFamily="34" charset="-122"/>
                 <a:cs typeface="Segoe UI" pitchFamily="34" charset="-120"/>
               </a:rPr>
-              <a:t>Share any insight  </a:t>
+              <a:t>Share any insight: </a:t>
             </a:r>
             <a:pPr indent="0" marL="0">
               <a:lnSpc>
@@ -8755,7 +8755,7 @@
                 <a:ea typeface="Segoe UI" pitchFamily="34" charset="-122"/>
                 <a:cs typeface="Segoe UI" pitchFamily="34" charset="-120"/>
               </a:rPr>
-              <a:t>— hand a finding to email, WhatsApp or Slack in one tap, with a link back to the view.</a:t>
+              <a:t>hand a finding to email, WhatsApp or Slack in one tap, with a link back to the view.</a:t>
             </a:r>
             <a:endParaRPr lang="en-US" sz="1200" dirty="0"/>
           </a:p>
@@ -8816,7 +8816,7 @@
                 <a:ea typeface="Segoe UI" pitchFamily="34" charset="-122"/>
                 <a:cs typeface="Segoe UI" pitchFamily="34" charset="-120"/>
               </a:rPr>
-              <a:t>“Your data, read for you — open the app and you already know what changed and what to do.”</a:t>
+              <a:t>“Your data, read for you, open the app and you already know what changed and what to do.”</a:t>
             </a:r>
             <a:endParaRPr lang="en-US" sz="1450" dirty="0"/>
           </a:p>
@@ -8907,7 +8907,7 @@
                 <a:ea typeface="Segoe UI" pitchFamily="34" charset="-122"/>
                 <a:cs typeface="Segoe UI" pitchFamily="34" charset="-120"/>
               </a:rPr>
-              <a:t>🦉  ASK — your AI Data Analyst, everywhere</a:t>
+              <a:t>🦉  ASK · your AI Data Analyst, everywhere</a:t>
             </a:r>
             <a:endParaRPr lang="en-US" sz="2600" dirty="0"/>
           </a:p>
@@ -9181,7 +9181,7 @@
                 <a:ea typeface="Segoe UI" pitchFamily="34" charset="-122"/>
                 <a:cs typeface="Segoe UI" pitchFamily="34" charset="-120"/>
               </a:rPr>
-              <a:t>Ask the Owl in-app  </a:t>
+              <a:t>Ask the Owl in-app: </a:t>
             </a:r>
             <a:pPr indent="0" marL="0">
               <a:lnSpc>
@@ -9198,7 +9198,7 @@
                 <a:ea typeface="Segoe UI" pitchFamily="34" charset="-122"/>
                 <a:cs typeface="Segoe UI" pitchFamily="34" charset="-120"/>
               </a:rPr>
-              <a:t>— “what’s on sale right now?”, “how does this compare to last year?” — conversational answers, scoped to your data.</a:t>
+              <a:t>“what’s on sale right now?”, “how does this compare to last year?”, conversational answers, scoped to your data.</a:t>
             </a:r>
             <a:endParaRPr lang="en-US" sz="1200" dirty="0"/>
           </a:p>
@@ -9240,7 +9240,7 @@
                 <a:ea typeface="Segoe UI" pitchFamily="34" charset="-122"/>
                 <a:cs typeface="Segoe UI" pitchFamily="34" charset="-120"/>
               </a:rPr>
-              <a:t>The Owl on WhatsApp  </a:t>
+              <a:t>The Owl on WhatsApp: </a:t>
             </a:r>
             <a:pPr indent="0" marL="0">
               <a:lnSpc>
@@ -9257,7 +9257,7 @@
                 <a:ea typeface="Segoe UI" pitchFamily="34" charset="-122"/>
                 <a:cs typeface="Segoe UI" pitchFamily="34" charset="-120"/>
               </a:rPr>
-              <a:t>— message it from your own WhatsApp: answers, charts as images, tappable follow-ups, daily updates — even draft a campaign by reply button.</a:t>
+              <a:t>message it from your own WhatsApp: answers, charts as images, tappable follow-ups, daily updates, even draft a campaign by reply button.</a:t>
             </a:r>
             <a:endParaRPr lang="en-US" sz="1200" dirty="0"/>
           </a:p>
@@ -9299,7 +9299,7 @@
                 <a:ea typeface="Segoe UI" pitchFamily="34" charset="-122"/>
                 <a:cs typeface="Segoe UI" pitchFamily="34" charset="-120"/>
               </a:rPr>
-              <a:t>Reads your Google Drive  </a:t>
+              <a:t>Reads your Google Drive: </a:t>
             </a:r>
             <a:pPr indent="0" marL="0">
               <a:lnSpc>
@@ -9316,7 +9316,7 @@
                 <a:ea typeface="Segoe UI" pitchFamily="34" charset="-122"/>
                 <a:cs typeface="Segoe UI" pitchFamily="34" charset="-120"/>
               </a:rPr>
-              <a:t>— share budgets, marketing plans or sponsor decks; the Owl answers from them alongside live sales data.</a:t>
+              <a:t>share budgets, marketing plans or sponsor decks; the Owl answers from them alongside live sales data.</a:t>
             </a:r>
             <a:endParaRPr lang="en-US" sz="1200" dirty="0"/>
           </a:p>
@@ -9358,7 +9358,7 @@
                 <a:ea typeface="Segoe UI" pitchFamily="34" charset="-122"/>
                 <a:cs typeface="Segoe UI" pitchFamily="34" charset="-120"/>
               </a:rPr>
-              <a:t>Take action by chat  </a:t>
+              <a:t>Take action by chat: </a:t>
             </a:r>
             <a:pPr indent="0" marL="0">
               <a:lnSpc>
@@ -9375,7 +9375,7 @@
                 <a:ea typeface="Segoe UI" pitchFamily="34" charset="-122"/>
                 <a:cs typeface="Segoe UI" pitchFamily="34" charset="-120"/>
               </a:rPr>
-              <a:t>— the Owl doesn’t just answer: it can set up an alert, save a segment or draft a campaign straight from the conversation, with a confirm step before anything is created.</a:t>
+              <a:t>the Owl doesn’t just answer: it can set up an alert, save a segment or draft a campaign straight from the conversation, with a confirm step before anything is created.</a:t>
             </a:r>
             <a:endParaRPr lang="en-US" sz="1200" dirty="0"/>
           </a:p>
@@ -9439,7 +9439,7 @@
                 <a:ea typeface="Segoe UI" pitchFamily="34" charset="-122"/>
                 <a:cs typeface="Segoe UI" pitchFamily="34" charset="-120"/>
               </a:rPr>
-              <a:t>Grounded, always: the Owl quotes your data — it never invents. And it answers only your own events; the scope gate is enforced server-side and cannot be bypassed.</a:t>
+              <a:t>Grounded, always: the Owl quotes your data, it never invents. And it answers only your own events; the scope gate is enforced server-side and cannot be bypassed.</a:t>
             </a:r>
             <a:endParaRPr lang="en-US" sz="1400" dirty="0"/>
           </a:p>
@@ -9478,7 +9478,7 @@
                 <a:ea typeface="Segoe UI" pitchFamily="34" charset="-122"/>
                 <a:cs typeface="Segoe UI" pitchFamily="34" charset="-120"/>
               </a:rPr>
-              <a:t>“Ask your data anything, in plain language — your own analyst, in your pocket.”</a:t>
+              <a:t>“Ask your data anything, in plain language, your own analyst, in your pocket.”</a:t>
             </a:r>
             <a:endParaRPr lang="en-US" sz="1500" dirty="0"/>
           </a:p>
@@ -9610,7 +9610,7 @@
                 <a:ea typeface="Segoe UI" pitchFamily="34" charset="-122"/>
                 <a:cs typeface="Segoe UI" pitchFamily="34" charset="-120"/>
               </a:rPr>
-              <a:t>the Owl at the centre — the doors your team already uses around it</a:t>
+              <a:t>the Owl at the centre, the doors your team already uses around it</a:t>
             </a:r>
             <a:endParaRPr lang="en-US" sz="1200" dirty="0"/>
           </a:p>
@@ -10001,7 +10001,7 @@
                 <a:ea typeface="Segoe UI" pitchFamily="34" charset="-122"/>
                 <a:cs typeface="Segoe UI" pitchFamily="34" charset="-120"/>
               </a:rPr>
-              <a:t>Installs like a native app; pushes a nudge even when closed — tap it and you’re in the right place to act.</a:t>
+              <a:t>Installs like a native app; pushes a nudge even when closed, tap it and you’re in the right place to act.</a:t>
             </a:r>
             <a:endParaRPr lang="en-US" sz="1050" dirty="0"/>
           </a:p>
@@ -10325,7 +10325,7 @@
                 <a:ea typeface="Segoe UI" pitchFamily="34" charset="-122"/>
                 <a:cs typeface="Segoe UI" pitchFamily="34" charset="-120"/>
               </a:rPr>
-              <a:t>The same connector plugs your event data into Claude — read-only, per-client keys you control.</a:t>
+              <a:t>The same connector plugs your event data into Claude, read-only, per-client keys you control.</a:t>
             </a:r>
             <a:endParaRPr lang="en-US" sz="1050" dirty="0"/>
           </a:p>
@@ -10485,7 +10485,7 @@
                 <a:ea typeface="Segoe UI" pitchFamily="34" charset="-122"/>
                 <a:cs typeface="Segoe UI" pitchFamily="34" charset="-120"/>
               </a:rPr>
-              <a:t>Ask in the app, on WhatsApp, in ChatGPT or Claude — same Owl, same live data, same security boundary.</a:t>
+              <a:t>Ask in the app, on WhatsApp, in ChatGPT or Claude, same Owl, same live data, same security boundary.</a:t>
             </a:r>
             <a:endParaRPr lang="en-US" sz="1250" dirty="0"/>
           </a:p>
@@ -10576,7 +10576,7 @@
                 <a:ea typeface="Segoe UI" pitchFamily="34" charset="-122"/>
                 <a:cs typeface="Segoe UI" pitchFamily="34" charset="-120"/>
               </a:rPr>
-              <a:t>⚡  ACT — Engage, the campaign engine</a:t>
+              <a:t>⚡  ACT · Engage, the campaign engine</a:t>
             </a:r>
             <a:endParaRPr lang="en-US" sz="2600" dirty="0"/>
           </a:p>
@@ -10850,7 +10850,7 @@
                 <a:ea typeface="Segoe UI" pitchFamily="34" charset="-122"/>
                 <a:cs typeface="Segoe UI" pitchFamily="34" charset="-120"/>
               </a:rPr>
-              <a:t>Live segments  </a:t>
+              <a:t>Live segments: </a:t>
             </a:r>
             <a:pPr indent="0" marL="0">
               <a:lnSpc>
@@ -10867,7 +10867,7 @@
                 <a:ea typeface="Segoe UI" pitchFamily="34" charset="-122"/>
                 <a:cs typeface="Segoe UI" pitchFamily="34" charset="-120"/>
               </a:rPr>
-              <a:t>— audiences from a dashboard tile, CSV or linked Google Sheet; union / intersect / exclude (abandoned carts minus already-called). Always current at send time.</a:t>
+              <a:t>audiences from a dashboard tile, CSV or linked Google Sheet; union / intersect / exclude (abandoned carts minus already-called). Always current at send time.</a:t>
             </a:r>
             <a:endParaRPr lang="en-US" sz="1200" dirty="0"/>
           </a:p>
@@ -10909,7 +10909,7 @@
                 <a:ea typeface="Segoe UI" pitchFamily="34" charset="-122"/>
                 <a:cs typeface="Segoe UI" pitchFamily="34" charset="-120"/>
               </a:rPr>
-              <a:t>Email &amp; SMS campaigns  </a:t>
+              <a:t>Email &amp; SMS campaigns: </a:t>
             </a:r>
             <a:pPr indent="0" marL="0">
               <a:lnSpc>
@@ -10926,7 +10926,7 @@
                 <a:ea typeface="Segoe UI" pitchFamily="34" charset="-122"/>
                 <a:cs typeface="Segoe UI" pitchFamily="34" charset="-120"/>
               </a:rPr>
-              <a:t>— AI-drafted copy, drag-and-drop block builder, AI-designed layouts &amp; banners, merge fields, promo codes, full open/click tracking.</a:t>
+              <a:t>AI-drafted copy, drag-and-drop block builder, AI-designed layouts &amp; banners, merge fields, promo codes, full open/click tracking.</a:t>
             </a:r>
             <a:endParaRPr lang="en-US" sz="1200" dirty="0"/>
           </a:p>
@@ -10968,7 +10968,7 @@
                 <a:ea typeface="Segoe UI" pitchFamily="34" charset="-122"/>
                 <a:cs typeface="Segoe UI" pitchFamily="34" charset="-120"/>
               </a:rPr>
-              <a:t>Drip automations  </a:t>
+              <a:t>Drip automations: </a:t>
             </a:r>
             <a:pPr indent="0" marL="0">
               <a:lnSpc>
@@ -10985,7 +10985,7 @@
                 <a:ea typeface="Segoe UI" pitchFamily="34" charset="-122"/>
                 <a:cs typeface="Segoe UI" pitchFamily="34" charset="-120"/>
               </a:rPr>
-              <a:t>— abandoned-cart journeys that catch new abandoners in real time, stop when someone buys, and show a per-step conversion waterfall.</a:t>
+              <a:t>abandoned-cart journeys that catch new abandoners in real time, stop when someone buys, and show a per-step conversion waterfall.</a:t>
             </a:r>
             <a:endParaRPr lang="en-US" sz="1200" dirty="0"/>
           </a:p>
@@ -11027,7 +11027,7 @@
                 <a:ea typeface="Segoe UI" pitchFamily="34" charset="-122"/>
                 <a:cs typeface="Segoe UI" pitchFamily="34" charset="-120"/>
               </a:rPr>
-              <a:t>Owl auto-pilot  </a:t>
+              <a:t>Owl auto-pilot: </a:t>
             </a:r>
             <a:pPr indent="0" marL="0">
               <a:lnSpc>
@@ -11044,7 +11044,7 @@
                 <a:ea typeface="Segoe UI" pitchFamily="34" charset="-122"/>
                 <a:cs typeface="Segoe UI" pitchFamily="34" charset="-120"/>
               </a:rPr>
-              <a:t>— one tap turns an AI suggestion into a drafted campaign; it still rides the normal review + approval gates.</a:t>
+              <a:t>one tap turns an AI suggestion into a drafted campaign; it still rides the normal review + approval gates.</a:t>
             </a:r>
             <a:endParaRPr lang="en-US" sz="1200" dirty="0"/>
           </a:p>
@@ -11086,7 +11086,7 @@
                 <a:ea typeface="Segoe UI" pitchFamily="34" charset="-122"/>
                 <a:cs typeface="Segoe UI" pitchFamily="34" charset="-120"/>
               </a:rPr>
-              <a:t>Approvals &amp; consent built in  </a:t>
+              <a:t>Approvals &amp; consent built in: </a:t>
             </a:r>
             <a:pPr indent="0" marL="0">
               <a:lnSpc>
@@ -11103,7 +11103,7 @@
                 <a:ea typeface="Segoe UI" pitchFamily="34" charset="-122"/>
                 <a:cs typeface="Segoe UI" pitchFamily="34" charset="-120"/>
               </a:rPr>
-              <a:t>— nothing sends without explicit approval; POPIA-aware consent enforced per channel; send caps stop costly mistakes.</a:t>
+              <a:t>nothing sends without explicit approval; POPIA-aware consent enforced per channel; send caps stop costly mistakes.</a:t>
             </a:r>
             <a:endParaRPr lang="en-US" sz="1200" dirty="0"/>
           </a:p>
@@ -11145,7 +11145,7 @@
                 <a:ea typeface="Segoe UI" pitchFamily="34" charset="-122"/>
                 <a:cs typeface="Segoe UI" pitchFamily="34" charset="-120"/>
               </a:rPr>
-              <a:t>Ad-platform sync  </a:t>
+              <a:t>Ad-platform sync: </a:t>
             </a:r>
             <a:pPr indent="0" marL="0">
               <a:lnSpc>
@@ -11162,7 +11162,7 @@
                 <a:ea typeface="Segoe UI" pitchFamily="34" charset="-122"/>
                 <a:cs typeface="Segoe UI" pitchFamily="34" charset="-120"/>
               </a:rPr>
-              <a:t>— push a segment to Meta or TikTok as a Custom Audience (hashed, privacy-safe), auto-synced daily; see spend &amp; ROAS next to ticket sales.</a:t>
+              <a:t>push a segment to Meta or TikTok as a Custom Audience (hashed, privacy-safe), auto-synced daily; see spend &amp; ROAS next to ticket sales.</a:t>
             </a:r>
             <a:endParaRPr lang="en-US" sz="1200" dirty="0"/>
           </a:p>
@@ -11223,7 +11223,7 @@
                 <a:ea typeface="Segoe UI" pitchFamily="34" charset="-122"/>
                 <a:cs typeface="Segoe UI" pitchFamily="34" charset="-120"/>
               </a:rPr>
-              <a:t>“Personalised, on-brand email + SMS to a precise audience — approval gates and real tracking, all from the same data.”</a:t>
+              <a:t>“Personalised, on-brand email + SMS to a precise audience, approval gates and real tracking, all from the same data.”</a:t>
             </a:r>
             <a:endParaRPr lang="en-US" sz="1500" dirty="0"/>
           </a:p>
@@ -11355,7 +11355,7 @@
                 <a:ea typeface="Segoe UI" pitchFamily="34" charset="-122"/>
                 <a:cs typeface="Segoe UI" pitchFamily="34" charset="-120"/>
               </a:rPr>
-              <a:t>audiences · journeys · ad platforms · creative · attribution — one live, governed dataset</a:t>
+              <a:t>audiences · journeys · ad platforms · creative · attribution, one live, governed dataset</a:t>
             </a:r>
             <a:endParaRPr lang="en-US" sz="1200" dirty="0"/>
           </a:p>
@@ -12049,7 +12049,7 @@
                 <a:ea typeface="Segoe UI" pitchFamily="34" charset="-122"/>
                 <a:cs typeface="Segoe UI" pitchFamily="34" charset="-120"/>
               </a:rPr>
-              <a:t>Audiences that never go stale  </a:t>
+              <a:t>Audiences that never go stale: </a:t>
             </a:r>
             <a:pPr indent="0" marL="0">
               <a:lnSpc>
@@ -12066,7 +12066,7 @@
                 <a:ea typeface="Segoe UI" pitchFamily="34" charset="-122"/>
                 <a:cs typeface="Segoe UI" pitchFamily="34" charset="-120"/>
               </a:rPr>
-              <a:t>— segments re-resolve live at send time; combine sources, subtract suppression lists, filter on any column.</a:t>
+              <a:t>segments re-resolve live at send time; combine sources, subtract suppression lists, filter on any column.</a:t>
             </a:r>
             <a:endParaRPr lang="en-US" sz="1200" dirty="0"/>
           </a:p>
@@ -12108,7 +12108,7 @@
                 <a:ea typeface="Segoe UI" pitchFamily="34" charset="-122"/>
                 <a:cs typeface="Segoe UI" pitchFamily="34" charset="-120"/>
               </a:rPr>
-              <a:t>Complex journeys, simple setup  </a:t>
+              <a:t>Complex journeys, simple setup: </a:t>
             </a:r>
             <a:pPr indent="0" marL="0">
               <a:lnSpc>
@@ -12125,7 +12125,7 @@
                 <a:ea typeface="Segoe UI" pitchFamily="34" charset="-122"/>
                 <a:cs typeface="Segoe UI" pitchFamily="34" charset="-120"/>
               </a:rPr>
-              <a:t>— timed multi-step email/SMS drips; true real-time abandoned-cart; buyers auto-exit; a per-step conversion waterfall.</a:t>
+              <a:t>timed multi-step email/SMS drips; true real-time abandoned-cart; buyers auto-exit; a per-step conversion waterfall.</a:t>
             </a:r>
             <a:endParaRPr lang="en-US" sz="1200" dirty="0"/>
           </a:p>
@@ -12167,7 +12167,7 @@
                 <a:ea typeface="Segoe UI" pitchFamily="34" charset="-122"/>
                 <a:cs typeface="Segoe UI" pitchFamily="34" charset="-120"/>
               </a:rPr>
-              <a:t>Live data → your ad accounts  </a:t>
+              <a:t>Live data → your ad accounts: </a:t>
             </a:r>
             <a:pPr indent="0" marL="0">
               <a:lnSpc>
@@ -12184,7 +12184,7 @@
                 <a:ea typeface="Segoe UI" pitchFamily="34" charset="-122"/>
                 <a:cs typeface="Segoe UI" pitchFamily="34" charset="-120"/>
               </a:rPr>
-              <a:t>— push segments to Meta/TikTok as Custom Audiences (hashed, mirrored daily); see spend, CPC and ROAS next to ticket sales.</a:t>
+              <a:t>push segments to Meta/TikTok as Custom Audiences (hashed, mirrored daily); see spend, CPC and ROAS next to ticket sales.</a:t>
             </a:r>
             <a:endParaRPr lang="en-US" sz="1200" dirty="0"/>
           </a:p>
@@ -12226,7 +12226,7 @@
                 <a:ea typeface="Segoe UI" pitchFamily="34" charset="-122"/>
                 <a:cs typeface="Segoe UI" pitchFamily="34" charset="-120"/>
               </a:rPr>
-              <a:t>An AI creative studio inside  </a:t>
+              <a:t>An AI creative studio inside: </a:t>
             </a:r>
             <a:pPr indent="0" marL="0">
               <a:lnSpc>
@@ -12243,7 +12243,7 @@
                 <a:ea typeface="Segoe UI" pitchFamily="34" charset="-122"/>
                 <a:cs typeface="Segoe UI" pitchFamily="34" charset="-120"/>
               </a:rPr>
-              <a:t>— the Owl drafts copy, designs whole themed email layouts and draws on-brand banners; any campaign in any language.</a:t>
+              <a:t>the Owl drafts copy, designs whole themed email layouts and draws on-brand banners; any campaign in any language.</a:t>
             </a:r>
             <a:endParaRPr lang="en-US" sz="1200" dirty="0"/>
           </a:p>
@@ -12285,7 +12285,7 @@
                 <a:ea typeface="Segoe UI" pitchFamily="34" charset="-122"/>
                 <a:cs typeface="Segoe UI" pitchFamily="34" charset="-120"/>
               </a:rPr>
-              <a:t>Attribution you can defend  </a:t>
+              <a:t>Attribution you can defend: </a:t>
             </a:r>
             <a:pPr indent="0" marL="0">
               <a:lnSpc>
@@ -12302,7 +12302,7 @@
                 <a:ea typeface="Segoe UI" pitchFamily="34" charset="-122"/>
                 <a:cs typeface="Segoe UI" pitchFamily="34" charset="-120"/>
               </a:rPr>
-              <a:t>— per-recipient opens, clicks and tracked purchases; UTMs everywhere; unique-per-person promo codes tie a sale to a send.</a:t>
+              <a:t>per-recipient opens, clicks and tracked purchases; UTMs everywhere; unique-per-person promo codes tie a sale to a send.</a:t>
             </a:r>
             <a:endParaRPr lang="en-US" sz="1200" dirty="0"/>
           </a:p>
@@ -12344,7 +12344,7 @@
                 <a:ea typeface="Segoe UI" pitchFamily="34" charset="-122"/>
                 <a:cs typeface="Segoe UI" pitchFamily="34" charset="-120"/>
               </a:rPr>
-              <a:t>Guardrails a CMO will love  </a:t>
+              <a:t>Guardrails a CMO will love: </a:t>
             </a:r>
             <a:pPr indent="0" marL="0">
               <a:lnSpc>
@@ -12361,7 +12361,7 @@
                 <a:ea typeface="Segoe UI" pitchFamily="34" charset="-122"/>
                 <a:cs typeface="Segoe UI" pitchFamily="34" charset="-120"/>
               </a:rPr>
-              <a:t>— approval gates, POPIA-aware consent, one-click unsubscribe, audience &amp; SMS send caps.</a:t>
+              <a:t>approval gates, POPIA-aware consent, one-click unsubscribe, audience &amp; SMS send caps.</a:t>
             </a:r>
             <a:endParaRPr lang="en-US" sz="1200" dirty="0"/>
           </a:p>
@@ -12422,7 +12422,7 @@
                 <a:ea typeface="Segoe UI" pitchFamily="34" charset="-122"/>
                 <a:cs typeface="Segoe UI" pitchFamily="34" charset="-120"/>
               </a:rPr>
-              <a:t>“From seeing a cohort to a live journey, an ad audience and tracked revenue — without exporting a single CSV.”</a:t>
+              <a:t>“From seeing a cohort to a live journey, an ad audience and tracked revenue, without exporting a single CSV.”</a:t>
             </a:r>
             <a:endParaRPr lang="en-US" sz="1500" dirty="0"/>
           </a:p>
@@ -12513,7 +12513,7 @@
                 <a:ea typeface="Segoe UI" pitchFamily="34" charset="-122"/>
                 <a:cs typeface="Segoe UI" pitchFamily="34" charset="-120"/>
               </a:rPr>
-              <a:t>🎪  RUN — Event Ops, your operations command centre</a:t>
+              <a:t>🎪  RUN · Event Ops, your operations command centre</a:t>
             </a:r>
             <a:endParaRPr lang="en-US" sz="2600" dirty="0"/>
           </a:p>
@@ -12554,7 +12554,7 @@
                 <a:ea typeface="Segoe UI" pitchFamily="34" charset="-122"/>
                 <a:cs typeface="Segoe UI" pitchFamily="34" charset="-120"/>
               </a:rPr>
-              <a:t>the gates, the bars, the devices, the data itself — one live board</a:t>
+              <a:t>the gates, the bars, the devices, the data itself, one live board</a:t>
             </a:r>
             <a:endParaRPr lang="en-US" sz="1200" dirty="0"/>
           </a:p>
@@ -12787,7 +12787,7 @@
                 <a:ea typeface="Segoe UI" pitchFamily="34" charset="-122"/>
                 <a:cs typeface="Segoe UI" pitchFamily="34" charset="-120"/>
               </a:rPr>
-              <a:t>The live site map  </a:t>
+              <a:t>The live site map: </a:t>
             </a:r>
             <a:pPr indent="0" marL="0">
               <a:lnSpc>
@@ -12804,7 +12804,7 @@
                 <a:ea typeface="Segoe UI" pitchFamily="34" charset="-122"/>
                 <a:cs typeface="Segoe UI" pitchFamily="34" charset="-120"/>
               </a:rPr>
-              <a:t>— your venue’s own plan with every station pinned: heat shows where the crowd is spending right now; a dark station is flagged the moment its data stops.</a:t>
+              <a:t>your venue’s own plan with every station pinned: heat shows where the crowd is spending right now; a dark station is flagged the moment its data stops.</a:t>
             </a:r>
             <a:endParaRPr lang="en-US" sz="1200" dirty="0"/>
           </a:p>
@@ -12846,7 +12846,7 @@
                 <a:ea typeface="Segoe UI" pitchFamily="34" charset="-122"/>
                 <a:cs typeface="Segoe UI" pitchFamily="34" charset="-120"/>
               </a:rPr>
-              <a:t>Hotspots &amp; the heat map  </a:t>
+              <a:t>Hotspots &amp; the heat map: </a:t>
             </a:r>
             <a:pPr indent="0" marL="0">
               <a:lnSpc>
@@ -12863,7 +12863,7 @@
                 <a:ea typeface="Segoe UI" pitchFamily="34" charset="-122"/>
                 <a:cs typeface="Segoe UI" pitchFamily="34" charset="-120"/>
               </a:rPr>
-              <a:t>— station activity through the day in time blocks: watch the crowd move, spot the overloaded station and the dead one, staff accordingly.</a:t>
+              <a:t>station activity through the day in time blocks: watch the crowd move, spot the overloaded station and the dead one, staff accordingly.</a:t>
             </a:r>
             <a:endParaRPr lang="en-US" sz="1200" dirty="0"/>
           </a:p>
@@ -12905,7 +12905,7 @@
                 <a:ea typeface="Segoe UI" pitchFamily="34" charset="-122"/>
                 <a:cs typeface="Segoe UI" pitchFamily="34" charset="-120"/>
               </a:rPr>
-              <a:t>Every device tracked  </a:t>
+              <a:t>Every device tracked: </a:t>
             </a:r>
             <a:pPr indent="0" marL="0">
               <a:lnSpc>
@@ -12922,7 +12922,7 @@
                 <a:ea typeface="Segoe UI" pitchFamily="34" charset="-122"/>
                 <a:cs typeface="Segoe UI" pitchFamily="34" charset="-120"/>
               </a:rPr>
-              <a:t>— scan to move between store and stations; append-only audit trail; every device accounted for at event close.</a:t>
+              <a:t>scan to move between store and stations; append-only audit trail; every device accounted for at event close.</a:t>
             </a:r>
             <a:endParaRPr lang="en-US" sz="1200" dirty="0"/>
           </a:p>
@@ -12964,7 +12964,7 @@
                 <a:ea typeface="Segoe UI" pitchFamily="34" charset="-122"/>
                 <a:cs typeface="Segoe UI" pitchFamily="34" charset="-120"/>
               </a:rPr>
-              <a:t>Connectivity &amp; data health  </a:t>
+              <a:t>Connectivity &amp; data health: </a:t>
             </a:r>
             <a:pPr indent="0" marL="0">
               <a:lnSpc>
@@ -12981,7 +12981,7 @@
                 <a:ea typeface="Segoe UI" pitchFamily="34" charset="-122"/>
                 <a:cs typeface="Segoe UI" pitchFamily="34" charset="-120"/>
               </a:rPr>
-              <a:t>— stream watch per station and a roster of exactly which units are offline and for how long. Know a scanner died before the queue does.</a:t>
+              <a:t>stream watch per station and a roster of exactly which units are offline and for how long. Know a scanner died before the queue does.</a:t>
             </a:r>
             <a:endParaRPr lang="en-US" sz="1200" dirty="0"/>
           </a:p>
@@ -13023,7 +13023,7 @@
                 <a:ea typeface="Segoe UI" pitchFamily="34" charset="-122"/>
                 <a:cs typeface="Segoe UI" pitchFamily="34" charset="-120"/>
               </a:rPr>
-              <a:t>AI Diagnose · live updates · alerts  </a:t>
+              <a:t>AI Diagnose · live updates · alerts: </a:t>
             </a:r>
             <a:pPr indent="0" marL="0">
               <a:lnSpc>
@@ -13040,7 +13040,7 @@
                 <a:ea typeface="Segoe UI" pitchFamily="34" charset="-122"/>
                 <a:cs typeface="Segoe UI" pitchFamily="34" charset="-120"/>
               </a:rPr>
-              <a:t>— one-tap AI verdicts per station, a multi-metric mini report every 15–120 min while doors are open, and threshold alerts on any number.</a:t>
+              <a:t>one-tap AI verdicts per station, a multi-metric mini report every 15–120 min while doors are open, and threshold alerts on any number.</a:t>
             </a:r>
             <a:endParaRPr lang="en-US" sz="1200" dirty="0"/>
           </a:p>
@@ -13103,7 +13103,7 @@
                 <a:ea typeface="Segoe UI" pitchFamily="34" charset="-122"/>
                 <a:cs typeface="Segoe UI" pitchFamily="34" charset="-120"/>
               </a:rPr>
-              <a:t>The Flow board’s live site map — stations, heat and a dark station, on your own venue plan.</a:t>
+              <a:t>The Flow board’s live site map, stations, heat and a dark station, on your own venue plan.</a:t>
             </a:r>
             <a:endParaRPr lang="en-US" sz="1000" dirty="0"/>
           </a:p>

--- a/docs/sales-collateral/Pulse-Sales-Deck.pptx
+++ b/docs/sales-collateral/Pulse-Sales-Deck.pptx
@@ -2293,7 +2293,7 @@
                 <a:ea typeface="Segoe UI" pitchFamily="34" charset="-122"/>
                 <a:cs typeface="Segoe UI" pitchFamily="34" charset="-120"/>
               </a:rPr>
-              <a:t>Sales deck · 2026</a:t>
+              <a:t>Prepared for Milk &amp; Cookies · July 2026</a:t>
             </a:r>
             <a:endParaRPr lang="en-US" sz="1100" dirty="0"/>
           </a:p>

--- a/docs/sales-collateral/Pulse-Sales-Deck.pptx
+++ b/docs/sales-collateral/Pulse-Sales-Deck.pptx
@@ -12846,7 +12846,7 @@
                 <a:ea typeface="Segoe UI" pitchFamily="34" charset="-122"/>
                 <a:cs typeface="Segoe UI" pitchFamily="34" charset="-120"/>
               </a:rPr>
-              <a:t>Hotspots &amp; the heat map: </a:t>
+              <a:t>Bar &amp; operator performance: </a:t>
             </a:r>
             <a:pPr indent="0" marL="0">
               <a:lnSpc>
@@ -12863,7 +12863,7 @@
                 <a:ea typeface="Segoe UI" pitchFamily="34" charset="-122"/>
                 <a:cs typeface="Segoe UI" pitchFamily="34" charset="-120"/>
               </a:rPr>
-              <a:t>station activity through the day in time blocks: watch the crowd move, spot the overloaded station and the dead one, staff accordingly.</a:t>
+              <a:t>every bar and every bartender, live: sales and rands-per-hour per operator, who is flying and which till has gone quiet. The River view turns the night into flowing lanes.</a:t>
             </a:r>
             <a:endParaRPr lang="en-US" sz="1200" dirty="0"/>
           </a:p>
@@ -13062,8 +13062,8 @@
         </p:blipFill>
         <p:spPr>
           <a:xfrm>
-            <a:off x="6172200" y="1463040"/>
-            <a:ext cx="5577840" cy="2039112"/>
+            <a:off x="6172200" y="1417320"/>
+            <a:ext cx="5577840" cy="1883664"/>
           </a:xfrm>
           <a:prstGeom prst="rect">
             <a:avLst/>
@@ -13078,8 +13078,8 @@
         </p:nvSpPr>
         <p:spPr>
           <a:xfrm>
-            <a:off x="6172200" y="3566160"/>
-            <a:ext cx="5577840" cy="457200"/>
+            <a:off x="6172200" y="3319272"/>
+            <a:ext cx="5577840" cy="292608"/>
           </a:xfrm>
           <a:prstGeom prst="rect">
             <a:avLst/>
@@ -13095,7 +13095,7 @@
               <a:buNone/>
             </a:pPr>
             <a:r>
-              <a:rPr lang="en-US" sz="1000" i="1" dirty="0">
+              <a:rPr lang="en-US" sz="950" i="1" dirty="0">
                 <a:solidFill>
                   <a:srgbClr val="55556D"/>
                 </a:solidFill>
@@ -13103,49 +13103,46 @@
                 <a:ea typeface="Segoe UI" pitchFamily="34" charset="-122"/>
                 <a:cs typeface="Segoe UI" pitchFamily="34" charset="-120"/>
               </a:rPr>
-              <a:t>The Flow board’s live site map, stations, heat and a dark station, on your own venue plan.</a:t>
-            </a:r>
-            <a:endParaRPr lang="en-US" sz="1000" dirty="0"/>
-          </a:p>
-        </p:txBody>
-      </p:sp>
-      <p:sp>
-        <p:nvSpPr>
-          <p:cNvPr id="18" name="Shape 15"/>
-          <p:cNvSpPr/>
-          <p:nvPr/>
-        </p:nvSpPr>
-        <p:spPr>
-          <a:xfrm>
-            <a:off x="6172200" y="4160520"/>
-            <a:ext cx="5577840" cy="1828800"/>
-          </a:xfrm>
-          <a:prstGeom prst="roundRect">
-            <a:avLst>
-              <a:gd name="adj" fmla="val 5000"/>
-            </a:avLst>
-          </a:prstGeom>
-          <a:solidFill>
-            <a:srgbClr val="F0FBFD"/>
-          </a:solidFill>
-          <a:ln w="12700">
-            <a:solidFill>
-              <a:srgbClr val="06B6D4"/>
-            </a:solidFill>
-            <a:prstDash val="solid"/>
-          </a:ln>
-        </p:spPr>
-      </p:sp>
-      <p:sp>
-        <p:nvSpPr>
-          <p:cNvPr id="19" name="Text 16"/>
-          <p:cNvSpPr/>
-          <p:nvPr/>
-        </p:nvSpPr>
-        <p:spPr>
-          <a:xfrm>
-            <a:off x="6400800" y="4297680"/>
-            <a:ext cx="5120640" cy="1554480"/>
+              <a:t>The live site map: stations, heat and a dark station, on your own venue plan.</a:t>
+            </a:r>
+            <a:endParaRPr lang="en-US" sz="950" dirty="0"/>
+          </a:p>
+        </p:txBody>
+      </p:sp>
+      <p:pic>
+        <p:nvPicPr>
+          <p:cNvPr id="18" name="Image 1" descr="river.png">    </p:cNvPr>
+          <p:cNvPicPr>
+            <a:picLocks noChangeAspect="1"/>
+          </p:cNvPicPr>
+          <p:nvPr/>
+        </p:nvPicPr>
+        <p:blipFill>
+          <a:blip r:embed="rId2"/>
+          <a:stretch>
+            <a:fillRect/>
+          </a:stretch>
+        </p:blipFill>
+        <p:spPr>
+          <a:xfrm>
+            <a:off x="6172200" y="3749040"/>
+            <a:ext cx="5577840" cy="1965960"/>
+          </a:xfrm>
+          <a:prstGeom prst="rect">
+            <a:avLst/>
+          </a:prstGeom>
+        </p:spPr>
+      </p:pic>
+      <p:sp>
+        <p:nvSpPr>
+          <p:cNvPr id="19" name="Text 15"/>
+          <p:cNvSpPr/>
+          <p:nvPr/>
+        </p:nvSpPr>
+        <p:spPr>
+          <a:xfrm>
+            <a:off x="6172200" y="5742432"/>
+            <a:ext cx="5577840" cy="292608"/>
           </a:xfrm>
           <a:prstGeom prst="rect">
             <a:avLst/>
@@ -13157,24 +13154,21 @@
           <a:bodyPr wrap="square" rtlCol="0" anchor="ctr"/>
           <a:lstStyle/>
           <a:p>
-            <a:pPr algn="ctr" indent="0" marL="0">
-              <a:lnSpc>
-                <a:spcPts val="2000"/>
-              </a:lnSpc>
-              <a:buNone/>
-            </a:pPr>
-            <a:r>
-              <a:rPr lang="en-US" sz="1400" b="1" i="1" dirty="0">
-                <a:solidFill>
-                  <a:srgbClr val="0E7490"/>
-                </a:solidFill>
-                <a:latin typeface="Segoe UI" pitchFamily="34" charset="0"/>
-                <a:ea typeface="Segoe UI" pitchFamily="34" charset="-122"/>
-                <a:cs typeface="Segoe UI" pitchFamily="34" charset="-120"/>
-              </a:rPr>
-              <a:t>“You’ll know a hotspot is forming, or a scanner has died, before anyone on the ground has to tell you.”</a:t>
-            </a:r>
-            <a:endParaRPr lang="en-US" sz="1400" dirty="0"/>
+            <a:pPr indent="0" marL="0">
+              <a:buNone/>
+            </a:pPr>
+            <a:r>
+              <a:rPr lang="en-US" sz="950" i="1" dirty="0">
+                <a:solidFill>
+                  <a:srgbClr val="55556D"/>
+                </a:solidFill>
+                <a:latin typeface="Segoe UI" pitchFamily="34" charset="0"/>
+                <a:ea typeface="Segoe UI" pitchFamily="34" charset="-122"/>
+                <a:cs typeface="Segoe UI" pitchFamily="34" charset="-120"/>
+              </a:rPr>
+              <a:t>The River, operators only: each lane is money flowing through one bartender’s till.</a:t>
+            </a:r>
+            <a:endParaRPr lang="en-US" sz="950" dirty="0"/>
           </a:p>
         </p:txBody>
       </p:sp>

--- a/docs/sales-collateral/Pulse-Sales-Deck.pptx
+++ b/docs/sales-collateral/Pulse-Sales-Deck.pptx
@@ -2194,7 +2194,7 @@
                 <a:ea typeface="Segoe UI" pitchFamily="34" charset="-122"/>
                 <a:cs typeface="Segoe UI" pitchFamily="34" charset="-120"/>
               </a:rPr>
-              <a:t>The Experience OS for event organisers: live dashboards, an AI analyst, and a full email/SMS campaign engine, all powered by the same governed data. Insight → action → results, in your brand, on your phone.</a:t>
+              <a:t>Howler is the Experience Operating System for live events; Pulse is our new flagship product: live dashboards, an AI analyst, and a full email/SMS campaign engine, all powered by the same governed data. Insight → action → results, in your brand, on your phone.</a:t>
             </a:r>
             <a:endParaRPr lang="en-US" sz="1500" dirty="0"/>
           </a:p>
@@ -2538,7 +2538,7 @@
                 <a:ea typeface="Segoe UI" pitchFamily="34" charset="-122"/>
                 <a:cs typeface="Segoe UI" pitchFamily="34" charset="-120"/>
               </a:rPr>
-              <a:t>  ·  The Experience OS by Howler</a:t>
+              <a:t>  ·  flagship of the Howler Experience OS</a:t>
             </a:r>
             <a:endParaRPr lang="en-US" sz="900" dirty="0"/>
           </a:p>
@@ -3276,7 +3276,7 @@
                 <a:ea typeface="Segoe UI" pitchFamily="34" charset="-122"/>
                 <a:cs typeface="Segoe UI" pitchFamily="34" charset="-120"/>
               </a:rPr>
-              <a:t>  ·  The Experience OS by Howler</a:t>
+              <a:t>  ·  flagship of the Howler Experience OS</a:t>
             </a:r>
             <a:endParaRPr lang="en-US" sz="900" dirty="0"/>
           </a:p>
@@ -4726,7 +4726,7 @@
                 <a:ea typeface="Segoe UI" pitchFamily="34" charset="-122"/>
                 <a:cs typeface="Segoe UI" pitchFamily="34" charset="-120"/>
               </a:rPr>
-              <a:t>  ·  The Experience OS by Howler</a:t>
+              <a:t>  ·  flagship of the Howler Experience OS</a:t>
             </a:r>
             <a:endParaRPr lang="en-US" sz="900" dirty="0"/>
           </a:p>
@@ -6369,7 +6369,7 @@
                 <a:ea typeface="Segoe UI" pitchFamily="34" charset="-122"/>
                 <a:cs typeface="Segoe UI" pitchFamily="34" charset="-120"/>
               </a:rPr>
-              <a:t>  ·  The Experience OS by Howler</a:t>
+              <a:t>  ·  flagship of the Howler Experience OS</a:t>
             </a:r>
             <a:endParaRPr lang="en-US" sz="900" dirty="0"/>
           </a:p>
@@ -7163,7 +7163,7 @@
                 <a:ea typeface="Segoe UI" pitchFamily="34" charset="-122"/>
                 <a:cs typeface="Segoe UI" pitchFamily="34" charset="-120"/>
               </a:rPr>
-              <a:t>  ·  The Experience OS by Howler</a:t>
+              <a:t>  ·  flagship of the Howler Experience OS</a:t>
             </a:r>
             <a:endParaRPr lang="en-US" sz="900" dirty="0"/>
           </a:p>
@@ -8260,7 +8260,7 @@
                 <a:ea typeface="Segoe UI" pitchFamily="34" charset="-122"/>
                 <a:cs typeface="Segoe UI" pitchFamily="34" charset="-120"/>
               </a:rPr>
-              <a:t>  ·  The Experience OS by Howler</a:t>
+              <a:t>  ·  flagship of the Howler Experience OS</a:t>
             </a:r>
             <a:endParaRPr lang="en-US" sz="900" dirty="0"/>
           </a:p>
@@ -9061,7 +9061,7 @@
                 <a:ea typeface="Segoe UI" pitchFamily="34" charset="-122"/>
                 <a:cs typeface="Segoe UI" pitchFamily="34" charset="-120"/>
               </a:rPr>
-              <a:t>  ·  The Experience OS by Howler</a:t>
+              <a:t>  ·  flagship of the Howler Experience OS</a:t>
             </a:r>
             <a:endParaRPr lang="en-US" sz="900" dirty="0"/>
           </a:p>
@@ -9723,7 +9723,7 @@
                 <a:ea typeface="Segoe UI" pitchFamily="34" charset="-122"/>
                 <a:cs typeface="Segoe UI" pitchFamily="34" charset="-120"/>
               </a:rPr>
-              <a:t>  ·  The Experience OS by Howler</a:t>
+              <a:t>  ·  flagship of the Howler Experience OS</a:t>
             </a:r>
             <a:endParaRPr lang="en-US" sz="900" dirty="0"/>
           </a:p>
@@ -10730,7 +10730,7 @@
                 <a:ea typeface="Segoe UI" pitchFamily="34" charset="-122"/>
                 <a:cs typeface="Segoe UI" pitchFamily="34" charset="-120"/>
               </a:rPr>
-              <a:t>  ·  The Experience OS by Howler</a:t>
+              <a:t>  ·  flagship of the Howler Experience OS</a:t>
             </a:r>
             <a:endParaRPr lang="en-US" sz="900" dirty="0"/>
           </a:p>
@@ -11468,7 +11468,7 @@
                 <a:ea typeface="Segoe UI" pitchFamily="34" charset="-122"/>
                 <a:cs typeface="Segoe UI" pitchFamily="34" charset="-120"/>
               </a:rPr>
-              <a:t>  ·  The Experience OS by Howler</a:t>
+              <a:t>  ·  flagship of the Howler Experience OS</a:t>
             </a:r>
             <a:endParaRPr lang="en-US" sz="900" dirty="0"/>
           </a:p>
@@ -12667,7 +12667,7 @@
                 <a:ea typeface="Segoe UI" pitchFamily="34" charset="-122"/>
                 <a:cs typeface="Segoe UI" pitchFamily="34" charset="-120"/>
               </a:rPr>
-              <a:t>  ·  The Experience OS by Howler</a:t>
+              <a:t>  ·  flagship of the Howler Experience OS</a:t>
             </a:r>
             <a:endParaRPr lang="en-US" sz="900" dirty="0"/>
           </a:p>

--- a/docs/sales-collateral/Pulse-Sales-Deck.pptx
+++ b/docs/sales-collateral/Pulse-Sales-Deck.pptx
@@ -3452,7 +3452,7 @@
                       <a:tailEnd type="none" w="med" len="med"/>
                     </a:lnB>
                     <a:solidFill>
-                      <a:srgbClr val="FFFFFF"/>
+                      <a:srgbClr val="F6F1FF"/>
                     </a:solidFill>
                   </a:tcPr>
                 </a:tc>
@@ -3520,7 +3520,7 @@
                       <a:tailEnd type="none" w="med" len="med"/>
                     </a:lnB>
                     <a:solidFill>
-                      <a:srgbClr val="FFFFFF"/>
+                      <a:srgbClr val="F6F1FF"/>
                     </a:solidFill>
                   </a:tcPr>
                 </a:tc>
@@ -3588,7 +3588,7 @@
                       <a:tailEnd type="none" w="med" len="med"/>
                     </a:lnB>
                     <a:solidFill>
-                      <a:srgbClr val="FFFFFF"/>
+                      <a:srgbClr val="F6F1FF"/>
                     </a:solidFill>
                   </a:tcPr>
                 </a:tc>
@@ -4423,34 +4423,7 @@
       </p:graphicFrame>
       <p:sp>
         <p:nvSpPr>
-          <p:cNvPr id="12" name="Shape 9"/>
-          <p:cNvSpPr/>
-          <p:nvPr/>
-        </p:nvSpPr>
-        <p:spPr>
-          <a:xfrm>
-            <a:off x="457200" y="1463040"/>
-            <a:ext cx="11338560" cy="457200"/>
-          </a:xfrm>
-          <a:prstGeom prst="rect">
-            <a:avLst/>
-          </a:prstGeom>
-          <a:solidFill>
-            <a:srgbClr val="F6F1FF">
-              <a:alpha val="60000"/>
-            </a:srgbClr>
-          </a:solidFill>
-          <a:ln w="19050">
-            <a:solidFill>
-              <a:srgbClr val="7C3AED"/>
-            </a:solidFill>
-            <a:prstDash val="solid"/>
-          </a:ln>
-        </p:spPr>
-      </p:sp>
-      <p:sp>
-        <p:nvSpPr>
-          <p:cNvPr id="13" name="Text 10"/>
+          <p:cNvPr id="12" name="Text 9"/>
           <p:cNvSpPr/>
           <p:nvPr/>
         </p:nvSpPr>
@@ -5511,8 +5484,8 @@
         </p:nvSpPr>
         <p:spPr>
           <a:xfrm>
-            <a:off x="457200" y="4864608"/>
-            <a:ext cx="11338560" cy="365760"/>
+            <a:off x="457200" y="4791456"/>
+            <a:ext cx="11338560" cy="347472"/>
           </a:xfrm>
           <a:prstGeom prst="rect">
             <a:avLst/>
@@ -5550,12 +5523,12 @@
         </p:nvSpPr>
         <p:spPr>
           <a:xfrm>
-            <a:off x="457200" y="5349240"/>
-            <a:ext cx="3657600" cy="1234440"/>
+            <a:off x="457200" y="5193792"/>
+            <a:ext cx="3657600" cy="1133856"/>
           </a:xfrm>
           <a:prstGeom prst="roundRect">
             <a:avLst>
-              <a:gd name="adj" fmla="val 7407"/>
+              <a:gd name="adj" fmla="val 8065"/>
             </a:avLst>
           </a:prstGeom>
           <a:solidFill>
@@ -5572,8 +5545,8 @@
         </p:nvSpPr>
         <p:spPr>
           <a:xfrm>
-            <a:off x="594360" y="5413248"/>
-            <a:ext cx="3383280" cy="1097280"/>
+            <a:off x="594360" y="5248656"/>
+            <a:ext cx="3401568" cy="1042416"/>
           </a:xfrm>
           <a:prstGeom prst="rect">
             <a:avLst/>
@@ -5587,12 +5560,12 @@
           <a:p>
             <a:pPr indent="0" marL="0">
               <a:lnSpc>
-                <a:spcPts val="1150"/>
+                <a:spcPts val="1080"/>
               </a:lnSpc>
               <a:buNone/>
             </a:pPr>
             <a:r>
-              <a:rPr lang="en-US" sz="1100" b="1" dirty="0">
+              <a:rPr lang="en-US" sz="1050" b="1" dirty="0">
                 <a:solidFill>
                   <a:srgbClr val="FFFFFF"/>
                 </a:solidFill>
@@ -5605,12 +5578,12 @@
             </a:r>
             <a:pPr indent="0" marL="0">
               <a:lnSpc>
-                <a:spcPts val="1150"/>
+                <a:spcPts val="1080"/>
               </a:lnSpc>
               <a:buNone/>
             </a:pPr>
             <a:r>
-              <a:rPr lang="en-US" sz="900" dirty="0">
+              <a:rPr lang="en-US" sz="860" dirty="0">
                 <a:solidFill>
                   <a:srgbClr val="FFFFFF">
                     <a:alpha val="94000"/>
@@ -5622,7 +5595,7 @@
               </a:rPr>
               <a:t>Cashless spots the Main Bar spiking; the heat map shows the hotspot; the Owl suggests moving two devices, while the night is young.</a:t>
             </a:r>
-            <a:endParaRPr lang="en-US" sz="1100" dirty="0"/>
+            <a:endParaRPr lang="en-US" sz="1050" dirty="0"/>
           </a:p>
         </p:txBody>
       </p:sp>
@@ -5634,12 +5607,12 @@
         </p:nvSpPr>
         <p:spPr>
           <a:xfrm>
-            <a:off x="4297680" y="5349240"/>
-            <a:ext cx="3657600" cy="1234440"/>
+            <a:off x="4297680" y="5193792"/>
+            <a:ext cx="3657600" cy="1133856"/>
           </a:xfrm>
           <a:prstGeom prst="roundRect">
             <a:avLst>
-              <a:gd name="adj" fmla="val 7407"/>
+              <a:gd name="adj" fmla="val 8065"/>
             </a:avLst>
           </a:prstGeom>
           <a:solidFill>
@@ -5656,8 +5629,8 @@
         </p:nvSpPr>
         <p:spPr>
           <a:xfrm>
-            <a:off x="4434840" y="5413248"/>
-            <a:ext cx="3383280" cy="1097280"/>
+            <a:off x="4434840" y="5248656"/>
+            <a:ext cx="3401568" cy="1042416"/>
           </a:xfrm>
           <a:prstGeom prst="rect">
             <a:avLst/>
@@ -5671,12 +5644,12 @@
           <a:p>
             <a:pPr indent="0" marL="0">
               <a:lnSpc>
-                <a:spcPts val="1150"/>
+                <a:spcPts val="1080"/>
               </a:lnSpc>
               <a:buNone/>
             </a:pPr>
             <a:r>
-              <a:rPr lang="en-US" sz="1100" b="1" dirty="0">
+              <a:rPr lang="en-US" sz="1050" b="1" dirty="0">
                 <a:solidFill>
                   <a:srgbClr val="FFFFFF"/>
                 </a:solidFill>
@@ -5689,12 +5662,12 @@
             </a:r>
             <a:pPr indent="0" marL="0">
               <a:lnSpc>
-                <a:spcPts val="1150"/>
+                <a:spcPts val="1080"/>
               </a:lnSpc>
               <a:buNone/>
             </a:pPr>
             <a:r>
-              <a:rPr lang="en-US" sz="900" dirty="0">
+              <a:rPr lang="en-US" sz="860" dirty="0">
                 <a:solidFill>
                   <a:srgbClr val="FFFFFF">
                     <a:alpha val="94000"/>
@@ -5706,7 +5679,7 @@
               </a:rPr>
               <a:t>Ticket + top-ups + bar spend stitched into one picture, your next campaign targets big spenders who haven’t rebought yet.</a:t>
             </a:r>
-            <a:endParaRPr lang="en-US" sz="1100" dirty="0"/>
+            <a:endParaRPr lang="en-US" sz="1050" dirty="0"/>
           </a:p>
         </p:txBody>
       </p:sp>
@@ -5718,12 +5691,12 @@
         </p:nvSpPr>
         <p:spPr>
           <a:xfrm>
-            <a:off x="8138160" y="5349240"/>
-            <a:ext cx="3657600" cy="1234440"/>
+            <a:off x="8138160" y="5193792"/>
+            <a:ext cx="3657600" cy="1133856"/>
           </a:xfrm>
           <a:prstGeom prst="roundRect">
             <a:avLst>
-              <a:gd name="adj" fmla="val 7407"/>
+              <a:gd name="adj" fmla="val 8065"/>
             </a:avLst>
           </a:prstGeom>
           <a:solidFill>
@@ -5740,8 +5713,8 @@
         </p:nvSpPr>
         <p:spPr>
           <a:xfrm>
-            <a:off x="8275320" y="5413248"/>
-            <a:ext cx="3383280" cy="1097280"/>
+            <a:off x="8275320" y="5248656"/>
+            <a:ext cx="3401568" cy="1042416"/>
           </a:xfrm>
           <a:prstGeom prst="rect">
             <a:avLst/>
@@ -5755,12 +5728,12 @@
           <a:p>
             <a:pPr indent="0" marL="0">
               <a:lnSpc>
-                <a:spcPts val="1150"/>
+                <a:spcPts val="1080"/>
               </a:lnSpc>
               <a:buNone/>
             </a:pPr>
             <a:r>
-              <a:rPr lang="en-US" sz="1100" b="1" dirty="0">
+              <a:rPr lang="en-US" sz="1050" b="1" dirty="0">
                 <a:solidFill>
                   <a:srgbClr val="FFFFFF"/>
                 </a:solidFill>
@@ -5773,12 +5746,12 @@
             </a:r>
             <a:pPr indent="0" marL="0">
               <a:lnSpc>
-                <a:spcPts val="1150"/>
+                <a:spcPts val="1080"/>
               </a:lnSpc>
               <a:buNone/>
             </a:pPr>
             <a:r>
-              <a:rPr lang="en-US" sz="900" dirty="0">
+              <a:rPr lang="en-US" sz="860" dirty="0">
                 <a:solidFill>
                   <a:srgbClr val="FFFFFF">
                     <a:alpha val="94000"/>
@@ -5790,7 +5763,7 @@
               </a:rPr>
               <a:t>Pulse knows who your table guests are, what they spent and when they went quiet, next season’s invitation writes itself.</a:t>
             </a:r>
-            <a:endParaRPr lang="en-US" sz="1100" dirty="0"/>
+            <a:endParaRPr lang="en-US" sz="1050" dirty="0"/>
           </a:p>
         </p:txBody>
       </p:sp>
@@ -12513,7 +12486,7 @@
                 <a:ea typeface="Segoe UI" pitchFamily="34" charset="-122"/>
                 <a:cs typeface="Segoe UI" pitchFamily="34" charset="-120"/>
               </a:rPr>
-              <a:t>🎪  RUN · Event Ops, your operations command centre</a:t>
+              <a:t>🎪  RUN · the Event Ops command centre</a:t>
             </a:r>
             <a:endParaRPr lang="en-US" sz="2600" dirty="0"/>
           </a:p>

--- a/docs/sales-collateral/Pulse-Sales-Deck.pptx
+++ b/docs/sales-collateral/Pulse-Sales-Deck.pptx
@@ -9899,16 +9899,40 @@
           </a:ln>
         </p:spPr>
       </p:sp>
-      <p:sp>
-        <p:nvSpPr>
-          <p:cNvPr id="16" name="Text 14"/>
-          <p:cNvSpPr/>
-          <p:nvPr/>
-        </p:nvSpPr>
-        <p:spPr>
-          <a:xfrm>
-            <a:off x="621792" y="1691640"/>
-            <a:ext cx="3154680" cy="384048"/>
+      <p:pic>
+        <p:nvPicPr>
+          <p:cNvPr id="16" name="Image 0" descr="howler-logo.png">    </p:cNvPr>
+          <p:cNvPicPr>
+            <a:picLocks noChangeAspect="1"/>
+          </p:cNvPicPr>
+          <p:nvPr/>
+        </p:nvPicPr>
+        <p:blipFill>
+          <a:blip r:embed="rId1"/>
+          <a:stretch>
+            <a:fillRect/>
+          </a:stretch>
+        </p:blipFill>
+        <p:spPr>
+          <a:xfrm>
+            <a:off x="621792" y="1728216"/>
+            <a:ext cx="310896" cy="310896"/>
+          </a:xfrm>
+          <a:prstGeom prst="rect">
+            <a:avLst/>
+          </a:prstGeom>
+        </p:spPr>
+      </p:pic>
+      <p:sp>
+        <p:nvSpPr>
+          <p:cNvPr id="17" name="Text 14"/>
+          <p:cNvSpPr/>
+          <p:nvPr/>
+        </p:nvSpPr>
+        <p:spPr>
+          <a:xfrm>
+            <a:off x="987552" y="1691640"/>
+            <a:ext cx="2788920" cy="384048"/>
           </a:xfrm>
           <a:prstGeom prst="rect">
             <a:avLst/>
@@ -9932,7 +9956,7 @@
                 <a:ea typeface="Segoe UI" pitchFamily="34" charset="-122"/>
                 <a:cs typeface="Segoe UI" pitchFamily="34" charset="-120"/>
               </a:rPr>
-              <a:t>📱 The Howler Pulse app</a:t>
+              <a:t>The Howler Pulse app</a:t>
             </a:r>
             <a:endParaRPr lang="en-US" sz="1400" dirty="0"/>
           </a:p>
@@ -9940,7 +9964,7 @@
       </p:sp>
       <p:sp>
         <p:nvSpPr>
-          <p:cNvPr id="17" name="Text 15"/>
+          <p:cNvPr id="18" name="Text 15"/>
           <p:cNvSpPr/>
           <p:nvPr/>
         </p:nvSpPr>
@@ -9982,7 +10006,7 @@
       </p:sp>
       <p:sp>
         <p:nvSpPr>
-          <p:cNvPr id="18" name="Shape 16"/>
+          <p:cNvPr id="19" name="Shape 16"/>
           <p:cNvSpPr/>
           <p:nvPr/>
         </p:nvSpPr>
@@ -10007,16 +10031,40 @@
           </a:ln>
         </p:spPr>
       </p:sp>
-      <p:sp>
-        <p:nvSpPr>
-          <p:cNvPr id="19" name="Text 17"/>
-          <p:cNvSpPr/>
-          <p:nvPr/>
-        </p:nvSpPr>
-        <p:spPr>
-          <a:xfrm>
-            <a:off x="621792" y="4069080"/>
-            <a:ext cx="3154680" cy="384048"/>
+      <p:pic>
+        <p:nvPicPr>
+          <p:cNvPr id="20" name="Image 1" descr="whatsapp-logo.png">    </p:cNvPr>
+          <p:cNvPicPr>
+            <a:picLocks noChangeAspect="1"/>
+          </p:cNvPicPr>
+          <p:nvPr/>
+        </p:nvPicPr>
+        <p:blipFill>
+          <a:blip r:embed="rId2"/>
+          <a:stretch>
+            <a:fillRect/>
+          </a:stretch>
+        </p:blipFill>
+        <p:spPr>
+          <a:xfrm>
+            <a:off x="621792" y="4105656"/>
+            <a:ext cx="310896" cy="310896"/>
+          </a:xfrm>
+          <a:prstGeom prst="rect">
+            <a:avLst/>
+          </a:prstGeom>
+        </p:spPr>
+      </p:pic>
+      <p:sp>
+        <p:nvSpPr>
+          <p:cNvPr id="21" name="Text 17"/>
+          <p:cNvSpPr/>
+          <p:nvPr/>
+        </p:nvSpPr>
+        <p:spPr>
+          <a:xfrm>
+            <a:off x="987552" y="4069080"/>
+            <a:ext cx="2788920" cy="384048"/>
           </a:xfrm>
           <a:prstGeom prst="rect">
             <a:avLst/>
@@ -10040,7 +10088,7 @@
                 <a:ea typeface="Segoe UI" pitchFamily="34" charset="-122"/>
                 <a:cs typeface="Segoe UI" pitchFamily="34" charset="-120"/>
               </a:rPr>
-              <a:t>💬 WhatsApp</a:t>
+              <a:t>WhatsApp</a:t>
             </a:r>
             <a:endParaRPr lang="en-US" sz="1400" dirty="0"/>
           </a:p>
@@ -10048,7 +10096,7 @@
       </p:sp>
       <p:sp>
         <p:nvSpPr>
-          <p:cNvPr id="20" name="Text 18"/>
+          <p:cNvPr id="22" name="Text 18"/>
           <p:cNvSpPr/>
           <p:nvPr/>
         </p:nvSpPr>
@@ -10090,7 +10138,7 @@
       </p:sp>
       <p:sp>
         <p:nvSpPr>
-          <p:cNvPr id="21" name="Shape 19"/>
+          <p:cNvPr id="23" name="Shape 19"/>
           <p:cNvSpPr/>
           <p:nvPr/>
         </p:nvSpPr>
@@ -10115,16 +10163,40 @@
           </a:ln>
         </p:spPr>
       </p:sp>
-      <p:sp>
-        <p:nvSpPr>
-          <p:cNvPr id="22" name="Text 20"/>
-          <p:cNvSpPr/>
-          <p:nvPr/>
-        </p:nvSpPr>
-        <p:spPr>
-          <a:xfrm>
-            <a:off x="8421624" y="1691640"/>
-            <a:ext cx="3154680" cy="384048"/>
+      <p:pic>
+        <p:nvPicPr>
+          <p:cNvPr id="24" name="Image 2" descr="chatgpt-logo.png">    </p:cNvPr>
+          <p:cNvPicPr>
+            <a:picLocks noChangeAspect="1"/>
+          </p:cNvPicPr>
+          <p:nvPr/>
+        </p:nvPicPr>
+        <p:blipFill>
+          <a:blip r:embed="rId3"/>
+          <a:stretch>
+            <a:fillRect/>
+          </a:stretch>
+        </p:blipFill>
+        <p:spPr>
+          <a:xfrm>
+            <a:off x="8421624" y="1728216"/>
+            <a:ext cx="310896" cy="310896"/>
+          </a:xfrm>
+          <a:prstGeom prst="rect">
+            <a:avLst/>
+          </a:prstGeom>
+        </p:spPr>
+      </p:pic>
+      <p:sp>
+        <p:nvSpPr>
+          <p:cNvPr id="25" name="Text 20"/>
+          <p:cNvSpPr/>
+          <p:nvPr/>
+        </p:nvSpPr>
+        <p:spPr>
+          <a:xfrm>
+            <a:off x="8787384" y="1691640"/>
+            <a:ext cx="2788920" cy="384048"/>
           </a:xfrm>
           <a:prstGeom prst="rect">
             <a:avLst/>
@@ -10148,7 +10220,7 @@
                 <a:ea typeface="Segoe UI" pitchFamily="34" charset="-122"/>
                 <a:cs typeface="Segoe UI" pitchFamily="34" charset="-120"/>
               </a:rPr>
-              <a:t>🤖 ChatGPT</a:t>
+              <a:t>ChatGPT</a:t>
             </a:r>
             <a:endParaRPr lang="en-US" sz="1400" dirty="0"/>
           </a:p>
@@ -10156,7 +10228,7 @@
       </p:sp>
       <p:sp>
         <p:nvSpPr>
-          <p:cNvPr id="23" name="Text 21"/>
+          <p:cNvPr id="26" name="Text 21"/>
           <p:cNvSpPr/>
           <p:nvPr/>
         </p:nvSpPr>
@@ -10198,7 +10270,7 @@
       </p:sp>
       <p:sp>
         <p:nvSpPr>
-          <p:cNvPr id="24" name="Shape 22"/>
+          <p:cNvPr id="27" name="Shape 22"/>
           <p:cNvSpPr/>
           <p:nvPr/>
         </p:nvSpPr>
@@ -10223,103 +10295,127 @@
           </a:ln>
         </p:spPr>
       </p:sp>
-      <p:sp>
-        <p:nvSpPr>
-          <p:cNvPr id="25" name="Text 23"/>
-          <p:cNvSpPr/>
-          <p:nvPr/>
-        </p:nvSpPr>
-        <p:spPr>
-          <a:xfrm>
-            <a:off x="8421624" y="4069080"/>
-            <a:ext cx="3154680" cy="384048"/>
-          </a:xfrm>
-          <a:prstGeom prst="rect">
-            <a:avLst/>
-          </a:prstGeom>
-          <a:noFill/>
-          <a:ln/>
-        </p:spPr>
-        <p:txBody>
-          <a:bodyPr wrap="square" rtlCol="0" anchor="ctr"/>
-          <a:lstStyle/>
-          <a:p>
-            <a:pPr indent="0" marL="0">
-              <a:buNone/>
-            </a:pPr>
-            <a:r>
-              <a:rPr lang="en-US" sz="1400" b="1" dirty="0">
-                <a:solidFill>
-                  <a:srgbClr val="1A1A2E"/>
-                </a:solidFill>
-                <a:latin typeface="Segoe UI" pitchFamily="34" charset="0"/>
-                <a:ea typeface="Segoe UI" pitchFamily="34" charset="-122"/>
-                <a:cs typeface="Segoe UI" pitchFamily="34" charset="-120"/>
-              </a:rPr>
-              <a:t>✳️ Claude</a:t>
-            </a:r>
-            <a:endParaRPr lang="en-US" sz="1400" dirty="0"/>
-          </a:p>
-        </p:txBody>
-      </p:sp>
-      <p:sp>
-        <p:nvSpPr>
-          <p:cNvPr id="26" name="Text 24"/>
-          <p:cNvSpPr/>
-          <p:nvPr/>
-        </p:nvSpPr>
-        <p:spPr>
-          <a:xfrm>
-            <a:off x="8421624" y="4480560"/>
-            <a:ext cx="3154680" cy="1143000"/>
-          </a:xfrm>
-          <a:prstGeom prst="rect">
-            <a:avLst/>
-          </a:prstGeom>
-          <a:noFill/>
-          <a:ln/>
-        </p:spPr>
-        <p:txBody>
-          <a:bodyPr wrap="square" rtlCol="0" anchor="t"/>
-          <a:lstStyle/>
-          <a:p>
-            <a:pPr indent="0" marL="0">
-              <a:lnSpc>
-                <a:spcPts val="1400"/>
-              </a:lnSpc>
-              <a:buNone/>
-            </a:pPr>
-            <a:r>
-              <a:rPr lang="en-US" sz="1050" dirty="0">
-                <a:solidFill>
-                  <a:srgbClr val="55556D"/>
-                </a:solidFill>
-                <a:latin typeface="Segoe UI" pitchFamily="34" charset="0"/>
-                <a:ea typeface="Segoe UI" pitchFamily="34" charset="-122"/>
-                <a:cs typeface="Segoe UI" pitchFamily="34" charset="-120"/>
-              </a:rPr>
-              <a:t>The same connector plugs your event data into Claude, read-only, per-client keys you control.</a:t>
-            </a:r>
-            <a:endParaRPr lang="en-US" sz="1050" dirty="0"/>
-          </a:p>
-        </p:txBody>
-      </p:sp>
       <p:pic>
         <p:nvPicPr>
-          <p:cNvPr id="27" name="Image 0" descr="owl-mark.png">    </p:cNvPr>
+          <p:cNvPr id="28" name="Image 3" descr="claude-logo.png">    </p:cNvPr>
           <p:cNvPicPr>
             <a:picLocks noChangeAspect="1"/>
           </p:cNvPicPr>
           <p:nvPr/>
         </p:nvPicPr>
         <p:blipFill>
-          <a:blip r:embed="rId1"/>
+          <a:blip r:embed="rId4"/>
           <a:stretch>
             <a:fillRect/>
           </a:stretch>
         </p:blipFill>
         <p:spPr>
           <a:xfrm>
+            <a:off x="8421624" y="4105656"/>
+            <a:ext cx="310896" cy="310896"/>
+          </a:xfrm>
+          <a:prstGeom prst="rect">
+            <a:avLst/>
+          </a:prstGeom>
+        </p:spPr>
+      </p:pic>
+      <p:sp>
+        <p:nvSpPr>
+          <p:cNvPr id="29" name="Text 23"/>
+          <p:cNvSpPr/>
+          <p:nvPr/>
+        </p:nvSpPr>
+        <p:spPr>
+          <a:xfrm>
+            <a:off x="8787384" y="4069080"/>
+            <a:ext cx="2788920" cy="384048"/>
+          </a:xfrm>
+          <a:prstGeom prst="rect">
+            <a:avLst/>
+          </a:prstGeom>
+          <a:noFill/>
+          <a:ln/>
+        </p:spPr>
+        <p:txBody>
+          <a:bodyPr wrap="square" rtlCol="0" anchor="ctr"/>
+          <a:lstStyle/>
+          <a:p>
+            <a:pPr indent="0" marL="0">
+              <a:buNone/>
+            </a:pPr>
+            <a:r>
+              <a:rPr lang="en-US" sz="1400" b="1" dirty="0">
+                <a:solidFill>
+                  <a:srgbClr val="1A1A2E"/>
+                </a:solidFill>
+                <a:latin typeface="Segoe UI" pitchFamily="34" charset="0"/>
+                <a:ea typeface="Segoe UI" pitchFamily="34" charset="-122"/>
+                <a:cs typeface="Segoe UI" pitchFamily="34" charset="-120"/>
+              </a:rPr>
+              <a:t>Claude</a:t>
+            </a:r>
+            <a:endParaRPr lang="en-US" sz="1400" dirty="0"/>
+          </a:p>
+        </p:txBody>
+      </p:sp>
+      <p:sp>
+        <p:nvSpPr>
+          <p:cNvPr id="30" name="Text 24"/>
+          <p:cNvSpPr/>
+          <p:nvPr/>
+        </p:nvSpPr>
+        <p:spPr>
+          <a:xfrm>
+            <a:off x="8421624" y="4480560"/>
+            <a:ext cx="3154680" cy="1143000"/>
+          </a:xfrm>
+          <a:prstGeom prst="rect">
+            <a:avLst/>
+          </a:prstGeom>
+          <a:noFill/>
+          <a:ln/>
+        </p:spPr>
+        <p:txBody>
+          <a:bodyPr wrap="square" rtlCol="0" anchor="t"/>
+          <a:lstStyle/>
+          <a:p>
+            <a:pPr indent="0" marL="0">
+              <a:lnSpc>
+                <a:spcPts val="1400"/>
+              </a:lnSpc>
+              <a:buNone/>
+            </a:pPr>
+            <a:r>
+              <a:rPr lang="en-US" sz="1050" dirty="0">
+                <a:solidFill>
+                  <a:srgbClr val="55556D"/>
+                </a:solidFill>
+                <a:latin typeface="Segoe UI" pitchFamily="34" charset="0"/>
+                <a:ea typeface="Segoe UI" pitchFamily="34" charset="-122"/>
+                <a:cs typeface="Segoe UI" pitchFamily="34" charset="-120"/>
+              </a:rPr>
+              <a:t>The same connector plugs your event data into Claude, read-only, per-client keys you control.</a:t>
+            </a:r>
+            <a:endParaRPr lang="en-US" sz="1050" dirty="0"/>
+          </a:p>
+        </p:txBody>
+      </p:sp>
+      <p:pic>
+        <p:nvPicPr>
+          <p:cNvPr id="31" name="Image 4" descr="owl-mark.png">    </p:cNvPr>
+          <p:cNvPicPr>
+            <a:picLocks noChangeAspect="1"/>
+          </p:cNvPicPr>
+          <p:nvPr/>
+        </p:nvPicPr>
+        <p:blipFill>
+          <a:blip r:embed="rId5"/>
+          <a:stretch>
+            <a:fillRect/>
+          </a:stretch>
+        </p:blipFill>
+        <p:spPr>
+          <a:xfrm>
             <a:off x="4956048" y="2331720"/>
             <a:ext cx="2286000" cy="2286000"/>
           </a:xfrm>
@@ -10330,7 +10426,7 @@
       </p:pic>
       <p:sp>
         <p:nvSpPr>
-          <p:cNvPr id="28" name="Shape 25"/>
+          <p:cNvPr id="32" name="Shape 25"/>
           <p:cNvSpPr/>
           <p:nvPr/>
         </p:nvSpPr>
@@ -10352,7 +10448,7 @@
       </p:sp>
       <p:sp>
         <p:nvSpPr>
-          <p:cNvPr id="29" name="Text 26"/>
+          <p:cNvPr id="33" name="Text 26"/>
           <p:cNvSpPr/>
           <p:nvPr/>
         </p:nvSpPr>
@@ -10405,7 +10501,7 @@
       </p:sp>
       <p:sp>
         <p:nvSpPr>
-          <p:cNvPr id="30" name="Shape 27"/>
+          <p:cNvPr id="34" name="Shape 27"/>
           <p:cNvSpPr/>
           <p:nvPr/>
         </p:nvSpPr>
@@ -10427,7 +10523,7 @@
       </p:sp>
       <p:sp>
         <p:nvSpPr>
-          <p:cNvPr id="31" name="Text 28"/>
+          <p:cNvPr id="35" name="Text 28"/>
           <p:cNvSpPr/>
           <p:nvPr/>
         </p:nvSpPr>
